--- a/docs/content/multiple_regression/multiple_regression_lecture.pptx
+++ b/docs/content/multiple_regression/multiple_regression_lecture.pptx
@@ -57,6 +57,8 @@
     <p:sldId id="305" r:id="rId51"/>
     <p:sldId id="306" r:id="rId52"/>
     <p:sldId id="307" r:id="rId53"/>
+    <p:sldId id="308" r:id="rId54"/>
+    <p:sldId id="309" r:id="rId55"/>
   </p:sldIdLst>
   <p:sldSz cx="9144000" cy="5143500" type="screen16x9"/>
   <p:notesSz cx="6858000" cy="9144000"/>
@@ -4181,7 +4183,7 @@
                 </a:solidFill>
                 <a:latin typeface="Courier"/>
               </a:rPr>
-              <a:t>model &lt;- </a:t>
+              <a:t>ant_model &lt;- </a:t>
             </a:r>
             <a:r>
               <a:rPr>
@@ -4272,7 +4274,7 @@
                 </a:solidFill>
                 <a:latin typeface="Courier"/>
               </a:rPr>
-              <a:t>(model)</a:t>
+              <a:t>(ant_model)</a:t>
             </a:r>
           </a:p>
           <a:p>
@@ -5680,7 +5682,7 @@
       </p:sp>
       <p:pic>
         <p:nvPicPr>
-          <p:cNvPr descr="multiple_regression_lecture_files/figure-pptx/unnamed-chunk-2-1.png" id="0" name="Picture 1"/>
+          <p:cNvPr descr="multiple_regression_lecture_files/figure-pptx/multiple-regression-02-1.png" id="0" name="Picture 1"/>
           <p:cNvPicPr>
             <a:picLocks noGrp="1" noChangeAspect="1"/>
           </p:cNvPicPr>
@@ -7129,7 +7131,7 @@
                 </a:solidFill>
                 <a:latin typeface="Courier"/>
               </a:rPr>
-              <a:t>(model, </a:t>
+              <a:t>(ant_model, </a:t>
             </a:r>
             <a:r>
               <a:rPr>
@@ -7172,7 +7174,7 @@
       </p:sp>
       <p:pic>
         <p:nvPicPr>
-          <p:cNvPr descr="multiple_regression_lecture_files/figure-pptx/unnamed-chunk-6-1.png" id="0" name="Picture 1"/>
+          <p:cNvPr descr="multiple_regression_lecture_files/figure-pptx/multiple-regression-06-1.png" id="0" name="Picture 1"/>
           <p:cNvPicPr>
             <a:picLocks noGrp="1" noChangeAspect="1"/>
           </p:cNvPicPr>
@@ -7294,7 +7296,7 @@
       </p:sp>
       <p:pic>
         <p:nvPicPr>
-          <p:cNvPr descr="multiple_regression_lecture_files/figure-pptx/unnamed-chunk-7-1.png" id="0" name="Picture 1"/>
+          <p:cNvPr descr="multiple_regression_lecture_files/figure-pptx/multiple-regression-07-1.png" id="0" name="Picture 1"/>
           <p:cNvPicPr>
             <a:picLocks noGrp="1" noChangeAspect="1"/>
           </p:cNvPicPr>
@@ -7476,7 +7478,7 @@
               <a:rPr sz="2000">
                 <a:latin typeface="Courier"/>
               </a:rPr>
-              <a:t>avPlots(model)</a:t>
+              <a:t>avPlots(ant_model)</a:t>
             </a:r>
           </a:p>
           <a:p>
@@ -7489,7 +7491,7 @@
               <a:rPr sz="2000">
                 <a:latin typeface="Courier"/>
               </a:rPr>
-              <a:t>avPlot(model, variable = "proportion_black")</a:t>
+              <a:t>avPlot(ant_model, variable = "elevation")</a:t>
             </a:r>
           </a:p>
           <a:p>
@@ -7537,12 +7539,9 @@
         </p:nvSpPr>
         <p:spPr>
           <a:xfrm>
-            <a:off x="0" y="0"/>
-            <a:ext cx="9144000" cy="602780"/>
+            <a:off x="139485" y="78119"/>
+            <a:ext cx="8229600" cy="607682"/>
           </a:xfrm>
-          <a:solidFill>
-            <a:srgbClr val="70121D"/>
-          </a:solidFill>
         </p:spPr>
         <p:txBody>
           <a:bodyPr/>
@@ -7560,12 +7559,12 @@
       </p:sp>
       <p:sp>
         <p:nvSpPr>
-          <p:cNvPr id="3" name="Content Placeholder 2"/>
-          <p:cNvSpPr>
-            <a:spLocks noGrp="1"/>
-          </p:cNvSpPr>
-          <p:nvPr>
-            <p:ph idx="1" sz="half"/>
+          <p:cNvPr id="3" name="Text Placeholder 2"/>
+          <p:cNvSpPr>
+            <a:spLocks noGrp="1"/>
+          </p:cNvSpPr>
+          <p:nvPr>
+            <p:ph idx="1" type="body"/>
           </p:nvPr>
         </p:nvSpPr>
         <p:spPr/>
@@ -7581,11 +7580,261 @@
               <a:t>Regressing Y vs. each X separately does not consider the effect of other predictors — but we want to know the shape of the relationship while holding other predictors constant.</a:t>
             </a:r>
           </a:p>
+          <a:p>
+            <a:pPr lvl="0" indent="0" marL="0">
+              <a:buNone/>
+            </a:pPr>
+            <a:r>
+              <a:rPr b="1"/>
+              <a:t>Compare the slopes:</a:t>
+            </a:r>
+          </a:p>
+        </p:txBody>
+      </p:sp>
+      <p:graphicFrame>
+        <p:nvGraphicFramePr>
+          <p:cNvPr id="6" name="Content Placeholder 5"/>
+          <p:cNvGraphicFramePr>
+            <a:graphicFrameLocks noGrp="1"/>
+          </p:cNvGraphicFramePr>
+          <p:nvPr>
+            <p:ph idx="1"/>
+          </p:nvPr>
+        </p:nvGraphicFramePr>
+        <p:xfrm>
+          <a:off x="127000" y="1270000"/>
+          <a:ext cx="4432300" cy="3302000"/>
+        </p:xfrm>
+        <a:graphic>
+          <a:graphicData uri="http://schemas.openxmlformats.org/drawingml/2006/table">
+            <a:tbl>
+              <a:tblPr firstRow="1" bandRow="1">
+                <a:tableStyleId>{5C22544A-7EE6-4342-B048-85BDC9FD1C3A}</a:tableStyleId>
+              </a:tblPr>
+              <a:tblGrid>
+                <a:gridCol w="1473200"/>
+                <a:gridCol w="1473200"/>
+                <a:gridCol w="1473200"/>
+              </a:tblGrid>
+              <a:tr h="0">
+                <a:tc>
+                  <a:txBody>
+                    <a:bodyPr/>
+                    <a:lstStyle/>
+                    <a:p>
+                      <a:pPr lvl="0" indent="0" marL="0">
+                        <a:buNone/>
+                      </a:pPr>
+                      <a:r>
+                        <a:rPr/>
+                        <a:t>Predictor</a:t>
+                      </a:r>
+                    </a:p>
+                  </a:txBody>
+                  <a:tcPr/>
+                </a:tc>
+                <a:tc>
+                  <a:txBody>
+                    <a:bodyPr/>
+                    <a:lstStyle/>
+                    <a:p>
+                      <a:pPr lvl="0" indent="0" marL="0">
+                        <a:buNone/>
+                      </a:pPr>
+                      <a:r>
+                        <a:rPr/>
+                        <a:t>Alone</a:t>
+                      </a:r>
+                    </a:p>
+                  </a:txBody>
+                  <a:tcPr/>
+                </a:tc>
+                <a:tc>
+                  <a:txBody>
+                    <a:bodyPr/>
+                    <a:lstStyle/>
+                    <a:p>
+                      <a:pPr lvl="0" indent="0" marL="0">
+                        <a:buNone/>
+                      </a:pPr>
+                      <a:r>
+                        <a:rPr/>
+                        <a:t>Controlling for the other</a:t>
+                      </a:r>
+                    </a:p>
+                  </a:txBody>
+                  <a:tcPr/>
+                </a:tc>
+              </a:tr>
+              <a:tr h="0">
+                <a:tc>
+                  <a:txBody>
+                    <a:bodyPr/>
+                    <a:lstStyle/>
+                    <a:p>
+                      <a:pPr lvl="0" indent="0" marL="0">
+                        <a:buNone/>
+                      </a:pPr>
+                      <a:r>
+                        <a:rPr/>
+                        <a:t>elevation</a:t>
+                      </a:r>
+                    </a:p>
+                  </a:txBody>
+                </a:tc>
+                <a:tc>
+                  <a:txBody>
+                    <a:bodyPr/>
+                    <a:lstStyle/>
+                    <a:p>
+                      <a:pPr lvl="0" indent="0" marL="0">
+                        <a:buNone/>
+                      </a:pPr>
+                      <a:r>
+                        <a:rPr/>
+                        <a:t>−0.0146</a:t>
+                      </a:r>
+                    </a:p>
+                  </a:txBody>
+                </a:tc>
+                <a:tc>
+                  <a:txBody>
+                    <a:bodyPr/>
+                    <a:lstStyle/>
+                    <a:p>
+                      <a:pPr lvl="0" indent="0" marL="0">
+                        <a:buNone/>
+                      </a:pPr>
+                      <a:r>
+                        <a:rPr b="1"/>
+                        <a:t>−0.0123</a:t>
+                      </a:r>
+                    </a:p>
+                  </a:txBody>
+                </a:tc>
+              </a:tr>
+              <a:tr h="0">
+                <a:tc>
+                  <a:txBody>
+                    <a:bodyPr/>
+                    <a:lstStyle/>
+                    <a:p>
+                      <a:pPr lvl="0" indent="0" marL="0">
+                        <a:buNone/>
+                      </a:pPr>
+                      <a:r>
+                        <a:rPr/>
+                        <a:t>latitude</a:t>
+                      </a:r>
+                    </a:p>
+                  </a:txBody>
+                </a:tc>
+                <a:tc>
+                  <a:txBody>
+                    <a:bodyPr/>
+                    <a:lstStyle/>
+                    <a:p>
+                      <a:pPr lvl="0" indent="0" marL="0">
+                        <a:buNone/>
+                      </a:pPr>
+                      <a:r>
+                        <a:rPr/>
+                        <a:t>−2.340</a:t>
+                      </a:r>
+                    </a:p>
+                  </a:txBody>
+                </a:tc>
+                <a:tc>
+                  <a:txBody>
+                    <a:bodyPr/>
+                    <a:lstStyle/>
+                    <a:p>
+                      <a:pPr lvl="0" indent="0" marL="0">
+                        <a:buNone/>
+                      </a:pPr>
+                      <a:r>
+                        <a:rPr b="1"/>
+                        <a:t>−2.010</a:t>
+                      </a:r>
+                    </a:p>
+                  </a:txBody>
+                </a:tc>
+              </a:tr>
+            </a:tbl>
+          </a:graphicData>
+        </a:graphic>
+      </p:graphicFrame>
+      <p:sp>
+        <p:nvSpPr>
+          <p:cNvPr id="4" name="Content Placeholder 3"/>
+          <p:cNvSpPr>
+            <a:spLocks noGrp="1"/>
+          </p:cNvSpPr>
+          <p:nvPr>
+            <p:ph idx="2" sz="half"/>
+          </p:nvPr>
+        </p:nvSpPr>
+        <p:spPr/>
+        <p:txBody>
+          <a:bodyPr/>
+          <a:lstStyle/>
+          <a:p>
+            <a:pPr lvl="0" indent="0" marL="0">
+              <a:buNone/>
+            </a:pPr>
+            <a:r>
+              <a:rPr/>
+              <a:t>Both shrink a little once the other predictor is in the model — each was taking a small amount of credit that belonged to the other.</a:t>
+            </a:r>
+          </a:p>
+          <a:p>
+            <a:pPr lvl="0" indent="0" marL="1270000">
+              <a:buNone/>
+            </a:pPr>
+            <a:r>
+              <a:rPr sz="2000" b="1"/>
+              <a:t>Note</a:t>
+            </a:r>
+          </a:p>
+          <a:p>
+            <a:pPr lvl="0" indent="0" marL="1270000">
+              <a:buNone/>
+            </a:pPr>
+            <a:r>
+              <a:rPr sz="2000" b="1"/>
+              <a:t>✅ Why only “a little” here?</a:t>
+            </a:r>
+          </a:p>
+          <a:p>
+            <a:pPr lvl="0" indent="0" marL="1270000">
+              <a:buNone/>
+            </a:pPr>
+            <a:r>
+              <a:rPr sz="2000"/>
+              <a:t>Because elevation and latitude are </a:t>
+            </a:r>
+            <a:r>
+              <a:rPr sz="2000" b="1"/>
+              <a:t>nearly independent</a:t>
+            </a:r>
+            <a:r>
+              <a:rPr sz="2000"/>
+              <a:t> in these data (r = 0.18). When predictors </a:t>
+            </a:r>
+            <a:r>
+              <a:rPr sz="2000" i="1"/>
+              <a:t>are</a:t>
+            </a:r>
+            <a:r>
+              <a:rPr sz="2000"/>
+              <a:t> strongly correlated, the same comparison can change a slope’s size dramatically — or even flip its sign.</a:t>
+            </a:r>
+          </a:p>
         </p:txBody>
       </p:sp>
       <p:pic>
         <p:nvPicPr>
-          <p:cNvPr descr="multiple_regression_lecture_files/figure-pptx/unnamed-chunk-8-1.png" id="0" name="Picture 1"/>
+          <p:cNvPr descr="multiple_regression_lecture_files/figure-pptx/multiple-regression-08-1.png" id="0" name="Picture 1"/>
           <p:cNvPicPr>
             <a:picLocks noGrp="1" noChangeAspect="1"/>
           </p:cNvPicPr>
@@ -7599,8 +7848,8 @@
         </p:blipFill>
         <p:spPr bwMode="auto">
           <a:xfrm>
-            <a:off x="6121400" y="1498600"/>
-            <a:ext cx="2781300" cy="2781300"/>
+            <a:off x="5130800" y="1295400"/>
+            <a:ext cx="3276600" cy="3276600"/>
           </a:xfrm>
           <a:prstGeom prst="rect">
             <a:avLst/>
@@ -7930,94 +8179,173 @@
                 <a:pPr lvl="0"/>
                 <a:r>
                   <a:rPr b="1"/>
-                  <a:t>Variance Inflation Factors (VIF)</a:t>
+                  <a:t>Variance Inflation Factors (VIF):</a:t>
                 </a:r>
+              </a:p>
+              <a:p>
+                <a:pPr lvl="0" indent="0" marL="0">
+                  <a:buNone/>
+                </a:pPr>
+                <a14:m>
+                  <m:oMathPara xmlns:m="http://schemas.openxmlformats.org/officeDocument/2006/math">
+                    <m:oMathParaPr>
+                      <m:jc m:val="center"/>
+                    </m:oMathParaPr>
+                    <m:oMath>
+                      <m:r>
+                        <m:t>V</m:t>
+                      </m:r>
+                      <m:r>
+                        <m:t>I</m:t>
+                      </m:r>
+                      <m:sSub>
+                        <m:e>
+                          <m:r>
+                            <m:t>F</m:t>
+                          </m:r>
+                        </m:e>
+                        <m:sub>
+                          <m:sSub>
+                            <m:e>
+                              <m:r>
+                                <m:t>X</m:t>
+                              </m:r>
+                            </m:e>
+                            <m:sub>
+                              <m:r>
+                                <m:t>j</m:t>
+                              </m:r>
+                            </m:sub>
+                          </m:sSub>
+                        </m:sub>
+                      </m:sSub>
+                      <m:r>
+                        <m:rPr>
+                          <m:sty m:val="p"/>
+                        </m:rPr>
+                        <m:t>=</m:t>
+                      </m:r>
+                      <m:f>
+                        <m:fPr>
+                          <m:type m:val="bar"/>
+                        </m:fPr>
+                        <m:num>
+                          <m:r>
+                            <m:t>1</m:t>
+                          </m:r>
+                        </m:num>
+                        <m:den>
+                          <m:r>
+                            <m:t>1</m:t>
+                          </m:r>
+                          <m:r>
+                            <m:rPr>
+                              <m:sty m:val="p"/>
+                            </m:rPr>
+                            <m:t>−</m:t>
+                          </m:r>
+                          <m:sSubSup>
+                            <m:e>
+                              <m:r>
+                                <m:t>R</m:t>
+                              </m:r>
+                            </m:e>
+                            <m:sub>
+                              <m:r>
+                                <m:t>j</m:t>
+                              </m:r>
+                            </m:sub>
+                            <m:sup>
+                              <m:r>
+                                <m:t>2</m:t>
+                              </m:r>
+                            </m:sup>
+                          </m:sSubSup>
+                        </m:den>
+                      </m:f>
+                    </m:oMath>
+                  </m:oMathPara>
+                </a14:m>
+              </a:p>
+              <a:p>
+                <a:pPr lvl="0" indent="0" marL="0">
+                  <a:buNone/>
+                </a:pPr>
                 <a:r>
                   <a:rPr/>
-                  <a:t>: </a:t>
+                  <a:t>where </a:t>
                 </a:r>
                 <a14:m>
                   <m:oMath xmlns:m="http://schemas.openxmlformats.org/officeDocument/2006/math">
-                    <m:r>
-                      <m:t>V</m:t>
-                    </m:r>
-                    <m:r>
-                      <m:t>I</m:t>
-                    </m:r>
-                    <m:sSub>
+                    <m:sSubSup>
                       <m:e>
                         <m:r>
-                          <m:t>F</m:t>
+                          <m:t>R</m:t>
                         </m:r>
                       </m:e>
                       <m:sub>
-                        <m:sSub>
-                          <m:e>
-                            <m:r>
-                              <m:t>X</m:t>
-                            </m:r>
-                          </m:e>
-                          <m:sub>
-                            <m:r>
-                              <m:t>j</m:t>
-                            </m:r>
-                          </m:sub>
-                        </m:sSub>
+                        <m:r>
+                          <m:t>j</m:t>
+                        </m:r>
                       </m:sub>
-                    </m:sSub>
-                    <m:r>
-                      <m:rPr>
-                        <m:sty m:val="p"/>
-                      </m:rPr>
-                      <m:t>=</m:t>
-                    </m:r>
-                    <m:r>
-                      <m:t>1</m:t>
-                    </m:r>
-                    <m:r>
-                      <m:rPr>
-                        <m:sty m:val="p"/>
-                      </m:rPr>
-                      <m:t>/</m:t>
-                    </m:r>
-                    <m:r>
-                      <m:rPr>
-                        <m:sty m:val="p"/>
-                      </m:rPr>
-                      <m:t>(</m:t>
-                    </m:r>
-                    <m:r>
-                      <m:t>1</m:t>
-                    </m:r>
-                    <m:r>
-                      <m:rPr>
-                        <m:sty m:val="p"/>
-                      </m:rPr>
-                      <m:t>−</m:t>
-                    </m:r>
-                    <m:sSup>
-                      <m:e>
-                        <m:r>
-                          <m:t>r</m:t>
-                        </m:r>
-                      </m:e>
                       <m:sup>
                         <m:r>
                           <m:t>2</m:t>
                         </m:r>
                       </m:sup>
-                    </m:sSup>
-                    <m:r>
-                      <m:rPr>
-                        <m:sty m:val="p"/>
-                      </m:rPr>
-                      <m:t>)</m:t>
-                    </m:r>
+                    </m:sSubSup>
                   </m:oMath>
                 </a14:m>
                 <a:r>
                   <a:rPr/>
-                  <a:t>; VIF &gt; 10 = bad</a:t>
+                  <a:t> is the R² you get from regressing </a:t>
+                </a:r>
+                <a14:m>
+                  <m:oMath xmlns:m="http://schemas.openxmlformats.org/officeDocument/2006/math">
+                    <m:sSub>
+                      <m:e>
+                        <m:r>
+                          <m:t>X</m:t>
+                        </m:r>
+                      </m:e>
+                      <m:sub>
+                        <m:r>
+                          <m:t>j</m:t>
+                        </m:r>
+                      </m:sub>
+                    </m:sSub>
+                  </m:oMath>
+                </a14:m>
+                <a:r>
+                  <a:rPr b="1"/>
+                  <a:t> on all the </a:t>
+                </a:r>
+                <a:r>
+                  <a:rPr b="1" i="1"/>
+                  <a:t>other</a:t>
+                </a:r>
+                <a:r>
+                  <a:rPr b="1"/>
+                  <a:t> predictors</a:t>
+                </a:r>
+                <a:r>
+                  <a:rPr/>
+                  <a:t> — not the pairwise correlation between two of them. (With only two predictors those happen to coincide; with three or more they do not.)</a:t>
+                </a:r>
+              </a:p>
+              <a:p>
+                <a:pPr lvl="0"/>
+                <a:r>
+                  <a:rPr/>
+                  <a:t>Rule of thumb: </a:t>
+                </a:r>
+                <a:r>
+                  <a:rPr b="1"/>
+                  <a:t>VIF &gt; 10 is bad</a:t>
+                </a:r>
+                <a:r>
+                  <a:rPr/>
+                  <a:t>; some authors use &gt; 5</a:t>
                 </a:r>
               </a:p>
               <a:p>
@@ -8027,6 +8355,51 @@
                   <a:t>Best/simplest solution: exclude variables that are highly correlated with other variables — they’re probably measuring similar things and are redundant</a:t>
                 </a:r>
               </a:p>
+              <a:p>
+                <a:pPr lvl="0" indent="0">
+                  <a:buNone/>
+                </a:pPr>
+                <a:r>
+                  <a:rPr>
+                    <a:solidFill>
+                      <a:srgbClr val="5E5E5E"/>
+                    </a:solidFill>
+                    <a:latin typeface="Courier"/>
+                  </a:rPr>
+                  <a:t># car::vif() does this for you</a:t>
+                </a:r>
+                <a:br/>
+                <a:r>
+                  <a:rPr>
+                    <a:solidFill>
+                      <a:srgbClr val="4758AB"/>
+                    </a:solidFill>
+                    <a:latin typeface="Courier"/>
+                  </a:rPr>
+                  <a:t>vif</a:t>
+                </a:r>
+                <a:r>
+                  <a:rPr>
+                    <a:solidFill>
+                      <a:srgbClr val="003B4F"/>
+                    </a:solidFill>
+                    <a:latin typeface="Courier"/>
+                  </a:rPr>
+                  <a:t>(ant_model)</a:t>
+                </a:r>
+              </a:p>
+              <a:p>
+                <a:pPr lvl="0" indent="0">
+                  <a:buNone/>
+                </a:pPr>
+                <a:r>
+                  <a:rPr>
+                    <a:latin typeface="Courier"/>
+                  </a:rPr>
+                  <a:t>elevation  latitude 
+ 1.033004  1.033004 </a:t>
+                </a:r>
+              </a:p>
             </p:txBody>
           </p:sp>
         </mc:Choice>
@@ -8078,6 +8451,50 @@
             <a:r>
               <a:rPr sz="2000"/>
               <a:t> partial slopes for the correlated predictors, even if the overall model fits well.</a:t>
+            </a:r>
+          </a:p>
+          <a:p>
+            <a:pPr lvl="0" indent="0" marL="1270000">
+              <a:buNone/>
+            </a:pPr>
+            <a:r>
+              <a:rPr sz="2000" b="1"/>
+              <a:t>Tip</a:t>
+            </a:r>
+          </a:p>
+          <a:p>
+            <a:pPr lvl="0" indent="0" marL="1270000">
+              <a:buNone/>
+            </a:pPr>
+            <a:r>
+              <a:rPr sz="2000" b="1"/>
+              <a:t>🖐 Our ants are fine</a:t>
+            </a:r>
+          </a:p>
+          <a:p>
+            <a:pPr lvl="0" indent="0" marL="1270000">
+              <a:buNone/>
+            </a:pPr>
+            <a:r>
+              <a:rPr sz="2000"/>
+              <a:t>Both VIFs are about </a:t>
+            </a:r>
+            <a:r>
+              <a:rPr sz="2000" b="1"/>
+              <a:t>1.03</a:t>
+            </a:r>
+            <a:r>
+              <a:rPr sz="2000"/>
+              <a:t> — essentially no inflation. Latitude and elevation are nearly independent here, which is why each partial slope is interpretable on its own.</a:t>
+            </a:r>
+          </a:p>
+          <a:p>
+            <a:pPr lvl="0" indent="0" marL="1270000">
+              <a:buNone/>
+            </a:pPr>
+            <a:r>
+              <a:rPr sz="2000"/>
+              <a:t>A VIF of 1 means “this predictor shares nothing with the others.” That is the ideal, and it is rarer than you would like.</a:t>
             </a:r>
           </a:p>
         </p:txBody>
@@ -8733,7 +9150,7 @@
       </p:sp>
       <p:pic>
         <p:nvPicPr>
-          <p:cNvPr descr="multiple_regression_lecture_files/figure-pptx/unnamed-chunk-10-1.png" id="0" name="Picture 1"/>
+          <p:cNvPr descr="multiple_regression_lecture_files/figure-pptx/multiple-regression-11-1.png" id="0" name="Picture 1"/>
           <p:cNvPicPr>
             <a:picLocks noGrp="1" noChangeAspect="1"/>
           </p:cNvPicPr>
@@ -12856,6 +13273,566 @@
 </p:sld>
 </file>
 
+<file path=ppt/slides/slide53.xml><?xml version="1.0" encoding="utf-8"?>
+<p:sld xmlns:a="http://schemas.openxmlformats.org/drawingml/2006/main" xmlns:r="http://schemas.openxmlformats.org/officeDocument/2006/relationships" xmlns:p="http://schemas.openxmlformats.org/presentationml/2006/main">
+  <p:cSld>
+    <p:spTree>
+      <p:nvGrpSpPr>
+        <p:cNvPr id="1" name=""/>
+        <p:cNvGrpSpPr/>
+        <p:nvPr/>
+      </p:nvGrpSpPr>
+      <p:grpSpPr>
+        <a:xfrm>
+          <a:off x="0" y="0"/>
+          <a:ext cx="0" cy="0"/>
+          <a:chOff x="0" y="0"/>
+          <a:chExt cx="0" cy="0"/>
+        </a:xfrm>
+      </p:grpSpPr>
+      <p:sp>
+        <p:nvSpPr>
+          <p:cNvPr id="2" name="Title 1"/>
+          <p:cNvSpPr>
+            <a:spLocks noGrp="1"/>
+          </p:cNvSpPr>
+          <p:nvPr>
+            <p:ph type="title"/>
+          </p:nvPr>
+        </p:nvSpPr>
+        <p:spPr>
+          <a:xfrm>
+            <a:off x="0" y="0"/>
+            <a:ext cx="9144000" cy="602780"/>
+          </a:xfrm>
+          <a:solidFill>
+            <a:srgbClr val="70121D"/>
+          </a:solidFill>
+        </p:spPr>
+        <p:txBody>
+          <a:bodyPr/>
+          <a:lstStyle/>
+          <a:p>
+            <a:pPr lvl="0" indent="0" marL="0">
+              <a:buNone/>
+            </a:pPr>
+            <a:r>
+              <a:rPr/>
+              <a:t>Wrap-up</a:t>
+            </a:r>
+          </a:p>
+        </p:txBody>
+      </p:sp>
+      <p:sp>
+        <p:nvSpPr>
+          <p:cNvPr id="3" name="Content Placeholder 2"/>
+          <p:cNvSpPr>
+            <a:spLocks noGrp="1"/>
+          </p:cNvSpPr>
+          <p:nvPr>
+            <p:ph idx="1" sz="half"/>
+          </p:nvPr>
+        </p:nvSpPr>
+        <p:spPr/>
+        <p:txBody>
+          <a:bodyPr/>
+          <a:lstStyle/>
+          <a:p>
+            <a:pPr lvl="0" indent="0" marL="0">
+              <a:buNone/>
+            </a:pPr>
+            <a:r>
+              <a:rPr/>
+              <a:t>Today you:</a:t>
+            </a:r>
+          </a:p>
+          <a:p>
+            <a:pPr lvl="0"/>
+            <a:r>
+              <a:rPr/>
+              <a:t>Extended the regression line to a </a:t>
+            </a:r>
+            <a:r>
+              <a:rPr b="1"/>
+              <a:t>plane</a:t>
+            </a:r>
+            <a:r>
+              <a:rPr/>
+              <a:t> — two or more predictors at once</a:t>
+            </a:r>
+          </a:p>
+          <a:p>
+            <a:pPr lvl="0"/>
+            <a:r>
+              <a:rPr/>
+              <a:t>Learned to read a </a:t>
+            </a:r>
+            <a:r>
+              <a:rPr b="1"/>
+              <a:t>partial slope</a:t>
+            </a:r>
+            <a:r>
+              <a:rPr/>
+              <a:t>: the effect of one predictor </a:t>
+            </a:r>
+            <a:r>
+              <a:rPr i="1"/>
+              <a:t>holding the others constant</a:t>
+            </a:r>
+            <a:r>
+              <a:rPr/>
+              <a:t>, which is not the same as its slope on its own</a:t>
+            </a:r>
+          </a:p>
+          <a:p>
+            <a:pPr lvl="0"/>
+            <a:r>
+              <a:rPr/>
+              <a:t>Tested the whole model with an </a:t>
+            </a:r>
+            <a:r>
+              <a:rPr b="1"/>
+              <a:t>overall F</a:t>
+            </a:r>
+            <a:r>
+              <a:rPr/>
+              <a:t>, and single predictors with </a:t>
+            </a:r>
+            <a:r>
+              <a:rPr b="1"/>
+              <a:t>partial F-tests</a:t>
+            </a:r>
+          </a:p>
+          <a:p>
+            <a:pPr lvl="0"/>
+            <a:r>
+              <a:rPr/>
+              <a:t>Diagnosed </a:t>
+            </a:r>
+            <a:r>
+              <a:rPr b="1"/>
+              <a:t>collinearity</a:t>
+            </a:r>
+            <a:r>
+              <a:rPr/>
+              <a:t> with </a:t>
+            </a:r>
+            <a:r>
+              <a:rPr>
+                <a:latin typeface="Courier"/>
+              </a:rPr>
+              <a:t>vif()</a:t>
+            </a:r>
+            <a:r>
+              <a:rPr/>
+              <a:t>, and saw why a high VIF poisons the individual slopes without necessarily hurting the fit</a:t>
+            </a:r>
+          </a:p>
+          <a:p>
+            <a:pPr lvl="0"/>
+            <a:r>
+              <a:rPr/>
+              <a:t>Fitted an </a:t>
+            </a:r>
+            <a:r>
+              <a:rPr b="1"/>
+              <a:t>interaction</a:t>
+            </a:r>
+            <a:r>
+              <a:rPr/>
+              <a:t> and paid for it in degrees of freedom and interpretability</a:t>
+            </a:r>
+          </a:p>
+          <a:p>
+            <a:pPr lvl="0"/>
+            <a:r>
+              <a:rPr/>
+              <a:t>Coded a categorical predictor as </a:t>
+            </a:r>
+            <a:r>
+              <a:rPr b="1"/>
+              <a:t>dummy variables</a:t>
+            </a:r>
+            <a:r>
+              <a:rPr/>
+              <a:t> against a reference level</a:t>
+            </a:r>
+          </a:p>
+          <a:p>
+            <a:pPr lvl="0"/>
+            <a:r>
+              <a:rPr/>
+              <a:t>Compared models with </a:t>
+            </a:r>
+            <a:r>
+              <a:rPr b="1"/>
+              <a:t>adjusted R²</a:t>
+            </a:r>
+            <a:r>
+              <a:rPr/>
+              <a:t> and </a:t>
+            </a:r>
+            <a:r>
+              <a:rPr b="1"/>
+              <a:t>AIC</a:t>
+            </a:r>
+            <a:r>
+              <a:rPr/>
+              <a:t>, which penalize you for adding predictors</a:t>
+            </a:r>
+          </a:p>
+          <a:p>
+            <a:pPr lvl="0"/>
+            <a:r>
+              <a:rPr/>
+              <a:t>Ranked predictors by partial F, partial R², and standardized slopes</a:t>
+            </a:r>
+          </a:p>
+          <a:p>
+            <a:pPr lvl="0" indent="0" marL="1270000">
+              <a:buNone/>
+            </a:pPr>
+            <a:r>
+              <a:rPr sz="2000" b="1"/>
+              <a:t>Important</a:t>
+            </a:r>
+          </a:p>
+          <a:p>
+            <a:pPr lvl="0" indent="0" marL="1270000">
+              <a:buNone/>
+            </a:pPr>
+            <a:r>
+              <a:rPr sz="2000" b="1"/>
+              <a:t>⚠️ The trap to remember</a:t>
+            </a:r>
+          </a:p>
+          <a:p>
+            <a:pPr lvl="0" indent="0" marL="1270000">
+              <a:buNone/>
+            </a:pPr>
+            <a:r>
+              <a:rPr sz="2000"/>
+              <a:t>Adding predictors </a:t>
+            </a:r>
+            <a:r>
+              <a:rPr sz="2000" b="1"/>
+              <a:t>always</a:t>
+            </a:r>
+            <a:r>
+              <a:rPr sz="2000"/>
+              <a:t> raises plain R². That is why we never compare models on R² alone — adjusted R² and AIC exist precisely because “it explains more variance” is not the same as “it is a better model.”</a:t>
+            </a:r>
+          </a:p>
+        </p:txBody>
+      </p:sp>
+      <p:sp>
+        <p:nvSpPr>
+          <p:cNvPr id="4" name="Content Placeholder 3"/>
+          <p:cNvSpPr>
+            <a:spLocks noGrp="1"/>
+          </p:cNvSpPr>
+          <p:nvPr>
+            <p:ph idx="2" sz="half"/>
+          </p:nvPr>
+        </p:nvSpPr>
+        <p:spPr/>
+        <p:txBody>
+          <a:bodyPr/>
+          <a:lstStyle/>
+          <a:p>
+            <a:pPr lvl="0" indent="0" marL="1270000">
+              <a:buNone/>
+            </a:pPr>
+            <a:r>
+              <a:rPr sz="2000" b="1"/>
+              <a:t>Note</a:t>
+            </a:r>
+          </a:p>
+          <a:p>
+            <a:pPr lvl="0" indent="0" marL="1270000">
+              <a:buNone/>
+            </a:pPr>
+            <a:r>
+              <a:rPr sz="2000" b="1"/>
+              <a:t>✅ The one idea to keep</a:t>
+            </a:r>
+          </a:p>
+          <a:p>
+            <a:pPr lvl="0" indent="0" marL="1270000">
+              <a:buNone/>
+            </a:pPr>
+            <a:r>
+              <a:rPr sz="2000"/>
+              <a:t>A partial slope answers a </a:t>
+            </a:r>
+            <a:r>
+              <a:rPr sz="2000" i="1"/>
+              <a:t>conditional</a:t>
+            </a:r>
+            <a:r>
+              <a:rPr sz="2000"/>
+              <a:t> question — “what does elevation do among sites at the same latitude?” Change which other predictors are in the model and you have changed the question, so the number is allowed to change too.</a:t>
+            </a:r>
+          </a:p>
+          <a:p>
+            <a:pPr lvl="0" indent="0" marL="1270000">
+              <a:buNone/>
+            </a:pPr>
+            <a:r>
+              <a:rPr sz="2000" b="1"/>
+              <a:t>Note</a:t>
+            </a:r>
+          </a:p>
+          <a:p>
+            <a:pPr lvl="0" indent="0" marL="1270000">
+              <a:buNone/>
+            </a:pPr>
+            <a:r>
+              <a:rPr sz="2000" b="1"/>
+              <a:t>Up next — Analysis of Variance</a:t>
+            </a:r>
+          </a:p>
+          <a:p>
+            <a:pPr lvl="0"/>
+            <a:r>
+              <a:rPr sz="2000"/>
+              <a:t>What happens when every predictor is categorical</a:t>
+            </a:r>
+          </a:p>
+          <a:p>
+            <a:pPr lvl="0"/>
+            <a:r>
+              <a:rPr sz="2000"/>
+              <a:t>Why ANOVA and regression are the same machinery wearing different clothes</a:t>
+            </a:r>
+          </a:p>
+        </p:txBody>
+      </p:sp>
+    </p:spTree>
+  </p:cSld>
+</p:sld>
+</file>
+
+<file path=ppt/slides/slide54.xml><?xml version="1.0" encoding="utf-8"?>
+<p:sld xmlns:a="http://schemas.openxmlformats.org/drawingml/2006/main" xmlns:r="http://schemas.openxmlformats.org/officeDocument/2006/relationships" xmlns:p="http://schemas.openxmlformats.org/presentationml/2006/main">
+  <p:cSld>
+    <p:spTree>
+      <p:nvGrpSpPr>
+        <p:cNvPr id="1" name=""/>
+        <p:cNvGrpSpPr/>
+        <p:nvPr/>
+      </p:nvGrpSpPr>
+      <p:grpSpPr>
+        <a:xfrm>
+          <a:off x="0" y="0"/>
+          <a:ext cx="0" cy="0"/>
+          <a:chOff x="0" y="0"/>
+          <a:chExt cx="0" cy="0"/>
+        </a:xfrm>
+      </p:grpSpPr>
+      <p:sp>
+        <p:nvSpPr>
+          <p:cNvPr id="2" name="Title 1"/>
+          <p:cNvSpPr>
+            <a:spLocks noGrp="1"/>
+          </p:cNvSpPr>
+          <p:nvPr>
+            <p:ph type="title"/>
+          </p:nvPr>
+        </p:nvSpPr>
+        <p:spPr>
+          <a:xfrm>
+            <a:off x="0" y="0"/>
+            <a:ext cx="9144000" cy="582780"/>
+          </a:xfrm>
+        </p:spPr>
+        <p:txBody>
+          <a:bodyPr/>
+          <a:lstStyle/>
+          <a:p>
+            <a:pPr lvl="0" indent="0" marL="0">
+              <a:buNone/>
+            </a:pPr>
+            <a:r>
+              <a:rPr/>
+              <a:t>Getting unstuck</a:t>
+            </a:r>
+          </a:p>
+        </p:txBody>
+      </p:sp>
+      <p:sp>
+        <p:nvSpPr>
+          <p:cNvPr id="3" name="Content Placeholder 2"/>
+          <p:cNvSpPr>
+            <a:spLocks noGrp="1"/>
+          </p:cNvSpPr>
+          <p:nvPr>
+            <p:ph idx="1"/>
+          </p:nvPr>
+        </p:nvSpPr>
+        <p:spPr/>
+        <p:txBody>
+          <a:bodyPr/>
+          <a:lstStyle/>
+          <a:p>
+            <a:pPr lvl="0" indent="0" marL="0">
+              <a:buNone/>
+            </a:pPr>
+            <a:r>
+              <a:rPr/>
+              <a:t>When code breaks — and it will, that is normal:</a:t>
+            </a:r>
+          </a:p>
+          <a:p>
+            <a:pPr lvl="0" indent="-342900" marL="342900">
+              <a:buAutoNum type="arabicPeriod"/>
+            </a:pPr>
+            <a:r>
+              <a:rPr/>
+              <a:t>Read the </a:t>
+            </a:r>
+            <a:r>
+              <a:rPr b="1"/>
+              <a:t>error message</a:t>
+            </a:r>
+            <a:r>
+              <a:rPr/>
+              <a:t> out loud; it usually names the line</a:t>
+            </a:r>
+          </a:p>
+          <a:p>
+            <a:pPr lvl="0" indent="-342900" marL="342900">
+              <a:buAutoNum type="arabicPeriod"/>
+            </a:pPr>
+            <a:r>
+              <a:rPr/>
+              <a:t>Check the usual suspects: is it </a:t>
+            </a:r>
+            <a:r>
+              <a:rPr>
+                <a:latin typeface="Courier"/>
+              </a:rPr>
+              <a:t>y ~ x1 + x2</a:t>
+            </a:r>
+            <a:r>
+              <a:rPr/>
+              <a:t> (additive) or </a:t>
+            </a:r>
+            <a:r>
+              <a:rPr>
+                <a:latin typeface="Courier"/>
+              </a:rPr>
+              <a:t>y ~ x1 * x2</a:t>
+            </a:r>
+            <a:r>
+              <a:rPr/>
+              <a:t> (interaction)? Is </a:t>
+            </a:r>
+            <a:r>
+              <a:rPr>
+                <a:latin typeface="Courier"/>
+              </a:rPr>
+              <a:t>car</a:t>
+            </a:r>
+            <a:r>
+              <a:rPr/>
+              <a:t> loaded for </a:t>
+            </a:r>
+            <a:r>
+              <a:rPr>
+                <a:latin typeface="Courier"/>
+              </a:rPr>
+              <a:t>vif()</a:t>
+            </a:r>
+            <a:r>
+              <a:rPr/>
+              <a:t>? Are you comparing models fitted to the </a:t>
+            </a:r>
+            <a:r>
+              <a:rPr b="1"/>
+              <a:t>same rows</a:t>
+            </a:r>
+            <a:r>
+              <a:rPr/>
+              <a:t> — an </a:t>
+            </a:r>
+            <a:r>
+              <a:rPr>
+                <a:latin typeface="Courier"/>
+              </a:rPr>
+              <a:t>NA</a:t>
+            </a:r>
+            <a:r>
+              <a:rPr/>
+              <a:t> in one predictor silently drops that row</a:t>
+            </a:r>
+          </a:p>
+          <a:p>
+            <a:pPr lvl="0" indent="-342900" marL="342900">
+              <a:buAutoNum type="arabicPeriod"/>
+            </a:pPr>
+            <a:r>
+              <a:rPr>
+                <a:latin typeface="Courier"/>
+              </a:rPr>
+              <a:t>?function_name</a:t>
+            </a:r>
+            <a:r>
+              <a:rPr/>
+              <a:t> opens the help page</a:t>
+            </a:r>
+          </a:p>
+          <a:p>
+            <a:pPr lvl="0" indent="-342900" marL="342900">
+              <a:buAutoNum type="arabicPeriod"/>
+            </a:pPr>
+            <a:r>
+              <a:rPr/>
+              <a:t>Bring the </a:t>
+            </a:r>
+            <a:r>
+              <a:rPr b="1"/>
+              <a:t>exact error</a:t>
+            </a:r>
+            <a:r>
+              <a:rPr/>
+              <a:t> (copy-paste it) to class or office hours</a:t>
+            </a:r>
+          </a:p>
+          <a:p>
+            <a:pPr lvl="0" indent="0" marL="1270000">
+              <a:buNone/>
+            </a:pPr>
+            <a:r>
+              <a:rPr sz="2000" b="1"/>
+              <a:t>Note</a:t>
+            </a:r>
+          </a:p>
+          <a:p>
+            <a:pPr lvl="0" indent="0" marL="1270000">
+              <a:buNone/>
+            </a:pPr>
+            <a:r>
+              <a:rPr sz="2000" b="1"/>
+              <a:t>✅ Key idea</a:t>
+            </a:r>
+          </a:p>
+          <a:p>
+            <a:pPr lvl="0" indent="0" marL="1270000">
+              <a:buNone/>
+            </a:pPr>
+            <a:r>
+              <a:rPr sz="2000"/>
+              <a:t>Every working scientist googles error messages daily. Getting stuck is not failing — it is the job.</a:t>
+            </a:r>
+          </a:p>
+        </p:txBody>
+      </p:sp>
+    </p:spTree>
+  </p:cSld>
+</p:sld>
+</file>
+
 <file path=ppt/slides/slide6.xml><?xml version="1.0" encoding="utf-8"?>
 <p:sld xmlns:a="http://schemas.openxmlformats.org/drawingml/2006/main" xmlns:r="http://schemas.openxmlformats.org/officeDocument/2006/relationships" xmlns:p="http://schemas.openxmlformats.org/presentationml/2006/main">
   <p:cSld>
@@ -12963,7 +13940,7 @@
       </p:sp>
       <p:pic>
         <p:nvPicPr>
-          <p:cNvPr descr="multiple_regression_lecture_files/figure-pptx/unnamed-chunk-3-1.png" id="0" name="Picture 1"/>
+          <p:cNvPr descr="multiple_regression_lecture_files/figure-pptx/multiple-regression-03-1.png" id="0" name="Picture 1"/>
           <p:cNvPicPr>
             <a:picLocks noGrp="1" noChangeAspect="1"/>
           </p:cNvPicPr>
@@ -13101,7 +14078,7 @@
       </p:sp>
       <p:pic>
         <p:nvPicPr>
-          <p:cNvPr descr="multiple_regression_lecture_files/figure-pptx/unnamed-chunk-4-1.png" id="0" name="Picture 1"/>
+          <p:cNvPr descr="multiple_regression_lecture_files/figure-pptx/multiple-regression-04-1.png" id="0" name="Picture 1"/>
           <p:cNvPicPr>
             <a:picLocks noGrp="1" noChangeAspect="1"/>
           </p:cNvPicPr>

--- a/docs/content/multiple_regression/multiple_regression_lecture.pptx
+++ b/docs/content/multiple_regression/multiple_regression_lecture.pptx
@@ -59,6 +59,10 @@
     <p:sldId id="307" r:id="rId53"/>
     <p:sldId id="308" r:id="rId54"/>
     <p:sldId id="309" r:id="rId55"/>
+    <p:sldId id="310" r:id="rId56"/>
+    <p:sldId id="311" r:id="rId57"/>
+    <p:sldId id="312" r:id="rId58"/>
+    <p:sldId id="313" r:id="rId59"/>
   </p:sldIdLst>
   <p:sldSz cx="9144000" cy="5143500" type="screen16x9"/>
   <p:notesSz cx="6858000" cy="9144000"/>
@@ -5048,7 +5052,15 @@
                 </a:pPr>
                 <a:r>
                   <a:rPr/>
-                  <a:t>Exactly the partition from last week, with p predictors instead of one:</a:t>
+                  <a:t>Exactly the partition from last week, </a:t>
+                </a:r>
+                <a:r>
+                  <a:rPr b="1"/>
+                  <a:t>with p predictors instead of one</a:t>
+                </a:r>
+                <a:r>
+                  <a:rPr/>
+                  <a:t>:</a:t>
                 </a:r>
               </a:p>
               <a:p>
@@ -5316,12 +5328,65 @@
           <a:bodyPr/>
           <a:lstStyle/>
           <a:p>
-            <a:pPr lvl="0" indent="0" marL="0">
-              <a:buNone/>
-            </a:pPr>
-            <a:r>
-              <a:rPr/>
-              <a:t>Mean squares are variances, so they do not grow with n — which is why the F-ratio is built from them and not from the sums of squares directly.</a:t>
+            <a:pPr lvl="0"/>
+            <a:r>
+              <a:rPr/>
+              <a:t>Mean squares are </a:t>
+            </a:r>
+            <a:r>
+              <a:rPr b="1"/>
+              <a:t>variance estimators</a:t>
+            </a:r>
+            <a:r>
+              <a:rPr/>
+              <a:t>, so they do not grow with n</a:t>
+            </a:r>
+          </a:p>
+          <a:p>
+            <a:pPr lvl="0"/>
+            <a:r>
+              <a:rPr/>
+              <a:t>which is why the </a:t>
+            </a:r>
+            <a:r>
+              <a:rPr b="1"/>
+              <a:t>F-ratio</a:t>
+            </a:r>
+            <a:r>
+              <a:rPr/>
+              <a:t> is </a:t>
+            </a:r>
+            <a:r>
+              <a:rPr b="1"/>
+              <a:t>built</a:t>
+            </a:r>
+            <a:r>
+              <a:rPr/>
+              <a:t> from </a:t>
+            </a:r>
+            <a:r>
+              <a:rPr b="1"/>
+              <a:t>Mean Squares</a:t>
+            </a:r>
+            <a:r>
+              <a:rPr/>
+              <a:t> and </a:t>
+            </a:r>
+            <a:r>
+              <a:rPr b="1"/>
+              <a:t>NOT</a:t>
+            </a:r>
+            <a:r>
+              <a:rPr/>
+              <a:t> from the </a:t>
+            </a:r>
+            <a:r>
+              <a:rPr b="1"/>
+              <a:t>Sums of Squares</a:t>
+            </a:r>
+            <a:r>
+              <a:rPr/>
+              <a:t> directly.</a:t>
             </a:r>
           </a:p>
         </p:txBody>
@@ -6035,7 +6100,7 @@
                         </m:e>
                         <m:sub>
                           <m:r>
-                            <m:t>1</m:t>
+                            <m:t>q</m:t>
                           </m:r>
                           <m:r>
                             <m:rPr>
@@ -6081,7 +6146,7 @@
                         </m:fPr>
                         <m:num>
                           <m:r>
-                            <m:t>M</m:t>
+                            <m:t>S</m:t>
                           </m:r>
                           <m:sSub>
                             <m:e>
@@ -6107,6 +6172,15 @@
                               </m:r>
                             </m:sub>
                           </m:sSub>
+                          <m:r>
+                            <m:rPr>
+                              <m:sty m:val="p"/>
+                            </m:rPr>
+                            <m:t>/</m:t>
+                          </m:r>
+                          <m:r>
+                            <m:t>q</m:t>
+                          </m:r>
                         </m:num>
                         <m:den>
                           <m:r>
@@ -6164,6 +6238,23 @@
                     </m:oMath>
                   </m:oMathPara>
                 </a14:m>
+              </a:p>
+              <a:p>
+                <a:pPr lvl="0" indent="0" marL="0">
+                  <a:buNone/>
+                </a:pPr>
+                <a:r>
+                  <a:rPr/>
+                  <a:t>where </a:t>
+                </a:r>
+                <a:r>
+                  <a:rPr b="1"/>
+                  <a:t>q</a:t>
+                </a:r>
+                <a:r>
+                  <a:rPr/>
+                  <a:t> is how many predictors you dropped — q = 1 for a single predictor, q = 4 below.</a:t>
+                </a:r>
               </a:p>
               <a:p>
                 <a:pPr lvl="0" indent="0">
@@ -7082,7 +7173,7 @@
               <a:buNone/>
             </a:pPr>
             <a:r>
-              <a:rPr/>
+              <a:rPr b="1" i="1" u="sng"/>
               <a:t>That is why adjusted R² and AIC exist, and we come back to them in Part 8.</a:t>
             </a:r>
           </a:p>
@@ -8300,20 +8391,16 @@
                   </m:oMath>
                 </a14:m>
                 <a:r>
-                  <a:rPr b="1"/>
+                  <a:rPr/>
                   <a:t> on all the </a:t>
                 </a:r>
                 <a:r>
-                  <a:rPr b="1" i="1"/>
+                  <a:rPr i="1"/>
                   <a:t>other</a:t>
                 </a:r>
                 <a:r>
-                  <a:rPr b="1"/>
-                  <a:t> predictors</a:t>
-                </a:r>
-                <a:r>
                   <a:rPr/>
-                  <a:t> — not from a pairwise correlation. (With two predictors they coincide; with more they do not.)</a:t>
+                  <a:t> predictors — not from a pairwise correlation. (With two predictors they coincide; with more they do not.)</a:t>
                 </a:r>
               </a:p>
               <a:p>
@@ -10509,7 +10596,17 @@
             </a:pPr>
             <a:r>
               <a:rPr/>
-              <a:t>🗳️ DECIDE · Which Level Should Be the Reference?</a:t>
+              <a:t>What </a:t>
+            </a:r>
+            <a:r>
+              <a:rPr>
+                <a:latin typeface="Courier"/>
+              </a:rPr>
+              <a:t>lm()</a:t>
+            </a:r>
+            <a:r>
+              <a:rPr/>
+              <a:t> Actually Fits · the Dummy Columns</a:t>
             </a:r>
           </a:p>
         </p:txBody>
@@ -10533,8 +10630,22 @@
               <a:buNone/>
             </a:pPr>
             <a:r>
-              <a:rPr/>
-              <a:t>The five grazing classes are </a:t>
+              <a:rPr>
+                <a:latin typeface="Courier"/>
+              </a:rPr>
+              <a:t>factor()</a:t>
+            </a:r>
+            <a:r>
+              <a:rPr/>
+              <a:t> did </a:t>
+            </a:r>
+            <a:r>
+              <a:rPr b="1"/>
+              <a:t>not</a:t>
+            </a:r>
+            <a:r>
+              <a:rPr/>
+              <a:t> put any zeros and ones in your data — the column still reads </a:t>
             </a:r>
             <a:r>
               <a:rPr>
@@ -10560,31 +10671,352 @@
               <a:rPr>
                 <a:latin typeface="Courier"/>
               </a:rPr>
-              <a:t>moderate</a:t>
-            </a:r>
-            <a:r>
-              <a:rPr/>
-              <a:t>, </a:t>
-            </a:r>
-            <a:r>
-              <a:rPr>
-                <a:latin typeface="Courier"/>
-              </a:rPr>
               <a:t>heavy</a:t>
             </a:r>
             <a:r>
               <a:rPr/>
-              <a:t>, </a:t>
-            </a:r>
-            <a:r>
-              <a:rPr>
-                <a:latin typeface="Courier"/>
-              </a:rPr>
-              <a:t>intense</a:t>
-            </a:r>
-            <a:r>
-              <a:rPr/>
-              <a:t>.</a:t>
+              <a:t>. The 0/1s get built when the model is fit, by </a:t>
+            </a:r>
+            <a:r>
+              <a:rPr>
+                <a:latin typeface="Courier"/>
+              </a:rPr>
+              <a:t>model.matrix()</a:t>
+            </a:r>
+            <a:r>
+              <a:rPr/>
+              <a:t>:</a:t>
+            </a:r>
+          </a:p>
+          <a:p>
+            <a:pPr lvl="0" indent="0">
+              <a:buNone/>
+            </a:pPr>
+            <a:r>
+              <a:rPr>
+                <a:solidFill>
+                  <a:srgbClr val="003B4F"/>
+                </a:solidFill>
+                <a:latin typeface="Courier"/>
+              </a:rPr>
+              <a:t>dummies &lt;- </a:t>
+            </a:r>
+            <a:r>
+              <a:rPr>
+                <a:solidFill>
+                  <a:srgbClr val="4758AB"/>
+                </a:solidFill>
+                <a:latin typeface="Courier"/>
+              </a:rPr>
+              <a:t>model.matrix</a:t>
+            </a:r>
+            <a:r>
+              <a:rPr>
+                <a:solidFill>
+                  <a:srgbClr val="003B4F"/>
+                </a:solidFill>
+                <a:latin typeface="Courier"/>
+              </a:rPr>
+              <a:t>(</a:t>
+            </a:r>
+            <a:r>
+              <a:rPr>
+                <a:solidFill>
+                  <a:srgbClr val="5E5E5E"/>
+                </a:solidFill>
+                <a:latin typeface="Courier"/>
+              </a:rPr>
+              <a:t>~</a:t>
+            </a:r>
+            <a:r>
+              <a:rPr>
+                <a:solidFill>
+                  <a:srgbClr val="003B4F"/>
+                </a:solidFill>
+                <a:latin typeface="Courier"/>
+              </a:rPr>
+              <a:t> grazing_class, </a:t>
+            </a:r>
+            <a:r>
+              <a:rPr>
+                <a:solidFill>
+                  <a:srgbClr val="657422"/>
+                </a:solidFill>
+                <a:latin typeface="Courier"/>
+              </a:rPr>
+              <a:t>data =</a:t>
+            </a:r>
+            <a:r>
+              <a:rPr>
+                <a:solidFill>
+                  <a:srgbClr val="003B4F"/>
+                </a:solidFill>
+                <a:latin typeface="Courier"/>
+              </a:rPr>
+              <a:t> bird_df)</a:t>
+            </a:r>
+            <a:br/>
+            <a:r>
+              <a:rPr>
+                <a:solidFill>
+                  <a:srgbClr val="4758AB"/>
+                </a:solidFill>
+                <a:latin typeface="Courier"/>
+              </a:rPr>
+              <a:t>colnames</a:t>
+            </a:r>
+            <a:r>
+              <a:rPr>
+                <a:solidFill>
+                  <a:srgbClr val="003B4F"/>
+                </a:solidFill>
+                <a:latin typeface="Courier"/>
+              </a:rPr>
+              <a:t>(dummies) &lt;- </a:t>
+            </a:r>
+            <a:r>
+              <a:rPr>
+                <a:solidFill>
+                  <a:srgbClr val="4758AB"/>
+                </a:solidFill>
+                <a:latin typeface="Courier"/>
+              </a:rPr>
+              <a:t>str_remove</a:t>
+            </a:r>
+            <a:r>
+              <a:rPr>
+                <a:solidFill>
+                  <a:srgbClr val="003B4F"/>
+                </a:solidFill>
+                <a:latin typeface="Courier"/>
+              </a:rPr>
+              <a:t>(</a:t>
+            </a:r>
+            <a:r>
+              <a:rPr>
+                <a:solidFill>
+                  <a:srgbClr val="4758AB"/>
+                </a:solidFill>
+                <a:latin typeface="Courier"/>
+              </a:rPr>
+              <a:t>colnames</a:t>
+            </a:r>
+            <a:r>
+              <a:rPr>
+                <a:solidFill>
+                  <a:srgbClr val="003B4F"/>
+                </a:solidFill>
+                <a:latin typeface="Courier"/>
+              </a:rPr>
+              <a:t>(dummies), </a:t>
+            </a:r>
+            <a:r>
+              <a:rPr>
+                <a:solidFill>
+                  <a:srgbClr val="20794D"/>
+                </a:solidFill>
+                <a:latin typeface="Courier"/>
+              </a:rPr>
+              <a:t>"grazing_class"</a:t>
+            </a:r>
+            <a:r>
+              <a:rPr>
+                <a:solidFill>
+                  <a:srgbClr val="003B4F"/>
+                </a:solidFill>
+                <a:latin typeface="Courier"/>
+              </a:rPr>
+              <a:t>)</a:t>
+            </a:r>
+            <a:br/>
+            <a:br/>
+            <a:r>
+              <a:rPr>
+                <a:solidFill>
+                  <a:srgbClr val="003B4F"/>
+                </a:solidFill>
+                <a:latin typeface="Courier"/>
+              </a:rPr>
+              <a:t>one_each &lt;- </a:t>
+            </a:r>
+            <a:r>
+              <a:rPr>
+                <a:solidFill>
+                  <a:srgbClr val="4758AB"/>
+                </a:solidFill>
+                <a:latin typeface="Courier"/>
+              </a:rPr>
+              <a:t>match</a:t>
+            </a:r>
+            <a:r>
+              <a:rPr>
+                <a:solidFill>
+                  <a:srgbClr val="003B4F"/>
+                </a:solidFill>
+                <a:latin typeface="Courier"/>
+              </a:rPr>
+              <a:t>(</a:t>
+            </a:r>
+            <a:r>
+              <a:rPr>
+                <a:solidFill>
+                  <a:srgbClr val="4758AB"/>
+                </a:solidFill>
+                <a:latin typeface="Courier"/>
+              </a:rPr>
+              <a:t>levels</a:t>
+            </a:r>
+            <a:r>
+              <a:rPr>
+                <a:solidFill>
+                  <a:srgbClr val="003B4F"/>
+                </a:solidFill>
+                <a:latin typeface="Courier"/>
+              </a:rPr>
+              <a:t>(bird_df</a:t>
+            </a:r>
+            <a:r>
+              <a:rPr>
+                <a:solidFill>
+                  <a:srgbClr val="5E5E5E"/>
+                </a:solidFill>
+                <a:latin typeface="Courier"/>
+              </a:rPr>
+              <a:t>$</a:t>
+            </a:r>
+            <a:r>
+              <a:rPr>
+                <a:solidFill>
+                  <a:srgbClr val="003B4F"/>
+                </a:solidFill>
+                <a:latin typeface="Courier"/>
+              </a:rPr>
+              <a:t>grazing_class), bird_df</a:t>
+            </a:r>
+            <a:r>
+              <a:rPr>
+                <a:solidFill>
+                  <a:srgbClr val="5E5E5E"/>
+                </a:solidFill>
+                <a:latin typeface="Courier"/>
+              </a:rPr>
+              <a:t>$</a:t>
+            </a:r>
+            <a:r>
+              <a:rPr>
+                <a:solidFill>
+                  <a:srgbClr val="003B4F"/>
+                </a:solidFill>
+                <a:latin typeface="Courier"/>
+              </a:rPr>
+              <a:t>grazing_class)</a:t>
+            </a:r>
+            <a:br/>
+            <a:r>
+              <a:rPr>
+                <a:solidFill>
+                  <a:srgbClr val="4758AB"/>
+                </a:solidFill>
+                <a:latin typeface="Courier"/>
+              </a:rPr>
+              <a:t>cbind</a:t>
+            </a:r>
+            <a:r>
+              <a:rPr>
+                <a:solidFill>
+                  <a:srgbClr val="003B4F"/>
+                </a:solidFill>
+                <a:latin typeface="Courier"/>
+              </a:rPr>
+              <a:t>(</a:t>
+            </a:r>
+            <a:r>
+              <a:rPr>
+                <a:solidFill>
+                  <a:srgbClr val="657422"/>
+                </a:solidFill>
+                <a:latin typeface="Courier"/>
+              </a:rPr>
+              <a:t>class =</a:t>
+            </a:r>
+            <a:r>
+              <a:rPr>
+                <a:solidFill>
+                  <a:srgbClr val="003B4F"/>
+                </a:solidFill>
+                <a:latin typeface="Courier"/>
+              </a:rPr>
+              <a:t> </a:t>
+            </a:r>
+            <a:r>
+              <a:rPr>
+                <a:solidFill>
+                  <a:srgbClr val="4758AB"/>
+                </a:solidFill>
+                <a:latin typeface="Courier"/>
+              </a:rPr>
+              <a:t>levels</a:t>
+            </a:r>
+            <a:r>
+              <a:rPr>
+                <a:solidFill>
+                  <a:srgbClr val="003B4F"/>
+                </a:solidFill>
+                <a:latin typeface="Courier"/>
+              </a:rPr>
+              <a:t>(bird_df</a:t>
+            </a:r>
+            <a:r>
+              <a:rPr>
+                <a:solidFill>
+                  <a:srgbClr val="5E5E5E"/>
+                </a:solidFill>
+                <a:latin typeface="Courier"/>
+              </a:rPr>
+              <a:t>$</a:t>
+            </a:r>
+            <a:r>
+              <a:rPr>
+                <a:solidFill>
+                  <a:srgbClr val="003B4F"/>
+                </a:solidFill>
+                <a:latin typeface="Courier"/>
+              </a:rPr>
+              <a:t>grazing_class), </a:t>
+            </a:r>
+            <a:r>
+              <a:rPr>
+                <a:solidFill>
+                  <a:srgbClr val="4758AB"/>
+                </a:solidFill>
+                <a:latin typeface="Courier"/>
+              </a:rPr>
+              <a:t>as.data.frame</a:t>
+            </a:r>
+            <a:r>
+              <a:rPr>
+                <a:solidFill>
+                  <a:srgbClr val="003B4F"/>
+                </a:solidFill>
+                <a:latin typeface="Courier"/>
+              </a:rPr>
+              <a:t>(dummies[one_each, ]))</a:t>
+            </a:r>
+          </a:p>
+          <a:p>
+            <a:pPr lvl="0" indent="0">
+              <a:buNone/>
+            </a:pPr>
+            <a:r>
+              <a:rPr>
+                <a:latin typeface="Courier"/>
+              </a:rPr>
+              <a:t>      class (Intercept) intense light minimal moderate
+9     heavy           1       0     0       0        0
+2   intense           1       1     0       0        0
+1     light           1       0     1       0        0
+14  minimal           1       0     0       1        0
+4  moderate           1       0     0       0        1</a:t>
             </a:r>
           </a:p>
           <a:p>
@@ -10592,108 +11024,26 @@
               <a:buNone/>
             </a:pPr>
             <a:r>
+              <a:rPr/>
+              <a:t>One site per class. </a:t>
+            </a:r>
+            <a:r>
               <a:rPr b="1"/>
-              <a:t>Which should be the reference level, and why?</a:t>
-            </a:r>
-          </a:p>
-          <a:p>
-            <a:pPr lvl="0" indent="0" marL="0">
-              <a:buNone/>
-            </a:pPr>
-            <a:r>
-              <a:rPr b="1"/>
-              <a:t>(a)</a:t>
-            </a:r>
-            <a:r>
-              <a:rPr/>
-              <a:t> </a:t>
-            </a:r>
-            <a:r>
-              <a:rPr>
-                <a:latin typeface="Courier"/>
-              </a:rPr>
-              <a:t>heavy</a:t>
-            </a:r>
-            <a:r>
-              <a:rPr/>
-              <a:t> — leave R’s default alone; the choice does not affect the model</a:t>
-            </a:r>
-          </a:p>
-          <a:p>
-            <a:pPr lvl="0" indent="0" marL="0">
-              <a:buNone/>
-            </a:pPr>
-            <a:r>
-              <a:rPr b="1"/>
-              <a:t>(b)</a:t>
-            </a:r>
-            <a:r>
-              <a:rPr/>
-              <a:t> </a:t>
-            </a:r>
-            <a:r>
-              <a:rPr>
-                <a:latin typeface="Courier"/>
-              </a:rPr>
-              <a:t>intense</a:t>
-            </a:r>
-            <a:r>
-              <a:rPr/>
-              <a:t> — the most extreme level makes the biggest contrasts</a:t>
-            </a:r>
-          </a:p>
-          <a:p>
-            <a:pPr lvl="0" indent="0" marL="0">
-              <a:buNone/>
-            </a:pPr>
-            <a:r>
-              <a:rPr b="1"/>
-              <a:t>(c)</a:t>
-            </a:r>
-            <a:r>
-              <a:rPr/>
-              <a:t> </a:t>
-            </a:r>
-            <a:r>
-              <a:rPr>
-                <a:latin typeface="Courier"/>
-              </a:rPr>
-              <a:t>minimal</a:t>
-            </a:r>
-            <a:r>
-              <a:rPr/>
-              <a:t> — the least-disturbed level, so every coefficient reads as the cost of adding grazing</a:t>
-            </a:r>
-          </a:p>
-          <a:p>
-            <a:pPr lvl="0" indent="0" marL="0">
-              <a:buNone/>
-            </a:pPr>
-            <a:r>
-              <a:rPr b="1"/>
-              <a:t>(d)</a:t>
-            </a:r>
-            <a:r>
-              <a:rPr/>
-              <a:t> It does not matter, because R² and the F-test are identical either way</a:t>
-            </a:r>
-          </a:p>
-          <a:p>
-            <a:pPr lvl="0" indent="0" marL="1270000">
-              <a:buNone/>
-            </a:pPr>
-            <a:r>
-              <a:rPr sz="2000" b="1"/>
-              <a:t>Warning</a:t>
-            </a:r>
-          </a:p>
-          <a:p>
-            <a:pPr lvl="0" indent="0" marL="1270000">
-              <a:buNone/>
-            </a:pPr>
-            <a:r>
-              <a:rPr sz="2000" b="1"/>
-              <a:t>✍️ Careful — two of these are true statements. Only one is the right decision.</a:t>
+              <a:t>That matrix is what least squares actually solves</a:t>
+            </a:r>
+            <a:r>
+              <a:rPr/>
+              <a:t> — </a:t>
+            </a:r>
+            <a:r>
+              <a:rPr>
+                <a:latin typeface="Courier"/>
+              </a:rPr>
+              <a:t>lm()</a:t>
+            </a:r>
+            <a:r>
+              <a:rPr/>
+              <a:t> never sees the word “heavy.”</a:t>
             </a:r>
           </a:p>
         </p:txBody>
@@ -10713,12 +11063,104 @@
           <a:bodyPr/>
           <a:lstStyle/>
           <a:p>
+            <a:pPr lvl="0" indent="0" marL="0">
+              <a:buNone/>
+            </a:pPr>
+            <a:r>
+              <a:rPr/>
+              <a:t>Each dummy is a </a:t>
+            </a:r>
+            <a:r>
+              <a:rPr b="1"/>
+              <a:t>yes/no switch</a:t>
+            </a:r>
+            <a:r>
+              <a:rPr/>
+              <a:t>: </a:t>
+            </a:r>
+            <a:r>
+              <a:rPr i="1"/>
+              <a:t>is this site </a:t>
+            </a:r>
+            <a:r>
+              <a:rPr i="1">
+                <a:latin typeface="Courier"/>
+              </a:rPr>
+              <a:t>light</a:t>
+            </a:r>
+            <a:r>
+              <a:rPr i="1"/>
+              <a:t>?</a:t>
+            </a:r>
+            <a:r>
+              <a:rPr/>
+              <a:t> A site belongs to exactly one class, so exactly one switch is on per row — </a:t>
+            </a:r>
+            <a:r>
+              <a:rPr b="1"/>
+              <a:t>or none at all.</a:t>
+            </a:r>
+          </a:p>
+          <a:p>
+            <a:pPr lvl="0" indent="0" marL="0">
+              <a:buNone/>
+            </a:pPr>
+            <a:r>
+              <a:rPr/>
+              <a:t>Look at the </a:t>
+            </a:r>
+            <a:r>
+              <a:rPr>
+                <a:latin typeface="Courier"/>
+              </a:rPr>
+              <a:t>heavy</a:t>
+            </a:r>
+            <a:r>
+              <a:rPr/>
+              <a:t> row: all four switches are 0, and only the intercept column of 1s is left. </a:t>
+            </a:r>
+            <a:r>
+              <a:rPr>
+                <a:latin typeface="Courier"/>
+              </a:rPr>
+              <a:t>heavy</a:t>
+            </a:r>
+            <a:r>
+              <a:rPr/>
+              <a:t> is not missing from the model — it is the row where nothing is switched on. </a:t>
+            </a:r>
+            <a:r>
+              <a:rPr b="1"/>
+              <a:t>The reference level </a:t>
+            </a:r>
+            <a:r>
+              <a:rPr b="1" i="1"/>
+              <a:t>is</a:t>
+            </a:r>
+            <a:r>
+              <a:rPr b="1"/>
+              <a:t> the intercept</a:t>
+            </a:r>
+            <a:r>
+              <a:rPr/>
+              <a:t>, which is why 5 levels need only </a:t>
+            </a:r>
+            <a:r>
+              <a:rPr b="1"/>
+              <a:t>4</a:t>
+            </a:r>
+            <a:r>
+              <a:rPr/>
+              <a:t> dummies.</a:t>
+            </a:r>
+          </a:p>
+          <a:p>
             <a:pPr lvl="0" indent="0" marL="1270000">
               <a:buNone/>
             </a:pPr>
             <a:r>
               <a:rPr sz="2000" b="1"/>
-              <a:t>Note</a:t>
+              <a:t>Warning</a:t>
             </a:r>
           </a:p>
           <a:p>
@@ -10727,7 +11169,7 @@
             </a:pPr>
             <a:r>
               <a:rPr sz="2000" b="1"/>
-              <a:t>The question to ask</a:t>
+              <a:t>⚠️ Why not a fifth dummy</a:t>
             </a:r>
           </a:p>
           <a:p>
@@ -10735,8 +11177,27 @@
               <a:buNone/>
             </a:pPr>
             <a:r>
-              <a:rPr sz="2000" i="1"/>
-              <a:t>Which comparison do I want to read straight off the output?</a:t>
+              <a:rPr sz="2000"/>
+              <a:t>Five switches would sum to 1 in every single row — exactly the intercept column. The model could not tell them apart, and R would print </a:t>
+            </a:r>
+            <a:r>
+              <a:rPr sz="2000">
+                <a:latin typeface="Courier"/>
+              </a:rPr>
+              <a:t>NA</a:t>
+            </a:r>
+            <a:r>
+              <a:rPr sz="2000"/>
+              <a:t>: the same perfect aliasing as the deer-mouse brothers.</a:t>
+            </a:r>
+          </a:p>
+          <a:p>
+            <a:pPr lvl="0" indent="0" marL="1270000">
+              <a:buNone/>
+            </a:pPr>
+            <a:r>
+              <a:rPr sz="2000" b="1"/>
+              <a:t>Dropping a level is not a choice. It is arithmetic.</a:t>
             </a:r>
           </a:p>
         </p:txBody>
@@ -10791,13 +11252,7 @@
             </a:pPr>
             <a:r>
               <a:rPr/>
-              <a:t>Choosing the Reference Yourself · </a:t>
-            </a:r>
-            <a:r>
-              <a:rPr>
-                <a:latin typeface="Courier"/>
-              </a:rPr>
-              <a:t>fct_relevel()</a:t>
+              <a:t>🗳️ DECIDE · Which Level Should Be the Reference?</a:t>
             </a:r>
           </a:p>
         </p:txBody>
@@ -10817,12 +11272,162 @@
           <a:bodyPr/>
           <a:lstStyle/>
           <a:p>
+            <a:pPr lvl="0" indent="0" marL="0">
+              <a:buNone/>
+            </a:pPr>
+            <a:r>
+              <a:rPr/>
+              <a:t>The five grazing classes are </a:t>
+            </a:r>
+            <a:r>
+              <a:rPr>
+                <a:latin typeface="Courier"/>
+              </a:rPr>
+              <a:t>minimal</a:t>
+            </a:r>
+            <a:r>
+              <a:rPr/>
+              <a:t>, </a:t>
+            </a:r>
+            <a:r>
+              <a:rPr>
+                <a:latin typeface="Courier"/>
+              </a:rPr>
+              <a:t>light</a:t>
+            </a:r>
+            <a:r>
+              <a:rPr/>
+              <a:t>, </a:t>
+            </a:r>
+            <a:r>
+              <a:rPr>
+                <a:latin typeface="Courier"/>
+              </a:rPr>
+              <a:t>moderate</a:t>
+            </a:r>
+            <a:r>
+              <a:rPr/>
+              <a:t>, </a:t>
+            </a:r>
+            <a:r>
+              <a:rPr>
+                <a:latin typeface="Courier"/>
+              </a:rPr>
+              <a:t>heavy</a:t>
+            </a:r>
+            <a:r>
+              <a:rPr/>
+              <a:t>, </a:t>
+            </a:r>
+            <a:r>
+              <a:rPr>
+                <a:latin typeface="Courier"/>
+              </a:rPr>
+              <a:t>intense</a:t>
+            </a:r>
+            <a:r>
+              <a:rPr/>
+              <a:t>.</a:t>
+            </a:r>
+          </a:p>
+          <a:p>
+            <a:pPr lvl="0" indent="0" marL="0">
+              <a:buNone/>
+            </a:pPr>
+            <a:r>
+              <a:rPr b="1"/>
+              <a:t>Which should be the reference level, and why?</a:t>
+            </a:r>
+          </a:p>
+          <a:p>
+            <a:pPr lvl="0" indent="0" marL="0">
+              <a:buNone/>
+            </a:pPr>
+            <a:r>
+              <a:rPr b="1"/>
+              <a:t>(a)</a:t>
+            </a:r>
+            <a:r>
+              <a:rPr/>
+              <a:t> </a:t>
+            </a:r>
+            <a:r>
+              <a:rPr>
+                <a:latin typeface="Courier"/>
+              </a:rPr>
+              <a:t>heavy</a:t>
+            </a:r>
+            <a:r>
+              <a:rPr/>
+              <a:t> — leave R’s default alone; the choice does not affect the model</a:t>
+            </a:r>
+          </a:p>
+          <a:p>
+            <a:pPr lvl="0" indent="0" marL="0">
+              <a:buNone/>
+            </a:pPr>
+            <a:r>
+              <a:rPr b="1"/>
+              <a:t>(b)</a:t>
+            </a:r>
+            <a:r>
+              <a:rPr/>
+              <a:t> </a:t>
+            </a:r>
+            <a:r>
+              <a:rPr>
+                <a:latin typeface="Courier"/>
+              </a:rPr>
+              <a:t>intense</a:t>
+            </a:r>
+            <a:r>
+              <a:rPr/>
+              <a:t> — the most extreme level makes the biggest contrasts</a:t>
+            </a:r>
+          </a:p>
+          <a:p>
+            <a:pPr lvl="0" indent="0" marL="0">
+              <a:buNone/>
+            </a:pPr>
+            <a:r>
+              <a:rPr b="1"/>
+              <a:t>(c)</a:t>
+            </a:r>
+            <a:r>
+              <a:rPr/>
+              <a:t> </a:t>
+            </a:r>
+            <a:r>
+              <a:rPr>
+                <a:latin typeface="Courier"/>
+              </a:rPr>
+              <a:t>minimal</a:t>
+            </a:r>
+            <a:r>
+              <a:rPr/>
+              <a:t> — the least-disturbed level, so every coefficient reads as the cost of adding grazing</a:t>
+            </a:r>
+          </a:p>
+          <a:p>
+            <a:pPr lvl="0" indent="0" marL="0">
+              <a:buNone/>
+            </a:pPr>
+            <a:r>
+              <a:rPr b="1"/>
+              <a:t>(d)</a:t>
+            </a:r>
+            <a:r>
+              <a:rPr/>
+              <a:t> It does not matter, because R² and the F-test are identical either way</a:t>
+            </a:r>
+          </a:p>
+          <a:p>
             <a:pPr lvl="0" indent="0" marL="1270000">
               <a:buNone/>
             </a:pPr>
             <a:r>
               <a:rPr sz="2000" b="1"/>
-              <a:t>Important</a:t>
+              <a:t>Warning</a:t>
             </a:r>
           </a:p>
           <a:p>
@@ -10831,293 +11436,7 @@
             </a:pPr>
             <a:r>
               <a:rPr sz="2000" b="1"/>
-              <a:t>✅ The answer is (c).</a:t>
-            </a:r>
-          </a:p>
-          <a:p>
-            <a:pPr lvl="0" indent="-342900" marL="342900">
-              <a:buAutoNum startAt="4" type="alphaLcParenBoth"/>
-            </a:pPr>
-            <a:r>
-              <a:rPr sz="2000"/>
-              <a:t>is </a:t>
-            </a:r>
-            <a:r>
-              <a:rPr sz="2000" i="1"/>
-              <a:t>true</a:t>
-            </a:r>
-            <a:r>
-              <a:rPr sz="2000"/>
-              <a:t> — the fit, R², F and the ANOVA table are all identical whichever level is the reference. But it is not a reason to accept a bad default: the coefficients are what people read, and they should answer the question you asked.</a:t>
-            </a:r>
-          </a:p>
-          <a:p>
-            <a:pPr lvl="0" indent="0" marL="1270000">
-              <a:buNone/>
-            </a:pPr>
-            <a:r>
-              <a:rPr sz="2000">
-                <a:latin typeface="Courier"/>
-              </a:rPr>
-              <a:t>minimal</a:t>
-            </a:r>
-            <a:r>
-              <a:rPr sz="2000"/>
-              <a:t> grazing is the closest thing this observational study has to a </a:t>
-            </a:r>
-            <a:r>
-              <a:rPr sz="2000" b="1"/>
-              <a:t>control</a:t>
-            </a:r>
-            <a:r>
-              <a:rPr sz="2000"/>
-              <a:t>, so putting it first makes every other coefficient “birds lost relative to the least-grazed patches.”</a:t>
-            </a:r>
-          </a:p>
-          <a:p>
-            <a:pPr lvl="0" indent="0">
-              <a:buNone/>
-            </a:pPr>
-            <a:r>
-              <a:rPr>
-                <a:solidFill>
-                  <a:srgbClr val="003B4F"/>
-                </a:solidFill>
-                <a:latin typeface="Courier"/>
-              </a:rPr>
-              <a:t>bird_df &lt;- bird_df </a:t>
-            </a:r>
-            <a:r>
-              <a:rPr>
-                <a:solidFill>
-                  <a:srgbClr val="5E5E5E"/>
-                </a:solidFill>
-                <a:latin typeface="Courier"/>
-              </a:rPr>
-              <a:t>%&gt;%</a:t>
-            </a:r>
-            <a:br/>
-            <a:r>
-              <a:rPr>
-                <a:solidFill>
-                  <a:srgbClr val="003B4F"/>
-                </a:solidFill>
-                <a:latin typeface="Courier"/>
-              </a:rPr>
-              <a:t>  </a:t>
-            </a:r>
-            <a:r>
-              <a:rPr>
-                <a:solidFill>
-                  <a:srgbClr val="4758AB"/>
-                </a:solidFill>
-                <a:latin typeface="Courier"/>
-              </a:rPr>
-              <a:t>mutate</a:t>
-            </a:r>
-            <a:r>
-              <a:rPr>
-                <a:solidFill>
-                  <a:srgbClr val="003B4F"/>
-                </a:solidFill>
-                <a:latin typeface="Courier"/>
-              </a:rPr>
-              <a:t>(</a:t>
-            </a:r>
-            <a:r>
-              <a:rPr>
-                <a:solidFill>
-                  <a:srgbClr val="657422"/>
-                </a:solidFill>
-                <a:latin typeface="Courier"/>
-              </a:rPr>
-              <a:t>grazing_class =</a:t>
-            </a:r>
-            <a:r>
-              <a:rPr>
-                <a:solidFill>
-                  <a:srgbClr val="003B4F"/>
-                </a:solidFill>
-                <a:latin typeface="Courier"/>
-              </a:rPr>
-              <a:t> </a:t>
-            </a:r>
-            <a:r>
-              <a:rPr>
-                <a:solidFill>
-                  <a:srgbClr val="4758AB"/>
-                </a:solidFill>
-                <a:latin typeface="Courier"/>
-              </a:rPr>
-              <a:t>fct_relevel</a:t>
-            </a:r>
-            <a:r>
-              <a:rPr>
-                <a:solidFill>
-                  <a:srgbClr val="003B4F"/>
-                </a:solidFill>
-                <a:latin typeface="Courier"/>
-              </a:rPr>
-              <a:t>(</a:t>
-            </a:r>
-            <a:br/>
-            <a:r>
-              <a:rPr>
-                <a:solidFill>
-                  <a:srgbClr val="003B4F"/>
-                </a:solidFill>
-                <a:latin typeface="Courier"/>
-              </a:rPr>
-              <a:t>    grazing_class,</a:t>
-            </a:r>
-            <a:br/>
-            <a:r>
-              <a:rPr>
-                <a:solidFill>
-                  <a:srgbClr val="003B4F"/>
-                </a:solidFill>
-                <a:latin typeface="Courier"/>
-              </a:rPr>
-              <a:t>    </a:t>
-            </a:r>
-            <a:r>
-              <a:rPr>
-                <a:solidFill>
-                  <a:srgbClr val="20794D"/>
-                </a:solidFill>
-                <a:latin typeface="Courier"/>
-              </a:rPr>
-              <a:t>"minimal"</a:t>
-            </a:r>
-            <a:r>
-              <a:rPr>
-                <a:solidFill>
-                  <a:srgbClr val="003B4F"/>
-                </a:solidFill>
-                <a:latin typeface="Courier"/>
-              </a:rPr>
-              <a:t>, </a:t>
-            </a:r>
-            <a:r>
-              <a:rPr>
-                <a:solidFill>
-                  <a:srgbClr val="20794D"/>
-                </a:solidFill>
-                <a:latin typeface="Courier"/>
-              </a:rPr>
-              <a:t>"light"</a:t>
-            </a:r>
-            <a:r>
-              <a:rPr>
-                <a:solidFill>
-                  <a:srgbClr val="003B4F"/>
-                </a:solidFill>
-                <a:latin typeface="Courier"/>
-              </a:rPr>
-              <a:t>, </a:t>
-            </a:r>
-            <a:r>
-              <a:rPr>
-                <a:solidFill>
-                  <a:srgbClr val="20794D"/>
-                </a:solidFill>
-                <a:latin typeface="Courier"/>
-              </a:rPr>
-              <a:t>"moderate"</a:t>
-            </a:r>
-            <a:r>
-              <a:rPr>
-                <a:solidFill>
-                  <a:srgbClr val="003B4F"/>
-                </a:solidFill>
-                <a:latin typeface="Courier"/>
-              </a:rPr>
-              <a:t>, </a:t>
-            </a:r>
-            <a:r>
-              <a:rPr>
-                <a:solidFill>
-                  <a:srgbClr val="20794D"/>
-                </a:solidFill>
-                <a:latin typeface="Courier"/>
-              </a:rPr>
-              <a:t>"heavy"</a:t>
-            </a:r>
-            <a:r>
-              <a:rPr>
-                <a:solidFill>
-                  <a:srgbClr val="003B4F"/>
-                </a:solidFill>
-                <a:latin typeface="Courier"/>
-              </a:rPr>
-              <a:t>, </a:t>
-            </a:r>
-            <a:r>
-              <a:rPr>
-                <a:solidFill>
-                  <a:srgbClr val="20794D"/>
-                </a:solidFill>
-                <a:latin typeface="Courier"/>
-              </a:rPr>
-              <a:t>"intense"</a:t>
-            </a:r>
-            <a:r>
-              <a:rPr>
-                <a:solidFill>
-                  <a:srgbClr val="003B4F"/>
-                </a:solidFill>
-                <a:latin typeface="Courier"/>
-              </a:rPr>
-              <a:t>))</a:t>
-            </a:r>
-            <a:br/>
-            <a:br/>
-            <a:r>
-              <a:rPr>
-                <a:solidFill>
-                  <a:srgbClr val="4758AB"/>
-                </a:solidFill>
-                <a:latin typeface="Courier"/>
-              </a:rPr>
-              <a:t>levels</a:t>
-            </a:r>
-            <a:r>
-              <a:rPr>
-                <a:solidFill>
-                  <a:srgbClr val="003B4F"/>
-                </a:solidFill>
-                <a:latin typeface="Courier"/>
-              </a:rPr>
-              <a:t>(bird_df</a:t>
-            </a:r>
-            <a:r>
-              <a:rPr>
-                <a:solidFill>
-                  <a:srgbClr val="5E5E5E"/>
-                </a:solidFill>
-                <a:latin typeface="Courier"/>
-              </a:rPr>
-              <a:t>$</a:t>
-            </a:r>
-            <a:r>
-              <a:rPr>
-                <a:solidFill>
-                  <a:srgbClr val="003B4F"/>
-                </a:solidFill>
-                <a:latin typeface="Courier"/>
-              </a:rPr>
-              <a:t>grazing_class)</a:t>
-            </a:r>
-          </a:p>
-          <a:p>
-            <a:pPr lvl="0" indent="0">
-              <a:buNone/>
-            </a:pPr>
-            <a:r>
-              <a:rPr>
-                <a:latin typeface="Courier"/>
-              </a:rPr>
-              <a:t>[1] "minimal"  "light"    "moderate" "heavy"    "intense" </a:t>
+              <a:t>✍️ Careful — two of these are true statements. Only one is the right decision.</a:t>
             </a:r>
           </a:p>
         </p:txBody>
@@ -11142,7 +11461,7 @@
             </a:pPr>
             <a:r>
               <a:rPr sz="2000" b="1"/>
-              <a:t>Tip</a:t>
+              <a:t>Note</a:t>
             </a:r>
           </a:p>
           <a:p>
@@ -11151,7 +11470,7 @@
             </a:pPr>
             <a:r>
               <a:rPr sz="2000" b="1"/>
-              <a:t>🖐 The habit to build</a:t>
+              <a:t>The question to ask</a:t>
             </a:r>
           </a:p>
           <a:p>
@@ -11159,72 +11478,8 @@
               <a:buNone/>
             </a:pPr>
             <a:r>
-              <a:rPr sz="2000"/>
-              <a:t>Any time a factor enters a model, set its reference level </a:t>
-            </a:r>
-            <a:r>
-              <a:rPr sz="2000" b="1"/>
-              <a:t>on purpose</a:t>
-            </a:r>
-            <a:r>
-              <a:rPr sz="2000"/>
-              <a:t>, in the same line where you create the factor.</a:t>
-            </a:r>
-          </a:p>
-          <a:p>
-            <a:pPr lvl="0" indent="0" marL="1270000">
-              <a:buNone/>
-            </a:pPr>
-            <a:r>
-              <a:rPr sz="2000">
-                <a:latin typeface="Courier"/>
-              </a:rPr>
-              <a:t>fct_relevel()</a:t>
-            </a:r>
-            <a:r>
-              <a:rPr sz="2000"/>
-              <a:t> moves the levels you name to the front and leaves the rest in place, so naming just the control is enough:</a:t>
-            </a:r>
-          </a:p>
-          <a:p>
-            <a:pPr lvl="0" indent="0">
-              <a:buNone/>
-            </a:pPr>
-            <a:r>
-              <a:rPr>
-                <a:solidFill>
-                  <a:srgbClr val="4758AB"/>
-                </a:solidFill>
-                <a:latin typeface="Courier"/>
-              </a:rPr>
-              <a:t>fct_relevel</a:t>
-            </a:r>
-            <a:r>
-              <a:rPr>
-                <a:solidFill>
-                  <a:srgbClr val="003B4F"/>
-                </a:solidFill>
-                <a:latin typeface="Courier"/>
-              </a:rPr>
-              <a:t>(treatment, </a:t>
-            </a:r>
-            <a:r>
-              <a:rPr>
-                <a:solidFill>
-                  <a:srgbClr val="20794D"/>
-                </a:solidFill>
-                <a:latin typeface="Courier"/>
-              </a:rPr>
-              <a:t>"control"</a:t>
-            </a:r>
-            <a:r>
-              <a:rPr>
-                <a:solidFill>
-                  <a:srgbClr val="003B4F"/>
-                </a:solidFill>
-                <a:latin typeface="Courier"/>
-              </a:rPr>
-              <a:t>)</a:t>
+              <a:rPr sz="2000" i="1"/>
+              <a:t>Which comparison do I want to read straight off the output?</a:t>
             </a:r>
           </a:p>
         </p:txBody>
@@ -11474,7 +11729,13 @@
             </a:pPr>
             <a:r>
               <a:rPr/>
-              <a:t>Same Model, Same F, a Readable Story</a:t>
+              <a:t>Making the Control the Reference · </a:t>
+            </a:r>
+            <a:r>
+              <a:rPr>
+                <a:latin typeface="Courier"/>
+              </a:rPr>
+              <a:t>fct_relevel()</a:t>
             </a:r>
           </a:p>
         </p:txBody>
@@ -11494,6 +11755,73 @@
           <a:bodyPr/>
           <a:lstStyle/>
           <a:p>
+            <a:pPr lvl="0" indent="0" marL="1270000">
+              <a:buNone/>
+            </a:pPr>
+            <a:r>
+              <a:rPr sz="2000" b="1"/>
+              <a:t>Important</a:t>
+            </a:r>
+          </a:p>
+          <a:p>
+            <a:pPr lvl="0" indent="0" marL="1270000">
+              <a:buNone/>
+            </a:pPr>
+            <a:r>
+              <a:rPr sz="2000" b="1"/>
+              <a:t>✅ The answer is (c).</a:t>
+            </a:r>
+          </a:p>
+          <a:p>
+            <a:pPr lvl="0" indent="-342900" marL="342900">
+              <a:buAutoNum startAt="4" type="alphaLcParenBoth"/>
+            </a:pPr>
+            <a:r>
+              <a:rPr sz="2000"/>
+              <a:t>is </a:t>
+            </a:r>
+            <a:r>
+              <a:rPr sz="2000" i="1"/>
+              <a:t>true</a:t>
+            </a:r>
+            <a:r>
+              <a:rPr sz="2000"/>
+              <a:t> — the fit, R², F and the ANOVA table are identical whichever level is the reference. But that is not a reason to accept a bad default: the coefficients are what people read, and they should answer the question you asked.</a:t>
+            </a:r>
+          </a:p>
+          <a:p>
+            <a:pPr lvl="0" indent="0" marL="1270000">
+              <a:buNone/>
+            </a:pPr>
+            <a:r>
+              <a:rPr sz="2000">
+                <a:latin typeface="Courier"/>
+              </a:rPr>
+              <a:t>minimal</a:t>
+            </a:r>
+            <a:r>
+              <a:rPr sz="2000"/>
+              <a:t> grazing is the closest thing this observational study has to a </a:t>
+            </a:r>
+            <a:r>
+              <a:rPr sz="2000" b="1"/>
+              <a:t>control</a:t>
+            </a:r>
+            <a:r>
+              <a:rPr sz="2000"/>
+              <a:t>.</a:t>
+            </a:r>
+          </a:p>
+          <a:p>
+            <a:pPr lvl="0" indent="0" marL="0">
+              <a:buNone/>
+            </a:pPr>
+            <a:r>
+              <a:rPr b="1"/>
+              <a:t>Name the control. That is the whole call.</a:t>
+            </a:r>
+          </a:p>
+          <a:p>
             <a:pPr lvl="0" indent="0">
               <a:buNone/>
             </a:pPr>
@@ -11504,7 +11832,26 @@
                 </a:solidFill>
                 <a:latin typeface="Courier"/>
               </a:rPr>
-              <a:t>grazing_model &lt;- </a:t>
+              <a:t>bird_df &lt;- bird_df </a:t>
+            </a:r>
+            <a:r>
+              <a:rPr>
+                <a:solidFill>
+                  <a:srgbClr val="5E5E5E"/>
+                </a:solidFill>
+                <a:latin typeface="Courier"/>
+              </a:rPr>
+              <a:t>%&gt;%</a:t>
+            </a:r>
+            <a:br/>
+            <a:r>
+              <a:rPr>
+                <a:solidFill>
+                  <a:srgbClr val="003B4F"/>
+                </a:solidFill>
+                <a:latin typeface="Courier"/>
+              </a:rPr>
+              <a:t>  </a:t>
             </a:r>
             <a:r>
               <a:rPr>
@@ -11513,7 +11860,7 @@
                 </a:solidFill>
                 <a:latin typeface="Courier"/>
               </a:rPr>
-              <a:t>lm</a:t>
+              <a:t>mutate</a:t>
             </a:r>
             <a:r>
               <a:rPr>
@@ -11522,17 +11869,18 @@
                 </a:solidFill>
                 <a:latin typeface="Courier"/>
               </a:rPr>
-              <a:t>(abundance </a:t>
-            </a:r>
-            <a:r>
-              <a:rPr>
-                <a:solidFill>
-                  <a:srgbClr val="5E5E5E"/>
-                </a:solidFill>
-                <a:latin typeface="Courier"/>
-              </a:rPr>
-              <a:t>~</a:t>
-            </a:r>
+              <a:t>(</a:t>
+            </a:r>
+            <a:r>
+              <a:rPr>
+                <a:solidFill>
+                  <a:srgbClr val="657422"/>
+                </a:solidFill>
+                <a:latin typeface="Courier"/>
+              </a:rPr>
+              <a:t>grazing_class =</a:t>
+            </a:r>
+            <a:br/>
             <a:r>
               <a:rPr>
                 <a:solidFill>
@@ -11540,16 +11888,16 @@
                 </a:solidFill>
                 <a:latin typeface="Courier"/>
               </a:rPr>
-              <a:t> log_area </a:t>
-            </a:r>
-            <a:r>
-              <a:rPr>
-                <a:solidFill>
-                  <a:srgbClr val="5E5E5E"/>
-                </a:solidFill>
-                <a:latin typeface="Courier"/>
-              </a:rPr>
-              <a:t>+</a:t>
+              <a:t>           </a:t>
+            </a:r>
+            <a:r>
+              <a:rPr>
+                <a:solidFill>
+                  <a:srgbClr val="4758AB"/>
+                </a:solidFill>
+                <a:latin typeface="Courier"/>
+              </a:rPr>
+              <a:t>fct_relevel</a:t>
             </a:r>
             <a:r>
               <a:rPr>
@@ -11558,9 +11906,17 @@
                 </a:solidFill>
                 <a:latin typeface="Courier"/>
               </a:rPr>
-              <a:t> grazing_class,</a:t>
-            </a:r>
-            <a:br/>
+              <a:t>(grazing_class, </a:t>
+            </a:r>
+            <a:r>
+              <a:rPr>
+                <a:solidFill>
+                  <a:srgbClr val="20794D"/>
+                </a:solidFill>
+                <a:latin typeface="Courier"/>
+              </a:rPr>
+              <a:t>"minimal"</a:t>
+            </a:r>
             <a:r>
               <a:rPr>
                 <a:solidFill>
@@ -11568,25 +11924,7 @@
                 </a:solidFill>
                 <a:latin typeface="Courier"/>
               </a:rPr>
-              <a:t>                    </a:t>
-            </a:r>
-            <a:r>
-              <a:rPr>
-                <a:solidFill>
-                  <a:srgbClr val="657422"/>
-                </a:solidFill>
-                <a:latin typeface="Courier"/>
-              </a:rPr>
-              <a:t>data =</a:t>
-            </a:r>
-            <a:r>
-              <a:rPr>
-                <a:solidFill>
-                  <a:srgbClr val="003B4F"/>
-                </a:solidFill>
-                <a:latin typeface="Courier"/>
-              </a:rPr>
-              <a:t> bird_df)</a:t>
+              <a:t>))</a:t>
             </a:r>
             <a:br/>
             <a:br/>
@@ -11597,7 +11935,7 @@
                 </a:solidFill>
                 <a:latin typeface="Courier"/>
               </a:rPr>
-              <a:t>summary</a:t>
+              <a:t>levels</a:t>
             </a:r>
             <a:r>
               <a:rPr>
@@ -11606,7 +11944,7 @@
                 </a:solidFill>
                 <a:latin typeface="Courier"/>
               </a:rPr>
-              <a:t>(grazing_model)</a:t>
+              <a:t>(bird_df</a:t>
             </a:r>
             <a:r>
               <a:rPr>
@@ -11624,61 +11962,7 @@
                 </a:solidFill>
                 <a:latin typeface="Courier"/>
               </a:rPr>
-              <a:t>coefficients </a:t>
-            </a:r>
-            <a:r>
-              <a:rPr>
-                <a:solidFill>
-                  <a:srgbClr val="5E5E5E"/>
-                </a:solidFill>
-                <a:latin typeface="Courier"/>
-              </a:rPr>
-              <a:t>%&gt;%</a:t>
-            </a:r>
-            <a:r>
-              <a:rPr>
-                <a:solidFill>
-                  <a:srgbClr val="003B4F"/>
-                </a:solidFill>
-                <a:latin typeface="Courier"/>
-              </a:rPr>
-              <a:t> </a:t>
-            </a:r>
-            <a:r>
-              <a:rPr>
-                <a:solidFill>
-                  <a:srgbClr val="4758AB"/>
-                </a:solidFill>
-                <a:latin typeface="Courier"/>
-              </a:rPr>
-              <a:t>round</a:t>
-            </a:r>
-            <a:r>
-              <a:rPr>
-                <a:solidFill>
-                  <a:srgbClr val="003B4F"/>
-                </a:solidFill>
-                <a:latin typeface="Courier"/>
-              </a:rPr>
-              <a:t>(</a:t>
-            </a:r>
-            <a:r>
-              <a:rPr>
-                <a:solidFill>
-                  <a:srgbClr val="AD0000"/>
-                </a:solidFill>
-                <a:latin typeface="Courier"/>
-              </a:rPr>
-              <a:t>2</a:t>
-            </a:r>
-            <a:r>
-              <a:rPr>
-                <a:solidFill>
-                  <a:srgbClr val="003B4F"/>
-                </a:solidFill>
-                <a:latin typeface="Courier"/>
-              </a:rPr>
-              <a:t>)</a:t>
+              <a:t>grazing_class)</a:t>
             </a:r>
           </a:p>
           <a:p>
@@ -11689,13 +11973,7 @@
               <a:rPr>
                 <a:latin typeface="Courier"/>
               </a:rPr>
-              <a:t>                      Estimate Std. Error t value Pr(&gt;|t|)
-(Intercept)              15.72       2.77    5.68     0.00
-log_area                  7.25       1.26    5.77     0.00
-grazing_classlight        0.38       2.91    0.13     0.90
-grazing_classmoderate    -0.19       2.55   -0.07     0.94
-grazing_classheavy       -1.59       2.98   -0.53     0.60
-grazing_classintense    -11.89       2.93   -4.06     0.00</a:t>
+              <a:t>[1] "minimal"  "heavy"    "intense"  "light"    "moderate"</a:t>
             </a:r>
           </a:p>
         </p:txBody>
@@ -11719,65 +11997,128 @@
               <a:buNone/>
             </a:pPr>
             <a:r>
-              <a:rPr/>
-              <a:t>Now every coefficient is a comparison with </a:t>
+              <a:rPr>
+                <a:latin typeface="Courier"/>
+              </a:rPr>
+              <a:t>fct_relevel()</a:t>
+            </a:r>
+            <a:r>
+              <a:rPr/>
+              <a:t> </a:t>
             </a:r>
             <a:r>
               <a:rPr b="1"/>
+              <a:t>moves the levels you name to the front</a:t>
+            </a:r>
+            <a:r>
+              <a:rPr/>
+              <a:t> and leaves the rest where they were. Name one level and it becomes level 1 — the reference.</a:t>
+            </a:r>
+          </a:p>
+          <a:p>
+            <a:pPr lvl="0" indent="0" marL="0">
+              <a:buNone/>
+            </a:pPr>
+            <a:r>
+              <a:rPr>
+                <a:latin typeface="Courier"/>
+              </a:rPr>
               <a:t>minimal</a:t>
             </a:r>
             <a:r>
               <a:rPr/>
-              <a:t> grazing, and the pattern is obvious:</a:t>
-            </a:r>
-          </a:p>
-          <a:p>
-            <a:pPr lvl="0"/>
-            <a:r>
-              <a:rPr/>
-              <a:t>light, moderate and heavy are all </a:t>
+              <a:t> is now first. The other four are still in alphabetical order behind it, and that is fine: </a:t>
             </a:r>
             <a:r>
               <a:rPr b="1"/>
-              <a:t>indistinguishable</a:t>
-            </a:r>
-            <a:r>
-              <a:rPr/>
-              <a:t> from minimal</a:t>
-            </a:r>
-          </a:p>
-          <a:p>
-            <a:pPr lvl="0"/>
-            <a:r>
-              <a:rPr>
-                <a:latin typeface="Courier"/>
-              </a:rPr>
-              <a:t>intense</a:t>
-            </a:r>
-            <a:r>
-              <a:rPr/>
-              <a:t> costs about </a:t>
-            </a:r>
-            <a:r>
-              <a:rPr b="1"/>
-              <a:t>11.9 birds</a:t>
-            </a:r>
-            <a:r>
-              <a:rPr/>
-              <a:t>, p &lt; 0.001</a:t>
-            </a:r>
-          </a:p>
-          <a:p>
-            <a:pPr lvl="0" indent="0" marL="0">
-              <a:buNone/>
-            </a:pPr>
-            <a:r>
-              <a:rPr b="1"/>
-              <a:t>Grazing is a threshold, not a gradient</a:t>
-            </a:r>
-            <a:r>
-              <a:rPr/>
-              <a:t> — and fitting it as the number 1–5 hid that completely, averaging the effect into -2.85 birds per step.</a:t>
+              <a:t>only the first level decides the reference.</a:t>
+            </a:r>
+          </a:p>
+          <a:p>
+            <a:pPr lvl="0" indent="0" marL="1270000">
+              <a:buNone/>
+            </a:pPr>
+            <a:r>
+              <a:rPr sz="2000" b="1"/>
+              <a:t>Tip</a:t>
+            </a:r>
+          </a:p>
+          <a:p>
+            <a:pPr lvl="0" indent="0" marL="1270000">
+              <a:buNone/>
+            </a:pPr>
+            <a:r>
+              <a:rPr sz="2000" b="1"/>
+              <a:t>🖐 The habit to build</a:t>
+            </a:r>
+          </a:p>
+          <a:p>
+            <a:pPr lvl="0" indent="0" marL="1270000">
+              <a:buNone/>
+            </a:pPr>
+            <a:r>
+              <a:rPr sz="2000"/>
+              <a:t>One line, every time a factor enters a model:</a:t>
+            </a:r>
+          </a:p>
+          <a:p>
+            <a:pPr lvl="0" indent="0">
+              <a:buNone/>
+            </a:pPr>
+            <a:r>
+              <a:rPr>
+                <a:solidFill>
+                  <a:srgbClr val="4758AB"/>
+                </a:solidFill>
+                <a:latin typeface="Courier"/>
+              </a:rPr>
+              <a:t>fct_relevel</a:t>
+            </a:r>
+            <a:r>
+              <a:rPr>
+                <a:solidFill>
+                  <a:srgbClr val="003B4F"/>
+                </a:solidFill>
+                <a:latin typeface="Courier"/>
+              </a:rPr>
+              <a:t>(treatment, </a:t>
+            </a:r>
+            <a:r>
+              <a:rPr>
+                <a:solidFill>
+                  <a:srgbClr val="20794D"/>
+                </a:solidFill>
+                <a:latin typeface="Courier"/>
+              </a:rPr>
+              <a:t>"control"</a:t>
+            </a:r>
+            <a:r>
+              <a:rPr>
+                <a:solidFill>
+                  <a:srgbClr val="003B4F"/>
+                </a:solidFill>
+                <a:latin typeface="Courier"/>
+              </a:rPr>
+              <a:t>)</a:t>
+            </a:r>
+          </a:p>
+          <a:p>
+            <a:pPr lvl="0" indent="0" marL="1270000">
+              <a:buNone/>
+            </a:pPr>
+            <a:r>
+              <a:rPr sz="2000"/>
+              <a:t>Not </a:t>
+            </a:r>
+            <a:r>
+              <a:rPr sz="2000">
+                <a:latin typeface="Courier"/>
+              </a:rPr>
+              <a:t>factor()</a:t>
+            </a:r>
+            <a:r>
+              <a:rPr sz="2000"/>
+              <a:t> and hope. Not relevel-it-later. Set it where you make the factor.</a:t>
             </a:r>
           </a:p>
         </p:txBody>
@@ -11832,7 +12173,15 @@
             </a:pPr>
             <a:r>
               <a:rPr/>
-              <a:t>Why This Matters Even More in ANOVA</a:t>
+              <a:t>Naming All Five · Reference </a:t>
+            </a:r>
+            <a:r>
+              <a:rPr i="1"/>
+              <a:t>and</a:t>
+            </a:r>
+            <a:r>
+              <a:rPr/>
+              <a:t> Display Order</a:t>
             </a:r>
           </a:p>
         </p:txBody>
@@ -11857,65 +12206,269 @@
             </a:pPr>
             <a:r>
               <a:rPr/>
-              <a:t>With only continuous predictors there is no reference level at all — every slope is “per unit of X” and nothing is being compared with anything.</a:t>
-            </a:r>
-          </a:p>
-          <a:p>
-            <a:pPr lvl="0" indent="0" marL="0">
-              <a:buNone/>
-            </a:pPr>
-            <a:r>
-              <a:rPr/>
-              <a:t>The moment a </a:t>
+              <a:t>Naming one level fixed the </a:t>
             </a:r>
             <a:r>
               <a:rPr b="1"/>
-              <a:t>factor</a:t>
-            </a:r>
-            <a:r>
-              <a:rPr/>
-              <a:t> enters the model, every coefficient becomes a </a:t>
+              <a:t>reference</a:t>
+            </a:r>
+            <a:r>
+              <a:rPr/>
+              <a:t>. Name all five and you also fix the </a:t>
             </a:r>
             <a:r>
               <a:rPr b="1"/>
-              <a:t>contrast against the reference</a:t>
-            </a:r>
-            <a:r>
-              <a:rPr/>
-              <a:t>, and that is the whole structure of the next five weeks:</a:t>
-            </a:r>
-          </a:p>
-          <a:p>
-            <a:pPr lvl="0"/>
-            <a:r>
-              <a:rPr b="1"/>
-              <a:t>One-way ANOVA</a:t>
-            </a:r>
-            <a:r>
-              <a:rPr/>
-              <a:t> — treatment means against a control</a:t>
-            </a:r>
-          </a:p>
-          <a:p>
-            <a:pPr lvl="0"/>
-            <a:r>
-              <a:rPr b="1"/>
-              <a:t>Two-way ANOVA</a:t>
-            </a:r>
-            <a:r>
-              <a:rPr/>
-              <a:t> — main effects read at the other factor’s reference level</a:t>
-            </a:r>
-          </a:p>
-          <a:p>
-            <a:pPr lvl="0"/>
-            <a:r>
-              <a:rPr b="1"/>
-              <a:t>ANCOVA</a:t>
-            </a:r>
-            <a:r>
-              <a:rPr/>
-              <a:t> — separate intercepts, all relative to one group</a:t>
+              <a:t>order they print and plot in</a:t>
+            </a:r>
+            <a:r>
+              <a:rPr/>
+              <a:t> — light → intense, the way the gradient actually runs.</a:t>
+            </a:r>
+          </a:p>
+          <a:p>
+            <a:pPr lvl="0" indent="0">
+              <a:buNone/>
+            </a:pPr>
+            <a:r>
+              <a:rPr>
+                <a:solidFill>
+                  <a:srgbClr val="003B4F"/>
+                </a:solidFill>
+                <a:latin typeface="Courier"/>
+              </a:rPr>
+              <a:t>bird_df &lt;- bird_df </a:t>
+            </a:r>
+            <a:r>
+              <a:rPr>
+                <a:solidFill>
+                  <a:srgbClr val="5E5E5E"/>
+                </a:solidFill>
+                <a:latin typeface="Courier"/>
+              </a:rPr>
+              <a:t>%&gt;%</a:t>
+            </a:r>
+            <a:br/>
+            <a:r>
+              <a:rPr>
+                <a:solidFill>
+                  <a:srgbClr val="003B4F"/>
+                </a:solidFill>
+                <a:latin typeface="Courier"/>
+              </a:rPr>
+              <a:t>  </a:t>
+            </a:r>
+            <a:r>
+              <a:rPr>
+                <a:solidFill>
+                  <a:srgbClr val="4758AB"/>
+                </a:solidFill>
+                <a:latin typeface="Courier"/>
+              </a:rPr>
+              <a:t>mutate</a:t>
+            </a:r>
+            <a:r>
+              <a:rPr>
+                <a:solidFill>
+                  <a:srgbClr val="003B4F"/>
+                </a:solidFill>
+                <a:latin typeface="Courier"/>
+              </a:rPr>
+              <a:t>(</a:t>
+            </a:r>
+            <a:r>
+              <a:rPr>
+                <a:solidFill>
+                  <a:srgbClr val="657422"/>
+                </a:solidFill>
+                <a:latin typeface="Courier"/>
+              </a:rPr>
+              <a:t>grazing_class =</a:t>
+            </a:r>
+            <a:r>
+              <a:rPr>
+                <a:solidFill>
+                  <a:srgbClr val="003B4F"/>
+                </a:solidFill>
+                <a:latin typeface="Courier"/>
+              </a:rPr>
+              <a:t> </a:t>
+            </a:r>
+            <a:r>
+              <a:rPr>
+                <a:solidFill>
+                  <a:srgbClr val="4758AB"/>
+                </a:solidFill>
+                <a:latin typeface="Courier"/>
+              </a:rPr>
+              <a:t>fct_relevel</a:t>
+            </a:r>
+            <a:r>
+              <a:rPr>
+                <a:solidFill>
+                  <a:srgbClr val="003B4F"/>
+                </a:solidFill>
+                <a:latin typeface="Courier"/>
+              </a:rPr>
+              <a:t>(</a:t>
+            </a:r>
+            <a:br/>
+            <a:r>
+              <a:rPr>
+                <a:solidFill>
+                  <a:srgbClr val="003B4F"/>
+                </a:solidFill>
+                <a:latin typeface="Courier"/>
+              </a:rPr>
+              <a:t>    grazing_class,</a:t>
+            </a:r>
+            <a:br/>
+            <a:r>
+              <a:rPr>
+                <a:solidFill>
+                  <a:srgbClr val="003B4F"/>
+                </a:solidFill>
+                <a:latin typeface="Courier"/>
+              </a:rPr>
+              <a:t>    </a:t>
+            </a:r>
+            <a:r>
+              <a:rPr>
+                <a:solidFill>
+                  <a:srgbClr val="20794D"/>
+                </a:solidFill>
+                <a:latin typeface="Courier"/>
+              </a:rPr>
+              <a:t>"minimal"</a:t>
+            </a:r>
+            <a:r>
+              <a:rPr>
+                <a:solidFill>
+                  <a:srgbClr val="003B4F"/>
+                </a:solidFill>
+                <a:latin typeface="Courier"/>
+              </a:rPr>
+              <a:t>, </a:t>
+            </a:r>
+            <a:r>
+              <a:rPr>
+                <a:solidFill>
+                  <a:srgbClr val="20794D"/>
+                </a:solidFill>
+                <a:latin typeface="Courier"/>
+              </a:rPr>
+              <a:t>"light"</a:t>
+            </a:r>
+            <a:r>
+              <a:rPr>
+                <a:solidFill>
+                  <a:srgbClr val="003B4F"/>
+                </a:solidFill>
+                <a:latin typeface="Courier"/>
+              </a:rPr>
+              <a:t>, </a:t>
+            </a:r>
+            <a:r>
+              <a:rPr>
+                <a:solidFill>
+                  <a:srgbClr val="20794D"/>
+                </a:solidFill>
+                <a:latin typeface="Courier"/>
+              </a:rPr>
+              <a:t>"moderate"</a:t>
+            </a:r>
+            <a:r>
+              <a:rPr>
+                <a:solidFill>
+                  <a:srgbClr val="003B4F"/>
+                </a:solidFill>
+                <a:latin typeface="Courier"/>
+              </a:rPr>
+              <a:t>, </a:t>
+            </a:r>
+            <a:r>
+              <a:rPr>
+                <a:solidFill>
+                  <a:srgbClr val="20794D"/>
+                </a:solidFill>
+                <a:latin typeface="Courier"/>
+              </a:rPr>
+              <a:t>"heavy"</a:t>
+            </a:r>
+            <a:r>
+              <a:rPr>
+                <a:solidFill>
+                  <a:srgbClr val="003B4F"/>
+                </a:solidFill>
+                <a:latin typeface="Courier"/>
+              </a:rPr>
+              <a:t>, </a:t>
+            </a:r>
+            <a:r>
+              <a:rPr>
+                <a:solidFill>
+                  <a:srgbClr val="20794D"/>
+                </a:solidFill>
+                <a:latin typeface="Courier"/>
+              </a:rPr>
+              <a:t>"intense"</a:t>
+            </a:r>
+            <a:r>
+              <a:rPr>
+                <a:solidFill>
+                  <a:srgbClr val="003B4F"/>
+                </a:solidFill>
+                <a:latin typeface="Courier"/>
+              </a:rPr>
+              <a:t>))</a:t>
+            </a:r>
+            <a:br/>
+            <a:br/>
+            <a:r>
+              <a:rPr>
+                <a:solidFill>
+                  <a:srgbClr val="4758AB"/>
+                </a:solidFill>
+                <a:latin typeface="Courier"/>
+              </a:rPr>
+              <a:t>levels</a:t>
+            </a:r>
+            <a:r>
+              <a:rPr>
+                <a:solidFill>
+                  <a:srgbClr val="003B4F"/>
+                </a:solidFill>
+                <a:latin typeface="Courier"/>
+              </a:rPr>
+              <a:t>(bird_df</a:t>
+            </a:r>
+            <a:r>
+              <a:rPr>
+                <a:solidFill>
+                  <a:srgbClr val="5E5E5E"/>
+                </a:solidFill>
+                <a:latin typeface="Courier"/>
+              </a:rPr>
+              <a:t>$</a:t>
+            </a:r>
+            <a:r>
+              <a:rPr>
+                <a:solidFill>
+                  <a:srgbClr val="003B4F"/>
+                </a:solidFill>
+                <a:latin typeface="Courier"/>
+              </a:rPr>
+              <a:t>grazing_class)</a:t>
+            </a:r>
+          </a:p>
+          <a:p>
+            <a:pPr lvl="0" indent="0">
+              <a:buNone/>
+            </a:pPr>
+            <a:r>
+              <a:rPr>
+                <a:latin typeface="Courier"/>
+              </a:rPr>
+              <a:t>[1] "minimal"  "light"    "moderate" "heavy"    "intense" </a:t>
             </a:r>
           </a:p>
         </p:txBody>
@@ -11940,7 +12493,7 @@
             </a:pPr>
             <a:r>
               <a:rPr sz="2000" b="1"/>
-              <a:t>Important</a:t>
+              <a:t>Note</a:t>
             </a:r>
           </a:p>
           <a:p>
@@ -11949,7 +12502,7 @@
             </a:pPr>
             <a:r>
               <a:rPr sz="2000" b="1"/>
-              <a:t>✅ The rule to carry forward</a:t>
+              <a:t>✅ Both versions fit the same model</a:t>
             </a:r>
           </a:p>
           <a:p>
@@ -11957,14 +12510,16 @@
               <a:buNone/>
             </a:pPr>
             <a:r>
-              <a:rPr sz="2000">
-                <a:latin typeface="Courier"/>
-              </a:rPr>
-              <a:t>factor()</a:t>
-            </a:r>
-            <a:r>
               <a:rPr sz="2000"/>
-              <a:t> gives you alphabetical order. Alphabetical order is almost never the order your experiment was designed in.</a:t>
+              <a:t>Same reference, so same R², same F, same fitted values — only the </a:t>
+            </a:r>
+            <a:r>
+              <a:rPr sz="2000" b="1"/>
+              <a:t>order of the coefficient rows</a:t>
+            </a:r>
+            <a:r>
+              <a:rPr sz="2000"/>
+              <a:t> changes.</a:t>
             </a:r>
           </a:p>
           <a:p>
@@ -11972,12 +12527,25 @@
               <a:buNone/>
             </a:pPr>
             <a:r>
+              <a:rPr sz="2000"/>
+              <a:t>The reason to name all five anyway: that order becomes your </a:t>
+            </a:r>
+            <a:r>
               <a:rPr sz="2000" b="1"/>
-              <a:t>Set the control as the first level, every time</a:t>
+              <a:t>legend order</a:t>
             </a:r>
             <a:r>
               <a:rPr sz="2000"/>
-              <a:t>, and your model output reads as “what each treatment did to the control” without any further work.</a:t>
+              <a:t> in every figure you draw from this column.</a:t>
+            </a:r>
+          </a:p>
+          <a:p>
+            <a:pPr lvl="0" indent="0" marL="0">
+              <a:buNone/>
+            </a:pPr>
+            <a:r>
+              <a:rPr/>
+              <a:t>The activity ends by checking exactly this — if the legend runs minimal → intense instead of alphabetically, the relevel worked.</a:t>
             </a:r>
           </a:p>
         </p:txBody>
@@ -12017,8 +12585,11 @@
         <p:spPr>
           <a:xfrm>
             <a:off x="0" y="0"/>
-            <a:ext cx="9144000" cy="582780"/>
+            <a:ext cx="9144000" cy="602780"/>
           </a:xfrm>
+          <a:solidFill>
+            <a:srgbClr val="70121D"/>
+          </a:solidFill>
         </p:spPr>
         <p:txBody>
           <a:bodyPr/>
@@ -12029,7 +12600,310 @@
             </a:pPr>
             <a:r>
               <a:rPr/>
-              <a:t>Part 8 · Comparing Models</a:t>
+              <a:t>Same Model, Same F, a Readable Story</a:t>
+            </a:r>
+          </a:p>
+        </p:txBody>
+      </p:sp>
+      <p:sp>
+        <p:nvSpPr>
+          <p:cNvPr id="3" name="Content Placeholder 2"/>
+          <p:cNvSpPr>
+            <a:spLocks noGrp="1"/>
+          </p:cNvSpPr>
+          <p:nvPr>
+            <p:ph idx="1" sz="half"/>
+          </p:nvPr>
+        </p:nvSpPr>
+        <p:spPr/>
+        <p:txBody>
+          <a:bodyPr/>
+          <a:lstStyle/>
+          <a:p>
+            <a:pPr lvl="0" indent="0">
+              <a:buNone/>
+            </a:pPr>
+            <a:r>
+              <a:rPr>
+                <a:solidFill>
+                  <a:srgbClr val="003B4F"/>
+                </a:solidFill>
+                <a:latin typeface="Courier"/>
+              </a:rPr>
+              <a:t>grazing_model &lt;- </a:t>
+            </a:r>
+            <a:r>
+              <a:rPr>
+                <a:solidFill>
+                  <a:srgbClr val="4758AB"/>
+                </a:solidFill>
+                <a:latin typeface="Courier"/>
+              </a:rPr>
+              <a:t>lm</a:t>
+            </a:r>
+            <a:r>
+              <a:rPr>
+                <a:solidFill>
+                  <a:srgbClr val="003B4F"/>
+                </a:solidFill>
+                <a:latin typeface="Courier"/>
+              </a:rPr>
+              <a:t>(abundance </a:t>
+            </a:r>
+            <a:r>
+              <a:rPr>
+                <a:solidFill>
+                  <a:srgbClr val="5E5E5E"/>
+                </a:solidFill>
+                <a:latin typeface="Courier"/>
+              </a:rPr>
+              <a:t>~</a:t>
+            </a:r>
+            <a:r>
+              <a:rPr>
+                <a:solidFill>
+                  <a:srgbClr val="003B4F"/>
+                </a:solidFill>
+                <a:latin typeface="Courier"/>
+              </a:rPr>
+              <a:t> log_area </a:t>
+            </a:r>
+            <a:r>
+              <a:rPr>
+                <a:solidFill>
+                  <a:srgbClr val="5E5E5E"/>
+                </a:solidFill>
+                <a:latin typeface="Courier"/>
+              </a:rPr>
+              <a:t>+</a:t>
+            </a:r>
+            <a:r>
+              <a:rPr>
+                <a:solidFill>
+                  <a:srgbClr val="003B4F"/>
+                </a:solidFill>
+                <a:latin typeface="Courier"/>
+              </a:rPr>
+              <a:t> grazing_class,</a:t>
+            </a:r>
+            <a:br/>
+            <a:r>
+              <a:rPr>
+                <a:solidFill>
+                  <a:srgbClr val="003B4F"/>
+                </a:solidFill>
+                <a:latin typeface="Courier"/>
+              </a:rPr>
+              <a:t>                    </a:t>
+            </a:r>
+            <a:r>
+              <a:rPr>
+                <a:solidFill>
+                  <a:srgbClr val="657422"/>
+                </a:solidFill>
+                <a:latin typeface="Courier"/>
+              </a:rPr>
+              <a:t>data =</a:t>
+            </a:r>
+            <a:r>
+              <a:rPr>
+                <a:solidFill>
+                  <a:srgbClr val="003B4F"/>
+                </a:solidFill>
+                <a:latin typeface="Courier"/>
+              </a:rPr>
+              <a:t> bird_df)</a:t>
+            </a:r>
+            <a:br/>
+            <a:br/>
+            <a:r>
+              <a:rPr>
+                <a:solidFill>
+                  <a:srgbClr val="4758AB"/>
+                </a:solidFill>
+                <a:latin typeface="Courier"/>
+              </a:rPr>
+              <a:t>summary</a:t>
+            </a:r>
+            <a:r>
+              <a:rPr>
+                <a:solidFill>
+                  <a:srgbClr val="003B4F"/>
+                </a:solidFill>
+                <a:latin typeface="Courier"/>
+              </a:rPr>
+              <a:t>(grazing_model)</a:t>
+            </a:r>
+            <a:r>
+              <a:rPr>
+                <a:solidFill>
+                  <a:srgbClr val="5E5E5E"/>
+                </a:solidFill>
+                <a:latin typeface="Courier"/>
+              </a:rPr>
+              <a:t>$</a:t>
+            </a:r>
+            <a:r>
+              <a:rPr>
+                <a:solidFill>
+                  <a:srgbClr val="003B4F"/>
+                </a:solidFill>
+                <a:latin typeface="Courier"/>
+              </a:rPr>
+              <a:t>coefficients </a:t>
+            </a:r>
+            <a:r>
+              <a:rPr>
+                <a:solidFill>
+                  <a:srgbClr val="5E5E5E"/>
+                </a:solidFill>
+                <a:latin typeface="Courier"/>
+              </a:rPr>
+              <a:t>%&gt;%</a:t>
+            </a:r>
+            <a:r>
+              <a:rPr>
+                <a:solidFill>
+                  <a:srgbClr val="003B4F"/>
+                </a:solidFill>
+                <a:latin typeface="Courier"/>
+              </a:rPr>
+              <a:t> </a:t>
+            </a:r>
+            <a:r>
+              <a:rPr>
+                <a:solidFill>
+                  <a:srgbClr val="4758AB"/>
+                </a:solidFill>
+                <a:latin typeface="Courier"/>
+              </a:rPr>
+              <a:t>round</a:t>
+            </a:r>
+            <a:r>
+              <a:rPr>
+                <a:solidFill>
+                  <a:srgbClr val="003B4F"/>
+                </a:solidFill>
+                <a:latin typeface="Courier"/>
+              </a:rPr>
+              <a:t>(</a:t>
+            </a:r>
+            <a:r>
+              <a:rPr>
+                <a:solidFill>
+                  <a:srgbClr val="AD0000"/>
+                </a:solidFill>
+                <a:latin typeface="Courier"/>
+              </a:rPr>
+              <a:t>2</a:t>
+            </a:r>
+            <a:r>
+              <a:rPr>
+                <a:solidFill>
+                  <a:srgbClr val="003B4F"/>
+                </a:solidFill>
+                <a:latin typeface="Courier"/>
+              </a:rPr>
+              <a:t>)</a:t>
+            </a:r>
+          </a:p>
+          <a:p>
+            <a:pPr lvl="0" indent="0">
+              <a:buNone/>
+            </a:pPr>
+            <a:r>
+              <a:rPr>
+                <a:latin typeface="Courier"/>
+              </a:rPr>
+              <a:t>                      Estimate Std. Error t value Pr(&gt;|t|)
+(Intercept)              15.72       2.77    5.68     0.00
+log_area                  7.25       1.26    5.77     0.00
+grazing_classlight        0.38       2.91    0.13     0.90
+grazing_classmoderate    -0.19       2.55   -0.07     0.94
+grazing_classheavy       -1.59       2.98   -0.53     0.60
+grazing_classintense    -11.89       2.93   -4.06     0.00</a:t>
+            </a:r>
+          </a:p>
+        </p:txBody>
+      </p:sp>
+      <p:sp>
+        <p:nvSpPr>
+          <p:cNvPr id="4" name="Content Placeholder 3"/>
+          <p:cNvSpPr>
+            <a:spLocks noGrp="1"/>
+          </p:cNvSpPr>
+          <p:nvPr>
+            <p:ph idx="2" sz="half"/>
+          </p:nvPr>
+        </p:nvSpPr>
+        <p:spPr/>
+        <p:txBody>
+          <a:bodyPr/>
+          <a:lstStyle/>
+          <a:p>
+            <a:pPr lvl="0" indent="0" marL="0">
+              <a:buNone/>
+            </a:pPr>
+            <a:r>
+              <a:rPr/>
+              <a:t>Now every coefficient is a comparison with </a:t>
+            </a:r>
+            <a:r>
+              <a:rPr b="1"/>
+              <a:t>minimal</a:t>
+            </a:r>
+            <a:r>
+              <a:rPr/>
+              <a:t> grazing, and the pattern is obvious:</a:t>
+            </a:r>
+          </a:p>
+          <a:p>
+            <a:pPr lvl="0"/>
+            <a:r>
+              <a:rPr/>
+              <a:t>light, moderate and heavy are all </a:t>
+            </a:r>
+            <a:r>
+              <a:rPr b="1"/>
+              <a:t>indistinguishable</a:t>
+            </a:r>
+            <a:r>
+              <a:rPr/>
+              <a:t> from minimal</a:t>
+            </a:r>
+          </a:p>
+          <a:p>
+            <a:pPr lvl="0"/>
+            <a:r>
+              <a:rPr>
+                <a:latin typeface="Courier"/>
+              </a:rPr>
+              <a:t>intense</a:t>
+            </a:r>
+            <a:r>
+              <a:rPr/>
+              <a:t> costs about </a:t>
+            </a:r>
+            <a:r>
+              <a:rPr b="1"/>
+              <a:t>11.9 birds</a:t>
+            </a:r>
+            <a:r>
+              <a:rPr/>
+              <a:t>, p &lt; 0.001</a:t>
+            </a:r>
+          </a:p>
+          <a:p>
+            <a:pPr lvl="0" indent="0" marL="0">
+              <a:buNone/>
+            </a:pPr>
+            <a:r>
+              <a:rPr b="1"/>
+              <a:t>Grazing is a threshold, not a gradient</a:t>
+            </a:r>
+            <a:r>
+              <a:rPr/>
+              <a:t> — and fitting it as the number 1–5 hid that completely, averaging the effect into -2.85 birds per step.</a:t>
             </a:r>
           </a:p>
         </p:txBody>
@@ -12084,7 +12958,846 @@
             </a:pPr>
             <a:r>
               <a:rPr/>
-              <a:t>Comparing Models — the Problem</a:t>
+              <a:t>Adding the Coefficients Up</a:t>
+            </a:r>
+          </a:p>
+        </p:txBody>
+      </p:sp>
+      <mc:AlternateContent xmlns:mc="http://schemas.openxmlformats.org/markup-compatibility/2006">
+        <mc:Choice xmlns:a14="http://schemas.microsoft.com/office/drawing/2010/main" Requires="a14">
+          <p:sp>
+            <p:nvSpPr>
+              <p:cNvPr id="3" name="Content Placeholder 2"/>
+              <p:cNvSpPr>
+                <a:spLocks noGrp="1"/>
+              </p:cNvSpPr>
+              <p:nvPr>
+                <p:ph idx="1" sz="half"/>
+              </p:nvPr>
+            </p:nvSpPr>
+            <p:spPr/>
+            <p:txBody>
+              <a:bodyPr/>
+              <a:lstStyle/>
+              <a:p>
+                <a:pPr lvl="0" indent="0" marL="0">
+                  <a:buNone/>
+                </a:pPr>
+                <a:r>
+                  <a:rPr/>
+                  <a:t>A factor coefficient is </a:t>
+                </a:r>
+                <a:r>
+                  <a:rPr b="1"/>
+                  <a:t>a piece of an equation</a:t>
+                </a:r>
+                <a:r>
+                  <a:rPr/>
+                  <a:t>, not a mean on its own. To get a group’s prediction, start at the intercept and add the one switch that is on:</a:t>
+                </a:r>
+              </a:p>
+              <a:p>
+                <a:pPr lvl="0" indent="0" marL="0">
+                  <a:buNone/>
+                </a:pPr>
+                <a14:m>
+                  <m:oMathPara xmlns:m="http://schemas.openxmlformats.org/officeDocument/2006/math">
+                    <m:oMathParaPr>
+                      <m:jc m:val="center"/>
+                    </m:oMathParaPr>
+                    <m:oMath>
+                      <m:acc>
+                        <m:accPr>
+                          <m:chr m:val="̂"/>
+                        </m:accPr>
+                        <m:e>
+                          <m:r>
+                            <m:t>y</m:t>
+                          </m:r>
+                        </m:e>
+                      </m:acc>
+                      <m:r>
+                        <m:rPr>
+                          <m:sty m:val="p"/>
+                        </m:rPr>
+                        <m:t>=</m:t>
+                      </m:r>
+                      <m:sSub>
+                        <m:e>
+                          <m:r>
+                            <m:t>b</m:t>
+                          </m:r>
+                        </m:e>
+                        <m:sub>
+                          <m:r>
+                            <m:t>0</m:t>
+                          </m:r>
+                        </m:sub>
+                      </m:sSub>
+                      <m:r>
+                        <m:rPr>
+                          <m:sty m:val="p"/>
+                        </m:rPr>
+                        <m:t>+</m:t>
+                      </m:r>
+                      <m:sSub>
+                        <m:e>
+                          <m:r>
+                            <m:t>b</m:t>
+                          </m:r>
+                        </m:e>
+                        <m:sub>
+                          <m:r>
+                            <m:t>1</m:t>
+                          </m:r>
+                        </m:sub>
+                      </m:sSub>
+                      <m:r>
+                        <m:rPr>
+                          <m:sty m:val="p"/>
+                        </m:rPr>
+                        <m:t>(</m:t>
+                      </m:r>
+                      <m:r>
+                        <m:rPr>
+                          <m:nor/>
+                          <m:sty m:val="p"/>
+                        </m:rPr>
+                        <m:t>log_area</m:t>
+                      </m:r>
+                      <m:r>
+                        <m:rPr>
+                          <m:sty m:val="p"/>
+                        </m:rPr>
+                        <m:t>)</m:t>
+                      </m:r>
+                      <m:r>
+                        <m:rPr>
+                          <m:sty m:val="p"/>
+                        </m:rPr>
+                        <m:t>+</m:t>
+                      </m:r>
+                      <m:sSub>
+                        <m:e>
+                          <m:r>
+                            <m:t>b</m:t>
+                          </m:r>
+                        </m:e>
+                        <m:sub>
+                          <m:r>
+                            <m:t>L</m:t>
+                          </m:r>
+                        </m:sub>
+                      </m:sSub>
+                      <m:r>
+                        <m:t>L</m:t>
+                      </m:r>
+                      <m:r>
+                        <m:rPr>
+                          <m:sty m:val="p"/>
+                        </m:rPr>
+                        <m:t>+</m:t>
+                      </m:r>
+                      <m:sSub>
+                        <m:e>
+                          <m:r>
+                            <m:t>b</m:t>
+                          </m:r>
+                        </m:e>
+                        <m:sub>
+                          <m:r>
+                            <m:t>M</m:t>
+                          </m:r>
+                        </m:sub>
+                      </m:sSub>
+                      <m:r>
+                        <m:t>M</m:t>
+                      </m:r>
+                      <m:r>
+                        <m:rPr>
+                          <m:sty m:val="p"/>
+                        </m:rPr>
+                        <m:t>+</m:t>
+                      </m:r>
+                      <m:sSub>
+                        <m:e>
+                          <m:r>
+                            <m:t>b</m:t>
+                          </m:r>
+                        </m:e>
+                        <m:sub>
+                          <m:r>
+                            <m:t>H</m:t>
+                          </m:r>
+                        </m:sub>
+                      </m:sSub>
+                      <m:r>
+                        <m:t>H</m:t>
+                      </m:r>
+                      <m:r>
+                        <m:rPr>
+                          <m:sty m:val="p"/>
+                        </m:rPr>
+                        <m:t>+</m:t>
+                      </m:r>
+                      <m:sSub>
+                        <m:e>
+                          <m:r>
+                            <m:t>b</m:t>
+                          </m:r>
+                        </m:e>
+                        <m:sub>
+                          <m:r>
+                            <m:t>I</m:t>
+                          </m:r>
+                        </m:sub>
+                      </m:sSub>
+                      <m:r>
+                        <m:t>I</m:t>
+                      </m:r>
+                    </m:oMath>
+                  </m:oMathPara>
+                </a14:m>
+              </a:p>
+              <a:p>
+                <a:pPr lvl="0" indent="0" marL="0">
+                  <a:buNone/>
+                </a:pPr>
+                <a:r>
+                  <a:rPr/>
+                  <a:t>Hold area at its average and add them up — the </a:t>
+                </a:r>
+                <a:r>
+                  <a:rPr>
+                    <a:latin typeface="Courier"/>
+                  </a:rPr>
+                  <a:t>c(0, ...)</a:t>
+                </a:r>
+                <a:r>
+                  <a:rPr/>
+                  <a:t> </a:t>
+                </a:r>
+                <a:r>
+                  <a:rPr b="1"/>
+                  <a:t>is</a:t>
+                </a:r>
+                <a:r>
+                  <a:rPr/>
+                  <a:t> the reference level, minimal’s dummy:</a:t>
+                </a:r>
+              </a:p>
+              <a:p>
+                <a:pPr lvl="0" indent="0">
+                  <a:buNone/>
+                </a:pPr>
+                <a:r>
+                  <a:rPr>
+                    <a:solidFill>
+                      <a:srgbClr val="003B4F"/>
+                    </a:solidFill>
+                    <a:latin typeface="Courier"/>
+                  </a:rPr>
+                  <a:t>b  &lt;- </a:t>
+                </a:r>
+                <a:r>
+                  <a:rPr>
+                    <a:solidFill>
+                      <a:srgbClr val="4758AB"/>
+                    </a:solidFill>
+                    <a:latin typeface="Courier"/>
+                  </a:rPr>
+                  <a:t>coef</a:t>
+                </a:r>
+                <a:r>
+                  <a:rPr>
+                    <a:solidFill>
+                      <a:srgbClr val="003B4F"/>
+                    </a:solidFill>
+                    <a:latin typeface="Courier"/>
+                  </a:rPr>
+                  <a:t>(grazing_model)</a:t>
+                </a:r>
+                <a:br/>
+                <a:r>
+                  <a:rPr>
+                    <a:solidFill>
+                      <a:srgbClr val="003B4F"/>
+                    </a:solidFill>
+                    <a:latin typeface="Courier"/>
+                  </a:rPr>
+                  <a:t>la &lt;- </a:t>
+                </a:r>
+                <a:r>
+                  <a:rPr>
+                    <a:solidFill>
+                      <a:srgbClr val="4758AB"/>
+                    </a:solidFill>
+                    <a:latin typeface="Courier"/>
+                  </a:rPr>
+                  <a:t>mean</a:t>
+                </a:r>
+                <a:r>
+                  <a:rPr>
+                    <a:solidFill>
+                      <a:srgbClr val="003B4F"/>
+                    </a:solidFill>
+                    <a:latin typeface="Courier"/>
+                  </a:rPr>
+                  <a:t>(bird_df</a:t>
+                </a:r>
+                <a:r>
+                  <a:rPr>
+                    <a:solidFill>
+                      <a:srgbClr val="5E5E5E"/>
+                    </a:solidFill>
+                    <a:latin typeface="Courier"/>
+                  </a:rPr>
+                  <a:t>$</a:t>
+                </a:r>
+                <a:r>
+                  <a:rPr>
+                    <a:solidFill>
+                      <a:srgbClr val="003B4F"/>
+                    </a:solidFill>
+                    <a:latin typeface="Courier"/>
+                  </a:rPr>
+                  <a:t>log_area)</a:t>
+                </a:r>
+                <a:br/>
+                <a:br/>
+                <a:r>
+                  <a:rPr>
+                    <a:solidFill>
+                      <a:srgbClr val="003B4F"/>
+                    </a:solidFill>
+                    <a:latin typeface="Courier"/>
+                  </a:rPr>
+                  <a:t>group_fit &lt;- b[</a:t>
+                </a:r>
+                <a:r>
+                  <a:rPr>
+                    <a:solidFill>
+                      <a:srgbClr val="AD0000"/>
+                    </a:solidFill>
+                    <a:latin typeface="Courier"/>
+                  </a:rPr>
+                  <a:t>1</a:t>
+                </a:r>
+                <a:r>
+                  <a:rPr>
+                    <a:solidFill>
+                      <a:srgbClr val="003B4F"/>
+                    </a:solidFill>
+                    <a:latin typeface="Courier"/>
+                  </a:rPr>
+                  <a:t>] </a:t>
+                </a:r>
+                <a:r>
+                  <a:rPr>
+                    <a:solidFill>
+                      <a:srgbClr val="5E5E5E"/>
+                    </a:solidFill>
+                    <a:latin typeface="Courier"/>
+                  </a:rPr>
+                  <a:t>+</a:t>
+                </a:r>
+                <a:r>
+                  <a:rPr>
+                    <a:solidFill>
+                      <a:srgbClr val="003B4F"/>
+                    </a:solidFill>
+                    <a:latin typeface="Courier"/>
+                  </a:rPr>
+                  <a:t> b[</a:t>
+                </a:r>
+                <a:r>
+                  <a:rPr>
+                    <a:solidFill>
+                      <a:srgbClr val="AD0000"/>
+                    </a:solidFill>
+                    <a:latin typeface="Courier"/>
+                  </a:rPr>
+                  <a:t>2</a:t>
+                </a:r>
+                <a:r>
+                  <a:rPr>
+                    <a:solidFill>
+                      <a:srgbClr val="003B4F"/>
+                    </a:solidFill>
+                    <a:latin typeface="Courier"/>
+                  </a:rPr>
+                  <a:t>] </a:t>
+                </a:r>
+                <a:r>
+                  <a:rPr>
+                    <a:solidFill>
+                      <a:srgbClr val="5E5E5E"/>
+                    </a:solidFill>
+                    <a:latin typeface="Courier"/>
+                  </a:rPr>
+                  <a:t>*</a:t>
+                </a:r>
+                <a:r>
+                  <a:rPr>
+                    <a:solidFill>
+                      <a:srgbClr val="003B4F"/>
+                    </a:solidFill>
+                    <a:latin typeface="Courier"/>
+                  </a:rPr>
+                  <a:t> la </a:t>
+                </a:r>
+                <a:r>
+                  <a:rPr>
+                    <a:solidFill>
+                      <a:srgbClr val="5E5E5E"/>
+                    </a:solidFill>
+                    <a:latin typeface="Courier"/>
+                  </a:rPr>
+                  <a:t>+</a:t>
+                </a:r>
+                <a:r>
+                  <a:rPr>
+                    <a:solidFill>
+                      <a:srgbClr val="003B4F"/>
+                    </a:solidFill>
+                    <a:latin typeface="Courier"/>
+                  </a:rPr>
+                  <a:t> </a:t>
+                </a:r>
+                <a:r>
+                  <a:rPr>
+                    <a:solidFill>
+                      <a:srgbClr val="4758AB"/>
+                    </a:solidFill>
+                    <a:latin typeface="Courier"/>
+                  </a:rPr>
+                  <a:t>c</a:t>
+                </a:r>
+                <a:r>
+                  <a:rPr>
+                    <a:solidFill>
+                      <a:srgbClr val="003B4F"/>
+                    </a:solidFill>
+                    <a:latin typeface="Courier"/>
+                  </a:rPr>
+                  <a:t>(</a:t>
+                </a:r>
+                <a:r>
+                  <a:rPr>
+                    <a:solidFill>
+                      <a:srgbClr val="AD0000"/>
+                    </a:solidFill>
+                    <a:latin typeface="Courier"/>
+                  </a:rPr>
+                  <a:t>0</a:t>
+                </a:r>
+                <a:r>
+                  <a:rPr>
+                    <a:solidFill>
+                      <a:srgbClr val="003B4F"/>
+                    </a:solidFill>
+                    <a:latin typeface="Courier"/>
+                  </a:rPr>
+                  <a:t>, b[</a:t>
+                </a:r>
+                <a:r>
+                  <a:rPr>
+                    <a:solidFill>
+                      <a:srgbClr val="AD0000"/>
+                    </a:solidFill>
+                    <a:latin typeface="Courier"/>
+                  </a:rPr>
+                  <a:t>3</a:t>
+                </a:r>
+                <a:r>
+                  <a:rPr>
+                    <a:solidFill>
+                      <a:srgbClr val="5E5E5E"/>
+                    </a:solidFill>
+                    <a:latin typeface="Courier"/>
+                  </a:rPr>
+                  <a:t>:</a:t>
+                </a:r>
+                <a:r>
+                  <a:rPr>
+                    <a:solidFill>
+                      <a:srgbClr val="AD0000"/>
+                    </a:solidFill>
+                    <a:latin typeface="Courier"/>
+                  </a:rPr>
+                  <a:t>6</a:t>
+                </a:r>
+                <a:r>
+                  <a:rPr>
+                    <a:solidFill>
+                      <a:srgbClr val="003B4F"/>
+                    </a:solidFill>
+                    <a:latin typeface="Courier"/>
+                  </a:rPr>
+                  <a:t>])</a:t>
+                </a:r>
+                <a:br/>
+                <a:r>
+                  <a:rPr>
+                    <a:solidFill>
+                      <a:srgbClr val="4758AB"/>
+                    </a:solidFill>
+                    <a:latin typeface="Courier"/>
+                  </a:rPr>
+                  <a:t>names</a:t>
+                </a:r>
+                <a:r>
+                  <a:rPr>
+                    <a:solidFill>
+                      <a:srgbClr val="003B4F"/>
+                    </a:solidFill>
+                    <a:latin typeface="Courier"/>
+                  </a:rPr>
+                  <a:t>(group_fit) &lt;- </a:t>
+                </a:r>
+                <a:r>
+                  <a:rPr>
+                    <a:solidFill>
+                      <a:srgbClr val="4758AB"/>
+                    </a:solidFill>
+                    <a:latin typeface="Courier"/>
+                  </a:rPr>
+                  <a:t>levels</a:t>
+                </a:r>
+                <a:r>
+                  <a:rPr>
+                    <a:solidFill>
+                      <a:srgbClr val="003B4F"/>
+                    </a:solidFill>
+                    <a:latin typeface="Courier"/>
+                  </a:rPr>
+                  <a:t>(bird_df</a:t>
+                </a:r>
+                <a:r>
+                  <a:rPr>
+                    <a:solidFill>
+                      <a:srgbClr val="5E5E5E"/>
+                    </a:solidFill>
+                    <a:latin typeface="Courier"/>
+                  </a:rPr>
+                  <a:t>$</a:t>
+                </a:r>
+                <a:r>
+                  <a:rPr>
+                    <a:solidFill>
+                      <a:srgbClr val="003B4F"/>
+                    </a:solidFill>
+                    <a:latin typeface="Courier"/>
+                  </a:rPr>
+                  <a:t>grazing_class)</a:t>
+                </a:r>
+                <a:br/>
+                <a:r>
+                  <a:rPr>
+                    <a:solidFill>
+                      <a:srgbClr val="4758AB"/>
+                    </a:solidFill>
+                    <a:latin typeface="Courier"/>
+                  </a:rPr>
+                  <a:t>round</a:t>
+                </a:r>
+                <a:r>
+                  <a:rPr>
+                    <a:solidFill>
+                      <a:srgbClr val="003B4F"/>
+                    </a:solidFill>
+                    <a:latin typeface="Courier"/>
+                  </a:rPr>
+                  <a:t>(group_fit, </a:t>
+                </a:r>
+                <a:r>
+                  <a:rPr>
+                    <a:solidFill>
+                      <a:srgbClr val="AD0000"/>
+                    </a:solidFill>
+                    <a:latin typeface="Courier"/>
+                  </a:rPr>
+                  <a:t>1</a:t>
+                </a:r>
+                <a:r>
+                  <a:rPr>
+                    <a:solidFill>
+                      <a:srgbClr val="003B4F"/>
+                    </a:solidFill>
+                    <a:latin typeface="Courier"/>
+                  </a:rPr>
+                  <a:t>)</a:t>
+                </a:r>
+              </a:p>
+              <a:p>
+                <a:pPr lvl="0" indent="0">
+                  <a:buNone/>
+                </a:pPr>
+                <a:r>
+                  <a:rPr>
+                    <a:latin typeface="Courier"/>
+                  </a:rPr>
+                  <a:t> minimal    light moderate    heavy  intense 
+    22.5     22.9     22.3     20.9     10.6 </a:t>
+                </a:r>
+              </a:p>
+              <a:p>
+                <a:pPr lvl="0" indent="0" marL="0">
+                  <a:buNone/>
+                </a:pPr>
+                <a:r>
+                  <a:rPr>
+                    <a:latin typeface="Courier"/>
+                  </a:rPr>
+                  <a:t>minimal</a:t>
+                </a:r>
+                <a:r>
+                  <a:rPr/>
+                  <a:t> is 15.72 + 7.25(0.93) = </a:t>
+                </a:r>
+                <a:r>
+                  <a:rPr b="1"/>
+                  <a:t>22.5</a:t>
+                </a:r>
+                <a:r>
+                  <a:rPr/>
+                  <a:t> birds; </a:t>
+                </a:r>
+                <a:r>
+                  <a:rPr>
+                    <a:latin typeface="Courier"/>
+                  </a:rPr>
+                  <a:t>intense</a:t>
+                </a:r>
+                <a:r>
+                  <a:rPr/>
+                  <a:t> is that same number 11.89 lower. Every class is the reference prediction </a:t>
+                </a:r>
+                <a:r>
+                  <a:rPr b="1"/>
+                  <a:t>plus its own contrast</a:t>
+                </a:r>
+                <a:r>
+                  <a:rPr/>
+                  <a:t>.</a:t>
+                </a:r>
+              </a:p>
+            </p:txBody>
+          </p:sp>
+        </mc:Choice>
+      </mc:AlternateContent>
+      <mc:AlternateContent xmlns:mc="http://schemas.openxmlformats.org/markup-compatibility/2006">
+        <mc:Choice xmlns:a14="http://schemas.microsoft.com/office/drawing/2010/main" Requires="a14">
+          <p:sp>
+            <p:nvSpPr>
+              <p:cNvPr id="4" name="Content Placeholder 3"/>
+              <p:cNvSpPr>
+                <a:spLocks noGrp="1"/>
+              </p:cNvSpPr>
+              <p:nvPr>
+                <p:ph idx="2" sz="half"/>
+              </p:nvPr>
+            </p:nvSpPr>
+            <p:spPr/>
+            <p:txBody>
+              <a:bodyPr/>
+              <a:lstStyle/>
+              <a:p>
+                <a:pPr lvl="0" indent="0" marL="1270000">
+                  <a:buNone/>
+                </a:pPr>
+                <a:r>
+                  <a:rPr sz="2000" b="1"/>
+                  <a:t>Important</a:t>
+                </a:r>
+              </a:p>
+              <a:p>
+                <a:pPr lvl="0" indent="0" marL="1270000">
+                  <a:buNone/>
+                </a:pPr>
+                <a:r>
+                  <a:rPr sz="2000" b="1"/>
+                  <a:t>✅ This is where ANOVA starts</a:t>
+                </a:r>
+              </a:p>
+              <a:p>
+                <a:pPr lvl="0" indent="0" marL="1270000">
+                  <a:buNone/>
+                </a:pPr>
+                <a:r>
+                  <a:rPr sz="2000"/>
+                  <a:t>Drop the continuous predictor and the </a:t>
+                </a:r>
+                <a14:m>
+                  <m:oMath xmlns:m="http://schemas.openxmlformats.org/officeDocument/2006/math">
+                    <m:sSub>
+                      <m:e>
+                        <m:r>
+                          <m:t>b</m:t>
+                        </m:r>
+                      </m:e>
+                      <m:sub>
+                        <m:r>
+                          <m:t>1</m:t>
+                        </m:r>
+                      </m:sub>
+                    </m:sSub>
+                  </m:oMath>
+                </a14:m>
+                <a:r>
+                  <a:rPr sz="2000"/>
+                  <a:t> term disappears. Then</a:t>
+                </a:r>
+              </a:p>
+              <a:p>
+                <a:pPr lvl="0"/>
+                <a:r>
+                  <a:rPr sz="2000" b="1"/>
+                  <a:t>intercept</a:t>
+                </a:r>
+                <a:r>
+                  <a:rPr sz="2000"/>
+                  <a:t> = the reference group’s mean</a:t>
+                </a:r>
+              </a:p>
+              <a:p>
+                <a:pPr lvl="0"/>
+                <a:r>
+                  <a:rPr sz="2000" b="1"/>
+                  <a:t>intercept + contrast</a:t>
+                </a:r>
+                <a:r>
+                  <a:rPr sz="2000"/>
+                  <a:t> = any other group’s mean</a:t>
+                </a:r>
+              </a:p>
+              <a:p>
+                <a:pPr lvl="0" indent="0" marL="1270000">
+                  <a:buNone/>
+                </a:pPr>
+                <a:r>
+                  <a:rPr sz="2000" b="1"/>
+                  <a:t>One-way ANOVA is this slide with no </a:t>
+                </a:r>
+                <a:r>
+                  <a:rPr sz="2000" b="1">
+                    <a:latin typeface="Courier"/>
+                  </a:rPr>
+                  <a:t>log_area</a:t>
+                </a:r>
+                <a:r>
+                  <a:rPr sz="2000" b="1"/>
+                  <a:t> column</a:t>
+                </a:r>
+                <a:r>
+                  <a:rPr sz="2000"/>
+                  <a:t> — same dummy coding, same addition.</a:t>
+                </a:r>
+              </a:p>
+              <a:p>
+                <a:pPr lvl="0" indent="0" marL="1270000">
+                  <a:buNone/>
+                </a:pPr>
+                <a:r>
+                  <a:rPr sz="2000" b="1"/>
+                  <a:t>Note</a:t>
+                </a:r>
+              </a:p>
+              <a:p>
+                <a:pPr lvl="0" indent="0" marL="1270000">
+                  <a:buNone/>
+                </a:pPr>
+                <a:r>
+                  <a:rPr sz="2000" b="1"/>
+                  <a:t>🧭 Adjusted, not raw</a:t>
+                </a:r>
+              </a:p>
+              <a:p>
+                <a:pPr lvl="0" indent="0" marL="1270000">
+                  <a:buNone/>
+                </a:pPr>
+                <a:r>
+                  <a:rPr sz="2000"/>
+                  <a:t>Raw </a:t>
+                </a:r>
+                <a:r>
+                  <a:rPr sz="2000">
+                    <a:latin typeface="Courier"/>
+                  </a:rPr>
+                  <a:t>minimal</a:t>
+                </a:r>
+                <a:r>
+                  <a:rPr sz="2000"/>
+                  <a:t> is 28.6 birds, not 22.5 — ungrazed patches are also the </a:t>
+                </a:r>
+                <a:r>
+                  <a:rPr sz="2000" b="1"/>
+                  <a:t>big</a:t>
+                </a:r>
+                <a:r>
+                  <a:rPr sz="2000"/>
+                  <a:t> ones, and holding area constant takes that credit back. </a:t>
+                </a:r>
+                <a:r>
+                  <a:rPr sz="2000" b="1"/>
+                  <a:t>That gap is ANCOVA.</a:t>
+                </a:r>
+              </a:p>
+            </p:txBody>
+          </p:sp>
+        </mc:Choice>
+      </mc:AlternateContent>
+    </p:spTree>
+  </p:cSld>
+</p:sld>
+</file>
+
+<file path=ppt/slides/slide44.xml><?xml version="1.0" encoding="utf-8"?>
+<p:sld xmlns:a="http://schemas.openxmlformats.org/drawingml/2006/main" xmlns:r="http://schemas.openxmlformats.org/officeDocument/2006/relationships" xmlns:p="http://schemas.openxmlformats.org/presentationml/2006/main">
+  <p:cSld>
+    <p:spTree>
+      <p:nvGrpSpPr>
+        <p:cNvPr id="1" name=""/>
+        <p:cNvGrpSpPr/>
+        <p:nvPr/>
+      </p:nvGrpSpPr>
+      <p:grpSpPr>
+        <a:xfrm>
+          <a:off x="0" y="0"/>
+          <a:ext cx="0" cy="0"/>
+          <a:chOff x="0" y="0"/>
+          <a:chExt cx="0" cy="0"/>
+        </a:xfrm>
+      </p:grpSpPr>
+      <p:sp>
+        <p:nvSpPr>
+          <p:cNvPr id="2" name="Title 1"/>
+          <p:cNvSpPr>
+            <a:spLocks noGrp="1"/>
+          </p:cNvSpPr>
+          <p:nvPr>
+            <p:ph type="title"/>
+          </p:nvPr>
+        </p:nvSpPr>
+        <p:spPr>
+          <a:xfrm>
+            <a:off x="0" y="0"/>
+            <a:ext cx="9144000" cy="602780"/>
+          </a:xfrm>
+          <a:solidFill>
+            <a:srgbClr val="70121D"/>
+          </a:solidFill>
+        </p:spPr>
+        <p:txBody>
+          <a:bodyPr/>
+          <a:lstStyle/>
+          <a:p>
+            <a:pPr lvl="0" indent="0" marL="0">
+              <a:buNone/>
+            </a:pPr>
+            <a:r>
+              <a:rPr/>
+              <a:t>Why This Matters Even More in ANOVA</a:t>
             </a:r>
           </a:p>
         </p:txBody>
@@ -12104,49 +13817,70 @@
           <a:bodyPr/>
           <a:lstStyle/>
           <a:p>
+            <a:pPr lvl="0" indent="0" marL="0">
+              <a:buNone/>
+            </a:pPr>
+            <a:r>
+              <a:rPr/>
+              <a:t>With only continuous predictors there is no reference level at all — every slope is “per unit of X” and nothing is being compared with anything.</a:t>
+            </a:r>
+          </a:p>
+          <a:p>
+            <a:pPr lvl="0" indent="0" marL="0">
+              <a:buNone/>
+            </a:pPr>
+            <a:r>
+              <a:rPr/>
+              <a:t>The moment a </a:t>
+            </a:r>
+            <a:r>
+              <a:rPr b="1"/>
+              <a:t>factor</a:t>
+            </a:r>
+            <a:r>
+              <a:rPr/>
+              <a:t> enters the model, every coefficient becomes a </a:t>
+            </a:r>
+            <a:r>
+              <a:rPr b="1"/>
+              <a:t>contrast against the reference</a:t>
+            </a:r>
+            <a:r>
+              <a:rPr/>
+              <a:t>, and that is the whole structure of the next five weeks:</a:t>
+            </a:r>
+          </a:p>
+          <a:p>
             <a:pPr lvl="0"/>
             <a:r>
-              <a:rPr/>
-              <a:t>Which predictors should be in the model?</a:t>
+              <a:rPr b="1"/>
+              <a:t>One-way ANOVA</a:t>
+            </a:r>
+            <a:r>
+              <a:rPr/>
+              <a:t> — treatment means against a control</a:t>
             </a:r>
           </a:p>
           <a:p>
             <a:pPr lvl="0"/>
             <a:r>
               <a:rPr b="1"/>
-              <a:t>Occam’s razor:</a:t>
-            </a:r>
-            <a:r>
-              <a:rPr/>
-              <a:t> the best model balances fit against complexity</a:t>
+              <a:t>Two-way ANOVA</a:t>
+            </a:r>
+            <a:r>
+              <a:rPr/>
+              <a:t> — main effects read at the other factor’s reference level</a:t>
             </a:r>
           </a:p>
           <a:p>
             <a:pPr lvl="0"/>
             <a:r>
               <a:rPr b="1"/>
-              <a:t>Overfitting:</a:t>
-            </a:r>
-            <a:r>
-              <a:rPr/>
-              <a:t> a high R² bought with useless predictors — which is why R² alone cannot choose between models</a:t>
-            </a:r>
-          </a:p>
-          <a:p>
-            <a:pPr lvl="0" indent="0" marL="0">
-              <a:buNone/>
-            </a:pPr>
-            <a:r>
-              <a:rPr/>
-              <a:t>Compare </a:t>
-            </a:r>
-            <a:r>
-              <a:rPr b="1"/>
-              <a:t>nested</a:t>
-            </a:r>
-            <a:r>
-              <a:rPr/>
-              <a:t> models: one whose predictors are a subset of the other’s.</a:t>
+              <a:t>ANCOVA</a:t>
+            </a:r>
+            <a:r>
+              <a:rPr/>
+              <a:t> — separate intercepts, all relative to one group</a:t>
             </a:r>
           </a:p>
         </p:txBody>
@@ -12171,7 +13905,7 @@
             </a:pPr>
             <a:r>
               <a:rPr sz="2000" b="1"/>
-              <a:t>Note</a:t>
+              <a:t>Important</a:t>
             </a:r>
           </a:p>
           <a:p>
@@ -12180,7 +13914,7 @@
             </a:pPr>
             <a:r>
               <a:rPr sz="2000" b="1"/>
-              <a:t>📖 Reference</a:t>
+              <a:t>✅ The rule to carry forward</a:t>
             </a:r>
           </a:p>
           <a:p>
@@ -12188,8 +13922,27 @@
               <a:buNone/>
             </a:pPr>
             <a:r>
+              <a:rPr sz="2000">
+                <a:latin typeface="Courier"/>
+              </a:rPr>
+              <a:t>factor()</a:t>
+            </a:r>
+            <a:r>
               <a:rPr sz="2000"/>
-              <a:t>Quinn &amp; Keough, Ch. 6, works through exactly this dataset. Whitlock &amp; Schluter, Ch. 17, covers model comparison for regression.</a:t>
+              <a:t> gives you alphabetical order. Alphabetical order is almost never the order your experiment was designed in.</a:t>
+            </a:r>
+          </a:p>
+          <a:p>
+            <a:pPr lvl="0" indent="0" marL="1270000">
+              <a:buNone/>
+            </a:pPr>
+            <a:r>
+              <a:rPr sz="2000" b="1"/>
+              <a:t>Set the control as the first level, every time</a:t>
+            </a:r>
+            <a:r>
+              <a:rPr sz="2000"/>
+              <a:t>, and your model output reads as “what each treatment did to the control” without any further work.</a:t>
             </a:r>
           </a:p>
         </p:txBody>
@@ -12199,7 +13952,233 @@
 </p:sld>
 </file>
 
-<file path=ppt/slides/slide44.xml><?xml version="1.0" encoding="utf-8"?>
+<file path=ppt/slides/slide45.xml><?xml version="1.0" encoding="utf-8"?>
+<p:sld xmlns:a="http://schemas.openxmlformats.org/drawingml/2006/main" xmlns:r="http://schemas.openxmlformats.org/officeDocument/2006/relationships" xmlns:p="http://schemas.openxmlformats.org/presentationml/2006/main">
+  <p:cSld>
+    <p:spTree>
+      <p:nvGrpSpPr>
+        <p:cNvPr id="1" name=""/>
+        <p:cNvGrpSpPr/>
+        <p:nvPr/>
+      </p:nvGrpSpPr>
+      <p:grpSpPr>
+        <a:xfrm>
+          <a:off x="0" y="0"/>
+          <a:ext cx="0" cy="0"/>
+          <a:chOff x="0" y="0"/>
+          <a:chExt cx="0" cy="0"/>
+        </a:xfrm>
+      </p:grpSpPr>
+      <p:sp>
+        <p:nvSpPr>
+          <p:cNvPr id="2" name="Title 1"/>
+          <p:cNvSpPr>
+            <a:spLocks noGrp="1"/>
+          </p:cNvSpPr>
+          <p:nvPr>
+            <p:ph type="title"/>
+          </p:nvPr>
+        </p:nvSpPr>
+        <p:spPr>
+          <a:xfrm>
+            <a:off x="0" y="0"/>
+            <a:ext cx="9144000" cy="582780"/>
+          </a:xfrm>
+        </p:spPr>
+        <p:txBody>
+          <a:bodyPr/>
+          <a:lstStyle/>
+          <a:p>
+            <a:pPr lvl="0" indent="0" marL="0">
+              <a:buNone/>
+            </a:pPr>
+            <a:r>
+              <a:rPr/>
+              <a:t>Part 8 · Comparing Models</a:t>
+            </a:r>
+          </a:p>
+        </p:txBody>
+      </p:sp>
+    </p:spTree>
+  </p:cSld>
+</p:sld>
+</file>
+
+<file path=ppt/slides/slide46.xml><?xml version="1.0" encoding="utf-8"?>
+<p:sld xmlns:a="http://schemas.openxmlformats.org/drawingml/2006/main" xmlns:r="http://schemas.openxmlformats.org/officeDocument/2006/relationships" xmlns:p="http://schemas.openxmlformats.org/presentationml/2006/main">
+  <p:cSld>
+    <p:spTree>
+      <p:nvGrpSpPr>
+        <p:cNvPr id="1" name=""/>
+        <p:cNvGrpSpPr/>
+        <p:nvPr/>
+      </p:nvGrpSpPr>
+      <p:grpSpPr>
+        <a:xfrm>
+          <a:off x="0" y="0"/>
+          <a:ext cx="0" cy="0"/>
+          <a:chOff x="0" y="0"/>
+          <a:chExt cx="0" cy="0"/>
+        </a:xfrm>
+      </p:grpSpPr>
+      <p:sp>
+        <p:nvSpPr>
+          <p:cNvPr id="2" name="Title 1"/>
+          <p:cNvSpPr>
+            <a:spLocks noGrp="1"/>
+          </p:cNvSpPr>
+          <p:nvPr>
+            <p:ph type="title"/>
+          </p:nvPr>
+        </p:nvSpPr>
+        <p:spPr>
+          <a:xfrm>
+            <a:off x="0" y="0"/>
+            <a:ext cx="9144000" cy="602780"/>
+          </a:xfrm>
+          <a:solidFill>
+            <a:srgbClr val="70121D"/>
+          </a:solidFill>
+        </p:spPr>
+        <p:txBody>
+          <a:bodyPr/>
+          <a:lstStyle/>
+          <a:p>
+            <a:pPr lvl="0" indent="0" marL="0">
+              <a:buNone/>
+            </a:pPr>
+            <a:r>
+              <a:rPr/>
+              <a:t>Comparing Models — the Problem</a:t>
+            </a:r>
+          </a:p>
+        </p:txBody>
+      </p:sp>
+      <p:sp>
+        <p:nvSpPr>
+          <p:cNvPr id="3" name="Content Placeholder 2"/>
+          <p:cNvSpPr>
+            <a:spLocks noGrp="1"/>
+          </p:cNvSpPr>
+          <p:nvPr>
+            <p:ph idx="1" sz="half"/>
+          </p:nvPr>
+        </p:nvSpPr>
+        <p:spPr/>
+        <p:txBody>
+          <a:bodyPr/>
+          <a:lstStyle/>
+          <a:p>
+            <a:pPr lvl="0"/>
+            <a:r>
+              <a:rPr/>
+              <a:t>Which predictors should be in the model?</a:t>
+            </a:r>
+          </a:p>
+          <a:p>
+            <a:pPr lvl="0"/>
+            <a:r>
+              <a:rPr b="1"/>
+              <a:t>Occam’s razor:</a:t>
+            </a:r>
+            <a:r>
+              <a:rPr/>
+              <a:t> the best model balances fit against complexity</a:t>
+            </a:r>
+          </a:p>
+          <a:p>
+            <a:pPr lvl="0"/>
+            <a:r>
+              <a:rPr b="1"/>
+              <a:t>Overfitting:</a:t>
+            </a:r>
+            <a:r>
+              <a:rPr/>
+              <a:t> a high R² bought with useless predictors — which is why R² alone cannot choose between models</a:t>
+            </a:r>
+          </a:p>
+          <a:p>
+            <a:pPr lvl="0" indent="0" marL="0">
+              <a:buNone/>
+            </a:pPr>
+            <a:r>
+              <a:rPr>
+                <a:latin typeface="Courier"/>
+              </a:rPr>
+              <a:t>anova()</a:t>
+            </a:r>
+            <a:r>
+              <a:rPr/>
+              <a:t> needs the models to be </a:t>
+            </a:r>
+            <a:r>
+              <a:rPr b="1"/>
+              <a:t>nested</a:t>
+            </a:r>
+            <a:r>
+              <a:rPr/>
+              <a:t> — one model’s predictors a subset of the other’s. </a:t>
+            </a:r>
+            <a:r>
+              <a:rPr b="1"/>
+              <a:t>AIC does not</a:t>
+            </a:r>
+            <a:r>
+              <a:rPr/>
+              <a:t>, which is why it can rank “area only” against “grazing only”; it only needs the same response and the same rows.</a:t>
+            </a:r>
+          </a:p>
+        </p:txBody>
+      </p:sp>
+      <p:sp>
+        <p:nvSpPr>
+          <p:cNvPr id="4" name="Content Placeholder 3"/>
+          <p:cNvSpPr>
+            <a:spLocks noGrp="1"/>
+          </p:cNvSpPr>
+          <p:nvPr>
+            <p:ph idx="2" sz="half"/>
+          </p:nvPr>
+        </p:nvSpPr>
+        <p:spPr/>
+        <p:txBody>
+          <a:bodyPr/>
+          <a:lstStyle/>
+          <a:p>
+            <a:pPr lvl="0" indent="0" marL="1270000">
+              <a:buNone/>
+            </a:pPr>
+            <a:r>
+              <a:rPr sz="2000" b="1"/>
+              <a:t>Note</a:t>
+            </a:r>
+          </a:p>
+          <a:p>
+            <a:pPr lvl="0" indent="0" marL="1270000">
+              <a:buNone/>
+            </a:pPr>
+            <a:r>
+              <a:rPr sz="2000" b="1"/>
+              <a:t>📖 Reference</a:t>
+            </a:r>
+          </a:p>
+          <a:p>
+            <a:pPr lvl="0" indent="0" marL="1270000">
+              <a:buNone/>
+            </a:pPr>
+            <a:r>
+              <a:rPr sz="2000"/>
+              <a:t>Quinn &amp; Keough, Ch. 6, works through exactly this dataset. Whitlock &amp; Schluter, Ch. 17, covers model comparison for regression.</a:t>
+            </a:r>
+          </a:p>
+        </p:txBody>
+      </p:sp>
+    </p:spTree>
+  </p:cSld>
+</p:sld>
+</file>
+
+<file path=ppt/slides/slide47.xml><?xml version="1.0" encoding="utf-8"?>
 <p:sld xmlns:a="http://schemas.openxmlformats.org/drawingml/2006/main" xmlns:r="http://schemas.openxmlformats.org/officeDocument/2006/relationships" xmlns:p="http://schemas.openxmlformats.org/presentationml/2006/main">
   <p:cSld>
     <p:spTree>
@@ -12643,6 +14622,31 @@
                   <a:t>the same rows</a:t>
                 </a:r>
               </a:p>
+              <a:p>
+                <a:pPr lvl="0"/>
+                <a:r>
+                  <a:rPr/>
+                  <a:t>This is Quinn &amp; Keough’s form; </a:t>
+                </a:r>
+                <a:r>
+                  <a:rPr>
+                    <a:latin typeface="Courier"/>
+                  </a:rPr>
+                  <a:t>AIC()</a:t>
+                </a:r>
+                <a:r>
+                  <a:rPr/>
+                  <a:t> in R adds a constant, so the printed values differ from the formula while every </a:t>
+                </a:r>
+                <a:r>
+                  <a:rPr b="1"/>
+                  <a:t>ΔAIC</a:t>
+                </a:r>
+                <a:r>
+                  <a:rPr/>
+                  <a:t> is identical</a:t>
+                </a:r>
+              </a:p>
             </p:txBody>
           </p:sp>
         </mc:Choice>
@@ -12704,1229 +14708,6 @@
             <a:r>
               <a:rPr sz="2000"/>
               <a:t> be compared by AIC, and R will not warn you.</a:t>
-            </a:r>
-          </a:p>
-        </p:txBody>
-      </p:sp>
-    </p:spTree>
-  </p:cSld>
-</p:sld>
-</file>
-
-<file path=ppt/slides/slide45.xml><?xml version="1.0" encoding="utf-8"?>
-<p:sld xmlns:a="http://schemas.openxmlformats.org/drawingml/2006/main" xmlns:r="http://schemas.openxmlformats.org/officeDocument/2006/relationships" xmlns:p="http://schemas.openxmlformats.org/presentationml/2006/main">
-  <p:cSld>
-    <p:spTree>
-      <p:nvGrpSpPr>
-        <p:cNvPr id="1" name=""/>
-        <p:cNvGrpSpPr/>
-        <p:nvPr/>
-      </p:nvGrpSpPr>
-      <p:grpSpPr>
-        <a:xfrm>
-          <a:off x="0" y="0"/>
-          <a:ext cx="0" cy="0"/>
-          <a:chOff x="0" y="0"/>
-          <a:chExt cx="0" cy="0"/>
-        </a:xfrm>
-      </p:grpSpPr>
-      <p:sp>
-        <p:nvSpPr>
-          <p:cNvPr id="2" name="Title 1"/>
-          <p:cNvSpPr>
-            <a:spLocks noGrp="1"/>
-          </p:cNvSpPr>
-          <p:nvPr>
-            <p:ph type="title"/>
-          </p:nvPr>
-        </p:nvSpPr>
-        <p:spPr>
-          <a:xfrm>
-            <a:off x="0" y="0"/>
-            <a:ext cx="9144000" cy="602780"/>
-          </a:xfrm>
-          <a:solidFill>
-            <a:srgbClr val="70121D"/>
-          </a:solidFill>
-        </p:spPr>
-        <p:txBody>
-          <a:bodyPr/>
-          <a:lstStyle/>
-          <a:p>
-            <a:pPr lvl="0" indent="0" marL="0">
-              <a:buNone/>
-            </a:pPr>
-            <a:r>
-              <a:rPr/>
-              <a:t>Comparing Models — How to Search</a:t>
-            </a:r>
-          </a:p>
-        </p:txBody>
-      </p:sp>
-      <p:sp>
-        <p:nvSpPr>
-          <p:cNvPr id="3" name="Content Placeholder 2"/>
-          <p:cNvSpPr>
-            <a:spLocks noGrp="1"/>
-          </p:cNvSpPr>
-          <p:nvPr>
-            <p:ph idx="1" sz="half"/>
-          </p:nvPr>
-        </p:nvSpPr>
-        <p:spPr/>
-        <p:txBody>
-          <a:bodyPr/>
-          <a:lstStyle/>
-          <a:p>
-            <a:pPr lvl="0"/>
-            <a:r>
-              <a:rPr/>
-              <a:t>Fit all possible models and compare — fine with a few predictors, hopeless with many</a:t>
-            </a:r>
-          </a:p>
-          <a:p>
-            <a:pPr lvl="0"/>
-            <a:r>
-              <a:rPr b="1"/>
-              <a:t>Automated stepwise</a:t>
-            </a:r>
-            <a:r>
-              <a:rPr/>
-              <a:t> selection adds or removes terms by partial F or AIC</a:t>
-            </a:r>
-          </a:p>
-          <a:p>
-            <a:pPr lvl="0"/>
-            <a:r>
-              <a:rPr/>
-              <a:t>We use </a:t>
-            </a:r>
-            <a:r>
-              <a:rPr b="1"/>
-              <a:t>manual backward selection</a:t>
-            </a:r>
-            <a:r>
-              <a:rPr/>
-              <a:t>: start full, drop what earns nothing, stop when dropping hurts</a:t>
-            </a:r>
-          </a:p>
-        </p:txBody>
-      </p:sp>
-      <p:sp>
-        <p:nvSpPr>
-          <p:cNvPr id="4" name="Content Placeholder 3"/>
-          <p:cNvSpPr>
-            <a:spLocks noGrp="1"/>
-          </p:cNvSpPr>
-          <p:nvPr>
-            <p:ph idx="2" sz="half"/>
-          </p:nvPr>
-        </p:nvSpPr>
-        <p:spPr/>
-        <p:txBody>
-          <a:bodyPr/>
-          <a:lstStyle/>
-          <a:p>
-            <a:pPr lvl="0" indent="0" marL="1270000">
-              <a:buNone/>
-            </a:pPr>
-            <a:r>
-              <a:rPr sz="2000" b="1"/>
-              <a:t>Warning</a:t>
-            </a:r>
-          </a:p>
-          <a:p>
-            <a:pPr lvl="0" indent="0" marL="1270000">
-              <a:buNone/>
-            </a:pPr>
-            <a:r>
-              <a:rPr sz="2000" b="1"/>
-              <a:t>⚠️ Stepwise selection is controversial</a:t>
-            </a:r>
-          </a:p>
-          <a:p>
-            <a:pPr lvl="0" indent="0" marL="1270000">
-              <a:buNone/>
-            </a:pPr>
-            <a:r>
-              <a:rPr sz="2000"/>
-              <a:t>It inflates R², biases p-values, and knows nothing about biology. A small set of models you can </a:t>
-            </a:r>
-            <a:r>
-              <a:rPr sz="2000" i="1"/>
-              <a:t>justify</a:t>
-            </a:r>
-            <a:r>
-              <a:rPr sz="2000"/>
-              <a:t> beats an automated search over all of them.</a:t>
-            </a:r>
-          </a:p>
-        </p:txBody>
-      </p:sp>
-    </p:spTree>
-  </p:cSld>
-</p:sld>
-</file>
-
-<file path=ppt/slides/slide46.xml><?xml version="1.0" encoding="utf-8"?>
-<p:sld xmlns:a="http://schemas.openxmlformats.org/drawingml/2006/main" xmlns:r="http://schemas.openxmlformats.org/officeDocument/2006/relationships" xmlns:p="http://schemas.openxmlformats.org/presentationml/2006/main">
-  <p:cSld>
-    <p:spTree>
-      <p:nvGrpSpPr>
-        <p:cNvPr id="1" name=""/>
-        <p:cNvGrpSpPr/>
-        <p:nvPr/>
-      </p:nvGrpSpPr>
-      <p:grpSpPr>
-        <a:xfrm>
-          <a:off x="0" y="0"/>
-          <a:ext cx="0" cy="0"/>
-          <a:chOff x="0" y="0"/>
-          <a:chExt cx="0" cy="0"/>
-        </a:xfrm>
-      </p:grpSpPr>
-      <p:sp>
-        <p:nvSpPr>
-          <p:cNvPr id="2" name="Title 1"/>
-          <p:cNvSpPr>
-            <a:spLocks noGrp="1"/>
-          </p:cNvSpPr>
-          <p:nvPr>
-            <p:ph type="title"/>
-          </p:nvPr>
-        </p:nvSpPr>
-        <p:spPr>
-          <a:xfrm>
-            <a:off x="0" y="0"/>
-            <a:ext cx="9144000" cy="602780"/>
-          </a:xfrm>
-          <a:solidFill>
-            <a:srgbClr val="70121D"/>
-          </a:solidFill>
-        </p:spPr>
-        <p:txBody>
-          <a:bodyPr/>
-          <a:lstStyle/>
-          <a:p>
-            <a:pPr lvl="0" indent="0" marL="0">
-              <a:buNone/>
-            </a:pPr>
-            <a:r>
-              <a:rPr/>
-              <a:t>Comparing Models — Putting It Together</a:t>
-            </a:r>
-          </a:p>
-        </p:txBody>
-      </p:sp>
-      <p:sp>
-        <p:nvSpPr>
-          <p:cNvPr id="3" name="Content Placeholder 2"/>
-          <p:cNvSpPr>
-            <a:spLocks noGrp="1"/>
-          </p:cNvSpPr>
-          <p:nvPr>
-            <p:ph idx="1" sz="half"/>
-          </p:nvPr>
-        </p:nvSpPr>
-        <p:spPr/>
-        <p:txBody>
-          <a:bodyPr/>
-          <a:lstStyle/>
-          <a:p>
-            <a:pPr lvl="0" indent="0">
-              <a:buNone/>
-            </a:pPr>
-            <a:r>
-              <a:rPr>
-                <a:solidFill>
-                  <a:srgbClr val="003B4F"/>
-                </a:solidFill>
-                <a:latin typeface="Courier"/>
-              </a:rPr>
-              <a:t>model_comparison &lt;- </a:t>
-            </a:r>
-            <a:r>
-              <a:rPr>
-                <a:solidFill>
-                  <a:srgbClr val="4758AB"/>
-                </a:solidFill>
-                <a:latin typeface="Courier"/>
-              </a:rPr>
-              <a:t>tibble</a:t>
-            </a:r>
-            <a:r>
-              <a:rPr>
-                <a:solidFill>
-                  <a:srgbClr val="003B4F"/>
-                </a:solidFill>
-                <a:latin typeface="Courier"/>
-              </a:rPr>
-              <a:t>(</a:t>
-            </a:r>
-            <a:br/>
-            <a:r>
-              <a:rPr>
-                <a:solidFill>
-                  <a:srgbClr val="003B4F"/>
-                </a:solidFill>
-                <a:latin typeface="Courier"/>
-              </a:rPr>
-              <a:t>  </a:t>
-            </a:r>
-            <a:r>
-              <a:rPr>
-                <a:solidFill>
-                  <a:srgbClr val="657422"/>
-                </a:solidFill>
-                <a:latin typeface="Courier"/>
-              </a:rPr>
-              <a:t>model =</a:t>
-            </a:r>
-            <a:r>
-              <a:rPr>
-                <a:solidFill>
-                  <a:srgbClr val="003B4F"/>
-                </a:solidFill>
-                <a:latin typeface="Courier"/>
-              </a:rPr>
-              <a:t> </a:t>
-            </a:r>
-            <a:r>
-              <a:rPr>
-                <a:solidFill>
-                  <a:srgbClr val="4758AB"/>
-                </a:solidFill>
-                <a:latin typeface="Courier"/>
-              </a:rPr>
-              <a:t>c</a:t>
-            </a:r>
-            <a:r>
-              <a:rPr>
-                <a:solidFill>
-                  <a:srgbClr val="003B4F"/>
-                </a:solidFill>
-                <a:latin typeface="Courier"/>
-              </a:rPr>
-              <a:t>(</a:t>
-            </a:r>
-            <a:r>
-              <a:rPr>
-                <a:solidFill>
-                  <a:srgbClr val="20794D"/>
-                </a:solidFill>
-                <a:latin typeface="Courier"/>
-              </a:rPr>
-              <a:t>"all six predictors"</a:t>
-            </a:r>
-            <a:r>
-              <a:rPr>
-                <a:solidFill>
-                  <a:srgbClr val="003B4F"/>
-                </a:solidFill>
-                <a:latin typeface="Courier"/>
-              </a:rPr>
-              <a:t>,</a:t>
-            </a:r>
-            <a:br/>
-            <a:r>
-              <a:rPr>
-                <a:solidFill>
-                  <a:srgbClr val="003B4F"/>
-                </a:solidFill>
-                <a:latin typeface="Courier"/>
-              </a:rPr>
-              <a:t>            </a:t>
-            </a:r>
-            <a:r>
-              <a:rPr>
-                <a:solidFill>
-                  <a:srgbClr val="20794D"/>
-                </a:solidFill>
-                <a:latin typeface="Courier"/>
-              </a:rPr>
-              <a:t>"log_area + grazing"</a:t>
-            </a:r>
-            <a:r>
-              <a:rPr>
-                <a:solidFill>
-                  <a:srgbClr val="003B4F"/>
-                </a:solidFill>
-                <a:latin typeface="Courier"/>
-              </a:rPr>
-              <a:t>,</a:t>
-            </a:r>
-            <a:br/>
-            <a:r>
-              <a:rPr>
-                <a:solidFill>
-                  <a:srgbClr val="003B4F"/>
-                </a:solidFill>
-                <a:latin typeface="Courier"/>
-              </a:rPr>
-              <a:t>            </a:t>
-            </a:r>
-            <a:r>
-              <a:rPr>
-                <a:solidFill>
-                  <a:srgbClr val="20794D"/>
-                </a:solidFill>
-                <a:latin typeface="Courier"/>
-              </a:rPr>
-              <a:t>"log_area only"</a:t>
-            </a:r>
-            <a:r>
-              <a:rPr>
-                <a:solidFill>
-                  <a:srgbClr val="003B4F"/>
-                </a:solidFill>
-                <a:latin typeface="Courier"/>
-              </a:rPr>
-              <a:t>,</a:t>
-            </a:r>
-            <a:br/>
-            <a:r>
-              <a:rPr>
-                <a:solidFill>
-                  <a:srgbClr val="003B4F"/>
-                </a:solidFill>
-                <a:latin typeface="Courier"/>
-              </a:rPr>
-              <a:t>            </a:t>
-            </a:r>
-            <a:r>
-              <a:rPr>
-                <a:solidFill>
-                  <a:srgbClr val="20794D"/>
-                </a:solidFill>
-                <a:latin typeface="Courier"/>
-              </a:rPr>
-              <a:t>"grazing only"</a:t>
-            </a:r>
-            <a:r>
-              <a:rPr>
-                <a:solidFill>
-                  <a:srgbClr val="003B4F"/>
-                </a:solidFill>
-                <a:latin typeface="Courier"/>
-              </a:rPr>
-              <a:t>),</a:t>
-            </a:r>
-            <a:br/>
-            <a:r>
-              <a:rPr>
-                <a:solidFill>
-                  <a:srgbClr val="003B4F"/>
-                </a:solidFill>
-                <a:latin typeface="Courier"/>
-              </a:rPr>
-              <a:t>  </a:t>
-            </a:r>
-            <a:r>
-              <a:rPr>
-                <a:solidFill>
-                  <a:srgbClr val="657422"/>
-                </a:solidFill>
-                <a:latin typeface="Courier"/>
-              </a:rPr>
-              <a:t>adj_r2 =</a:t>
-            </a:r>
-            <a:r>
-              <a:rPr>
-                <a:solidFill>
-                  <a:srgbClr val="003B4F"/>
-                </a:solidFill>
-                <a:latin typeface="Courier"/>
-              </a:rPr>
-              <a:t> </a:t>
-            </a:r>
-            <a:r>
-              <a:rPr>
-                <a:solidFill>
-                  <a:srgbClr val="4758AB"/>
-                </a:solidFill>
-                <a:latin typeface="Courier"/>
-              </a:rPr>
-              <a:t>c</a:t>
-            </a:r>
-            <a:r>
-              <a:rPr>
-                <a:solidFill>
-                  <a:srgbClr val="003B4F"/>
-                </a:solidFill>
-                <a:latin typeface="Courier"/>
-              </a:rPr>
-              <a:t>(</a:t>
-            </a:r>
-            <a:r>
-              <a:rPr>
-                <a:solidFill>
-                  <a:srgbClr val="4758AB"/>
-                </a:solidFill>
-                <a:latin typeface="Courier"/>
-              </a:rPr>
-              <a:t>summary</a:t>
-            </a:r>
-            <a:r>
-              <a:rPr>
-                <a:solidFill>
-                  <a:srgbClr val="003B4F"/>
-                </a:solidFill>
-                <a:latin typeface="Courier"/>
-              </a:rPr>
-              <a:t>(full_model)</a:t>
-            </a:r>
-            <a:r>
-              <a:rPr>
-                <a:solidFill>
-                  <a:srgbClr val="5E5E5E"/>
-                </a:solidFill>
-                <a:latin typeface="Courier"/>
-              </a:rPr>
-              <a:t>$</a:t>
-            </a:r>
-            <a:r>
-              <a:rPr>
-                <a:solidFill>
-                  <a:srgbClr val="003B4F"/>
-                </a:solidFill>
-                <a:latin typeface="Courier"/>
-              </a:rPr>
-              <a:t>adj.r.squared,</a:t>
-            </a:r>
-            <a:br/>
-            <a:r>
-              <a:rPr>
-                <a:solidFill>
-                  <a:srgbClr val="003B4F"/>
-                </a:solidFill>
-                <a:latin typeface="Courier"/>
-              </a:rPr>
-              <a:t>             </a:t>
-            </a:r>
-            <a:r>
-              <a:rPr>
-                <a:solidFill>
-                  <a:srgbClr val="4758AB"/>
-                </a:solidFill>
-                <a:latin typeface="Courier"/>
-              </a:rPr>
-              <a:t>summary</a:t>
-            </a:r>
-            <a:r>
-              <a:rPr>
-                <a:solidFill>
-                  <a:srgbClr val="003B4F"/>
-                </a:solidFill>
-                <a:latin typeface="Courier"/>
-              </a:rPr>
-              <a:t>(reduced_model)</a:t>
-            </a:r>
-            <a:r>
-              <a:rPr>
-                <a:solidFill>
-                  <a:srgbClr val="5E5E5E"/>
-                </a:solidFill>
-                <a:latin typeface="Courier"/>
-              </a:rPr>
-              <a:t>$</a:t>
-            </a:r>
-            <a:r>
-              <a:rPr>
-                <a:solidFill>
-                  <a:srgbClr val="003B4F"/>
-                </a:solidFill>
-                <a:latin typeface="Courier"/>
-              </a:rPr>
-              <a:t>adj.r.squared,</a:t>
-            </a:r>
-            <a:br/>
-            <a:r>
-              <a:rPr>
-                <a:solidFill>
-                  <a:srgbClr val="003B4F"/>
-                </a:solidFill>
-                <a:latin typeface="Courier"/>
-              </a:rPr>
-              <a:t>             </a:t>
-            </a:r>
-            <a:r>
-              <a:rPr>
-                <a:solidFill>
-                  <a:srgbClr val="4758AB"/>
-                </a:solidFill>
-                <a:latin typeface="Courier"/>
-              </a:rPr>
-              <a:t>summary</a:t>
-            </a:r>
-            <a:r>
-              <a:rPr>
-                <a:solidFill>
-                  <a:srgbClr val="003B4F"/>
-                </a:solidFill>
-                <a:latin typeface="Courier"/>
-              </a:rPr>
-              <a:t>(</a:t>
-            </a:r>
-            <a:r>
-              <a:rPr>
-                <a:solidFill>
-                  <a:srgbClr val="4758AB"/>
-                </a:solidFill>
-                <a:latin typeface="Courier"/>
-              </a:rPr>
-              <a:t>lm</a:t>
-            </a:r>
-            <a:r>
-              <a:rPr>
-                <a:solidFill>
-                  <a:srgbClr val="003B4F"/>
-                </a:solidFill>
-                <a:latin typeface="Courier"/>
-              </a:rPr>
-              <a:t>(abundance </a:t>
-            </a:r>
-            <a:r>
-              <a:rPr>
-                <a:solidFill>
-                  <a:srgbClr val="5E5E5E"/>
-                </a:solidFill>
-                <a:latin typeface="Courier"/>
-              </a:rPr>
-              <a:t>~</a:t>
-            </a:r>
-            <a:r>
-              <a:rPr>
-                <a:solidFill>
-                  <a:srgbClr val="003B4F"/>
-                </a:solidFill>
-                <a:latin typeface="Courier"/>
-              </a:rPr>
-              <a:t> log_area, bird_df))</a:t>
-            </a:r>
-            <a:r>
-              <a:rPr>
-                <a:solidFill>
-                  <a:srgbClr val="5E5E5E"/>
-                </a:solidFill>
-                <a:latin typeface="Courier"/>
-              </a:rPr>
-              <a:t>$</a:t>
-            </a:r>
-            <a:r>
-              <a:rPr>
-                <a:solidFill>
-                  <a:srgbClr val="003B4F"/>
-                </a:solidFill>
-                <a:latin typeface="Courier"/>
-              </a:rPr>
-              <a:t>adj.r.squared,</a:t>
-            </a:r>
-            <a:br/>
-            <a:r>
-              <a:rPr>
-                <a:solidFill>
-                  <a:srgbClr val="003B4F"/>
-                </a:solidFill>
-                <a:latin typeface="Courier"/>
-              </a:rPr>
-              <a:t>             </a:t>
-            </a:r>
-            <a:r>
-              <a:rPr>
-                <a:solidFill>
-                  <a:srgbClr val="4758AB"/>
-                </a:solidFill>
-                <a:latin typeface="Courier"/>
-              </a:rPr>
-              <a:t>summary</a:t>
-            </a:r>
-            <a:r>
-              <a:rPr>
-                <a:solidFill>
-                  <a:srgbClr val="003B4F"/>
-                </a:solidFill>
-                <a:latin typeface="Courier"/>
-              </a:rPr>
-              <a:t>(</a:t>
-            </a:r>
-            <a:r>
-              <a:rPr>
-                <a:solidFill>
-                  <a:srgbClr val="4758AB"/>
-                </a:solidFill>
-                <a:latin typeface="Courier"/>
-              </a:rPr>
-              <a:t>lm</a:t>
-            </a:r>
-            <a:r>
-              <a:rPr>
-                <a:solidFill>
-                  <a:srgbClr val="003B4F"/>
-                </a:solidFill>
-                <a:latin typeface="Courier"/>
-              </a:rPr>
-              <a:t>(abundance </a:t>
-            </a:r>
-            <a:r>
-              <a:rPr>
-                <a:solidFill>
-                  <a:srgbClr val="5E5E5E"/>
-                </a:solidFill>
-                <a:latin typeface="Courier"/>
-              </a:rPr>
-              <a:t>~</a:t>
-            </a:r>
-            <a:r>
-              <a:rPr>
-                <a:solidFill>
-                  <a:srgbClr val="003B4F"/>
-                </a:solidFill>
-                <a:latin typeface="Courier"/>
-              </a:rPr>
-              <a:t> grazing, bird_df))</a:t>
-            </a:r>
-            <a:r>
-              <a:rPr>
-                <a:solidFill>
-                  <a:srgbClr val="5E5E5E"/>
-                </a:solidFill>
-                <a:latin typeface="Courier"/>
-              </a:rPr>
-              <a:t>$</a:t>
-            </a:r>
-            <a:r>
-              <a:rPr>
-                <a:solidFill>
-                  <a:srgbClr val="003B4F"/>
-                </a:solidFill>
-                <a:latin typeface="Courier"/>
-              </a:rPr>
-              <a:t>adj.r.squared),</a:t>
-            </a:r>
-            <a:br/>
-            <a:r>
-              <a:rPr>
-                <a:solidFill>
-                  <a:srgbClr val="003B4F"/>
-                </a:solidFill>
-                <a:latin typeface="Courier"/>
-              </a:rPr>
-              <a:t>  </a:t>
-            </a:r>
-            <a:r>
-              <a:rPr>
-                <a:solidFill>
-                  <a:srgbClr val="657422"/>
-                </a:solidFill>
-                <a:latin typeface="Courier"/>
-              </a:rPr>
-              <a:t>AIC =</a:t>
-            </a:r>
-            <a:r>
-              <a:rPr>
-                <a:solidFill>
-                  <a:srgbClr val="003B4F"/>
-                </a:solidFill>
-                <a:latin typeface="Courier"/>
-              </a:rPr>
-              <a:t> </a:t>
-            </a:r>
-            <a:r>
-              <a:rPr>
-                <a:solidFill>
-                  <a:srgbClr val="4758AB"/>
-                </a:solidFill>
-                <a:latin typeface="Courier"/>
-              </a:rPr>
-              <a:t>c</a:t>
-            </a:r>
-            <a:r>
-              <a:rPr>
-                <a:solidFill>
-                  <a:srgbClr val="003B4F"/>
-                </a:solidFill>
-                <a:latin typeface="Courier"/>
-              </a:rPr>
-              <a:t>(</a:t>
-            </a:r>
-            <a:r>
-              <a:rPr>
-                <a:solidFill>
-                  <a:srgbClr val="4758AB"/>
-                </a:solidFill>
-                <a:latin typeface="Courier"/>
-              </a:rPr>
-              <a:t>AIC</a:t>
-            </a:r>
-            <a:r>
-              <a:rPr>
-                <a:solidFill>
-                  <a:srgbClr val="003B4F"/>
-                </a:solidFill>
-                <a:latin typeface="Courier"/>
-              </a:rPr>
-              <a:t>(full_model),</a:t>
-            </a:r>
-            <a:br/>
-            <a:r>
-              <a:rPr>
-                <a:solidFill>
-                  <a:srgbClr val="003B4F"/>
-                </a:solidFill>
-                <a:latin typeface="Courier"/>
-              </a:rPr>
-              <a:t>          </a:t>
-            </a:r>
-            <a:r>
-              <a:rPr>
-                <a:solidFill>
-                  <a:srgbClr val="4758AB"/>
-                </a:solidFill>
-                <a:latin typeface="Courier"/>
-              </a:rPr>
-              <a:t>AIC</a:t>
-            </a:r>
-            <a:r>
-              <a:rPr>
-                <a:solidFill>
-                  <a:srgbClr val="003B4F"/>
-                </a:solidFill>
-                <a:latin typeface="Courier"/>
-              </a:rPr>
-              <a:t>(reduced_model),</a:t>
-            </a:r>
-            <a:br/>
-            <a:r>
-              <a:rPr>
-                <a:solidFill>
-                  <a:srgbClr val="003B4F"/>
-                </a:solidFill>
-                <a:latin typeface="Courier"/>
-              </a:rPr>
-              <a:t>          </a:t>
-            </a:r>
-            <a:r>
-              <a:rPr>
-                <a:solidFill>
-                  <a:srgbClr val="4758AB"/>
-                </a:solidFill>
-                <a:latin typeface="Courier"/>
-              </a:rPr>
-              <a:t>AIC</a:t>
-            </a:r>
-            <a:r>
-              <a:rPr>
-                <a:solidFill>
-                  <a:srgbClr val="003B4F"/>
-                </a:solidFill>
-                <a:latin typeface="Courier"/>
-              </a:rPr>
-              <a:t>(</a:t>
-            </a:r>
-            <a:r>
-              <a:rPr>
-                <a:solidFill>
-                  <a:srgbClr val="4758AB"/>
-                </a:solidFill>
-                <a:latin typeface="Courier"/>
-              </a:rPr>
-              <a:t>lm</a:t>
-            </a:r>
-            <a:r>
-              <a:rPr>
-                <a:solidFill>
-                  <a:srgbClr val="003B4F"/>
-                </a:solidFill>
-                <a:latin typeface="Courier"/>
-              </a:rPr>
-              <a:t>(abundance </a:t>
-            </a:r>
-            <a:r>
-              <a:rPr>
-                <a:solidFill>
-                  <a:srgbClr val="5E5E5E"/>
-                </a:solidFill>
-                <a:latin typeface="Courier"/>
-              </a:rPr>
-              <a:t>~</a:t>
-            </a:r>
-            <a:r>
-              <a:rPr>
-                <a:solidFill>
-                  <a:srgbClr val="003B4F"/>
-                </a:solidFill>
-                <a:latin typeface="Courier"/>
-              </a:rPr>
-              <a:t> log_area, bird_df)),</a:t>
-            </a:r>
-            <a:br/>
-            <a:r>
-              <a:rPr>
-                <a:solidFill>
-                  <a:srgbClr val="003B4F"/>
-                </a:solidFill>
-                <a:latin typeface="Courier"/>
-              </a:rPr>
-              <a:t>          </a:t>
-            </a:r>
-            <a:r>
-              <a:rPr>
-                <a:solidFill>
-                  <a:srgbClr val="4758AB"/>
-                </a:solidFill>
-                <a:latin typeface="Courier"/>
-              </a:rPr>
-              <a:t>AIC</a:t>
-            </a:r>
-            <a:r>
-              <a:rPr>
-                <a:solidFill>
-                  <a:srgbClr val="003B4F"/>
-                </a:solidFill>
-                <a:latin typeface="Courier"/>
-              </a:rPr>
-              <a:t>(</a:t>
-            </a:r>
-            <a:r>
-              <a:rPr>
-                <a:solidFill>
-                  <a:srgbClr val="4758AB"/>
-                </a:solidFill>
-                <a:latin typeface="Courier"/>
-              </a:rPr>
-              <a:t>lm</a:t>
-            </a:r>
-            <a:r>
-              <a:rPr>
-                <a:solidFill>
-                  <a:srgbClr val="003B4F"/>
-                </a:solidFill>
-                <a:latin typeface="Courier"/>
-              </a:rPr>
-              <a:t>(abundance </a:t>
-            </a:r>
-            <a:r>
-              <a:rPr>
-                <a:solidFill>
-                  <a:srgbClr val="5E5E5E"/>
-                </a:solidFill>
-                <a:latin typeface="Courier"/>
-              </a:rPr>
-              <a:t>~</a:t>
-            </a:r>
-            <a:r>
-              <a:rPr>
-                <a:solidFill>
-                  <a:srgbClr val="003B4F"/>
-                </a:solidFill>
-                <a:latin typeface="Courier"/>
-              </a:rPr>
-              <a:t> grazing, bird_df)))</a:t>
-            </a:r>
-            <a:br/>
-            <a:r>
-              <a:rPr>
-                <a:solidFill>
-                  <a:srgbClr val="003B4F"/>
-                </a:solidFill>
-                <a:latin typeface="Courier"/>
-              </a:rPr>
-              <a:t>) </a:t>
-            </a:r>
-            <a:r>
-              <a:rPr>
-                <a:solidFill>
-                  <a:srgbClr val="5E5E5E"/>
-                </a:solidFill>
-                <a:latin typeface="Courier"/>
-              </a:rPr>
-              <a:t>%&gt;%</a:t>
-            </a:r>
-            <a:br/>
-            <a:r>
-              <a:rPr>
-                <a:solidFill>
-                  <a:srgbClr val="003B4F"/>
-                </a:solidFill>
-                <a:latin typeface="Courier"/>
-              </a:rPr>
-              <a:t>  </a:t>
-            </a:r>
-            <a:r>
-              <a:rPr>
-                <a:solidFill>
-                  <a:srgbClr val="4758AB"/>
-                </a:solidFill>
-                <a:latin typeface="Courier"/>
-              </a:rPr>
-              <a:t>mutate</a:t>
-            </a:r>
-            <a:r>
-              <a:rPr>
-                <a:solidFill>
-                  <a:srgbClr val="003B4F"/>
-                </a:solidFill>
-                <a:latin typeface="Courier"/>
-              </a:rPr>
-              <a:t>(</a:t>
-            </a:r>
-            <a:r>
-              <a:rPr>
-                <a:solidFill>
-                  <a:srgbClr val="657422"/>
-                </a:solidFill>
-                <a:latin typeface="Courier"/>
-              </a:rPr>
-              <a:t>delta_AIC =</a:t>
-            </a:r>
-            <a:r>
-              <a:rPr>
-                <a:solidFill>
-                  <a:srgbClr val="003B4F"/>
-                </a:solidFill>
-                <a:latin typeface="Courier"/>
-              </a:rPr>
-              <a:t> AIC </a:t>
-            </a:r>
-            <a:r>
-              <a:rPr>
-                <a:solidFill>
-                  <a:srgbClr val="5E5E5E"/>
-                </a:solidFill>
-                <a:latin typeface="Courier"/>
-              </a:rPr>
-              <a:t>-</a:t>
-            </a:r>
-            <a:r>
-              <a:rPr>
-                <a:solidFill>
-                  <a:srgbClr val="003B4F"/>
-                </a:solidFill>
-                <a:latin typeface="Courier"/>
-              </a:rPr>
-              <a:t> </a:t>
-            </a:r>
-            <a:r>
-              <a:rPr>
-                <a:solidFill>
-                  <a:srgbClr val="4758AB"/>
-                </a:solidFill>
-                <a:latin typeface="Courier"/>
-              </a:rPr>
-              <a:t>min</a:t>
-            </a:r>
-            <a:r>
-              <a:rPr>
-                <a:solidFill>
-                  <a:srgbClr val="003B4F"/>
-                </a:solidFill>
-                <a:latin typeface="Courier"/>
-              </a:rPr>
-              <a:t>(AIC)) </a:t>
-            </a:r>
-            <a:r>
-              <a:rPr>
-                <a:solidFill>
-                  <a:srgbClr val="5E5E5E"/>
-                </a:solidFill>
-                <a:latin typeface="Courier"/>
-              </a:rPr>
-              <a:t>%&gt;%</a:t>
-            </a:r>
-            <a:br/>
-            <a:r>
-              <a:rPr>
-                <a:solidFill>
-                  <a:srgbClr val="003B4F"/>
-                </a:solidFill>
-                <a:latin typeface="Courier"/>
-              </a:rPr>
-              <a:t>  </a:t>
-            </a:r>
-            <a:r>
-              <a:rPr>
-                <a:solidFill>
-                  <a:srgbClr val="4758AB"/>
-                </a:solidFill>
-                <a:latin typeface="Courier"/>
-              </a:rPr>
-              <a:t>arrange</a:t>
-            </a:r>
-            <a:r>
-              <a:rPr>
-                <a:solidFill>
-                  <a:srgbClr val="003B4F"/>
-                </a:solidFill>
-                <a:latin typeface="Courier"/>
-              </a:rPr>
-              <a:t>(AIC)</a:t>
-            </a:r>
-            <a:br/>
-            <a:br/>
-            <a:r>
-              <a:rPr>
-                <a:solidFill>
-                  <a:srgbClr val="003B4F"/>
-                </a:solidFill>
-                <a:latin typeface="Courier"/>
-              </a:rPr>
-              <a:t>model_comparison</a:t>
-            </a:r>
-          </a:p>
-          <a:p>
-            <a:pPr lvl="0" indent="0">
-              <a:buNone/>
-            </a:pPr>
-            <a:r>
-              <a:rPr>
-                <a:latin typeface="Courier"/>
-              </a:rPr>
-              <a:t># A tibble: 4 × 4
-  model              adj_r2   AIC delta_AIC
-  &lt;chr&gt;               &lt;dbl&gt; &lt;dbl&gt;     &lt;dbl&gt;
-1 log_area + grazing  0.640  373.      0   
-2 all six predictors  0.646  375.      2.55
-3 log_area only       0.539  385.     12.8 
-4 grazing only        0.456  395.     22.1 </a:t>
-            </a:r>
-          </a:p>
-        </p:txBody>
-      </p:sp>
-      <p:sp>
-        <p:nvSpPr>
-          <p:cNvPr id="4" name="Content Placeholder 3"/>
-          <p:cNvSpPr>
-            <a:spLocks noGrp="1"/>
-          </p:cNvSpPr>
-          <p:nvPr>
-            <p:ph idx="2" sz="half"/>
-          </p:nvPr>
-        </p:nvSpPr>
-        <p:spPr/>
-        <p:txBody>
-          <a:bodyPr/>
-          <a:lstStyle/>
-          <a:p>
-            <a:pPr lvl="0" indent="0" marL="1270000">
-              <a:buNone/>
-            </a:pPr>
-            <a:r>
-              <a:rPr sz="2000" b="1"/>
-              <a:t>Important</a:t>
-            </a:r>
-          </a:p>
-          <a:p>
-            <a:pPr lvl="0" indent="0" marL="1270000">
-              <a:buNone/>
-            </a:pPr>
-            <a:r>
-              <a:rPr sz="2000" b="1"/>
-              <a:t>✅ The two-predictor model wins</a:t>
-            </a:r>
-          </a:p>
-          <a:p>
-            <a:pPr lvl="0" indent="0" marL="1270000">
-              <a:buNone/>
-            </a:pPr>
-            <a:r>
-              <a:rPr sz="2000"/>
-              <a:t>It has the </a:t>
-            </a:r>
-            <a:r>
-              <a:rPr sz="2000" b="1"/>
-              <a:t>lowest AIC</a:t>
-            </a:r>
-            <a:r>
-              <a:rPr sz="2000"/>
-              <a:t> and essentially the same adjusted R² as the full model — with four fewer predictors.</a:t>
-            </a:r>
-          </a:p>
-          <a:p>
-            <a:pPr lvl="0" indent="0" marL="1270000">
-              <a:buNone/>
-            </a:pPr>
-            <a:r>
-              <a:rPr sz="2000"/>
-              <a:t>A </a:t>
-            </a:r>
-            <a:r>
-              <a:rPr sz="2000" b="1"/>
-              <a:t>ΔAIC above about 2</a:t>
-            </a:r>
-            <a:r>
-              <a:rPr sz="2000"/>
-              <a:t> is usually treated as a real difference, so the full model’s extra terms are not paying for themselves.</a:t>
-            </a:r>
-          </a:p>
-          <a:p>
-            <a:pPr lvl="0" indent="0" marL="0">
-              <a:buNone/>
-            </a:pPr>
-            <a:r>
-              <a:rPr/>
-              <a:t>The </a:t>
-            </a:r>
-            <a:r>
-              <a:rPr>
-                <a:latin typeface="Courier"/>
-              </a:rPr>
-              <a:t>anova()</a:t>
-            </a:r>
-            <a:r>
-              <a:rPr/>
-              <a:t> test in Part 3 said the same thing. Two routes, one answer.</a:t>
-            </a:r>
-          </a:p>
-        </p:txBody>
-      </p:sp>
-    </p:spTree>
-  </p:cSld>
-</p:sld>
-</file>
-
-<file path=ppt/slides/slide47.xml><?xml version="1.0" encoding="utf-8"?>
-<p:sld xmlns:a="http://schemas.openxmlformats.org/drawingml/2006/main" xmlns:r="http://schemas.openxmlformats.org/officeDocument/2006/relationships" xmlns:p="http://schemas.openxmlformats.org/presentationml/2006/main">
-  <p:cSld>
-    <p:spTree>
-      <p:nvGrpSpPr>
-        <p:cNvPr id="1" name=""/>
-        <p:cNvGrpSpPr/>
-        <p:nvPr/>
-      </p:nvGrpSpPr>
-      <p:grpSpPr>
-        <a:xfrm>
-          <a:off x="0" y="0"/>
-          <a:ext cx="0" cy="0"/>
-          <a:chOff x="0" y="0"/>
-          <a:chExt cx="0" cy="0"/>
-        </a:xfrm>
-      </p:grpSpPr>
-      <p:sp>
-        <p:nvSpPr>
-          <p:cNvPr id="2" name="Title 1"/>
-          <p:cNvSpPr>
-            <a:spLocks noGrp="1"/>
-          </p:cNvSpPr>
-          <p:nvPr>
-            <p:ph type="title"/>
-          </p:nvPr>
-        </p:nvSpPr>
-        <p:spPr>
-          <a:xfrm>
-            <a:off x="0" y="0"/>
-            <a:ext cx="9144000" cy="582780"/>
-          </a:xfrm>
-        </p:spPr>
-        <p:txBody>
-          <a:bodyPr/>
-          <a:lstStyle/>
-          <a:p>
-            <a:pPr lvl="0" indent="0" marL="0">
-              <a:buNone/>
-            </a:pPr>
-            <a:r>
-              <a:rPr/>
-              <a:t>Part 9 · Relative Importance of Predictors</a:t>
             </a:r>
           </a:p>
         </p:txBody>
@@ -13981,7 +14762,7 @@
             </a:pPr>
             <a:r>
               <a:rPr/>
-              <a:t>How Important Is Each Predictor?</a:t>
+              <a:t>Comparing Models — How to Search</a:t>
             </a:r>
           </a:p>
         </p:txBody>
@@ -14001,60 +14782,36 @@
           <a:bodyPr/>
           <a:lstStyle/>
           <a:p>
-            <a:pPr lvl="0" indent="0" marL="0">
-              <a:buNone/>
-            </a:pPr>
-            <a:r>
-              <a:rPr/>
-              <a:t>Three standard approaches, and they answer slightly different questions:</a:t>
-            </a:r>
-          </a:p>
-          <a:p>
-            <a:pPr lvl="0" indent="-342900" marL="342900">
-              <a:buAutoNum type="arabicPeriod"/>
-            </a:pPr>
+            <a:pPr lvl="0"/>
+            <a:r>
+              <a:rPr/>
+              <a:t>Fit all possible models and compare — fine with a few predictors, hopeless with many</a:t>
+            </a:r>
+          </a:p>
+          <a:p>
+            <a:pPr lvl="0"/>
             <a:r>
               <a:rPr b="1"/>
-              <a:t>F- or t-tests</a:t>
-            </a:r>
-            <a:r>
-              <a:rPr/>
-              <a:t> on the partial slopes</a:t>
-            </a:r>
-          </a:p>
-          <a:p>
-            <a:pPr lvl="0" indent="-342900" marL="342900">
-              <a:buAutoNum type="arabicPeriod"/>
-            </a:pPr>
+              <a:t>Automated stepwise</a:t>
+            </a:r>
+            <a:r>
+              <a:rPr/>
+              <a:t> selection adds or removes terms by partial F or AIC</a:t>
+            </a:r>
+          </a:p>
+          <a:p>
+            <a:pPr lvl="0"/>
+            <a:r>
+              <a:rPr/>
+              <a:t>We use </a:t>
+            </a:r>
             <a:r>
               <a:rPr b="1"/>
-              <a:t>Coefficient of partial determination</a:t>
-            </a:r>
-            <a:r>
-              <a:rPr/>
-              <a:t> — the variance a predictor adds</a:t>
-            </a:r>
-          </a:p>
-          <a:p>
-            <a:pPr lvl="0" indent="-342900" marL="342900">
-              <a:buAutoNum type="arabicPeriod"/>
-            </a:pPr>
-            <a:r>
-              <a:rPr b="1"/>
-              <a:t>Standardized partial slopes</a:t>
-            </a:r>
-            <a:r>
-              <a:rPr/>
-              <a:t> — every predictor in SD units</a:t>
-            </a:r>
-          </a:p>
-          <a:p>
-            <a:pPr lvl="0" indent="0" marL="0">
-              <a:buNone/>
-            </a:pPr>
-            <a:r>
-              <a:rPr/>
-              <a:t>None of them is “the” right answer.</a:t>
+              <a:t>manual backward selection</a:t>
+            </a:r>
+            <a:r>
+              <a:rPr/>
+              <a:t>: start full, drop what earns nothing, stop when dropping hurts</a:t>
             </a:r>
           </a:p>
         </p:txBody>
@@ -14088,7 +14845,7 @@
             </a:pPr>
             <a:r>
               <a:rPr sz="2000" b="1"/>
-              <a:t>⚠️ Why the raw slopes cannot be compared</a:t>
+              <a:t>⚠️ Stepwise selection is controversial</a:t>
             </a:r>
           </a:p>
           <a:p>
@@ -14096,33 +14853,16 @@
               <a:buNone/>
             </a:pPr>
             <a:r>
-              <a:rPr sz="2000">
-                <a:latin typeface="Courier"/>
-              </a:rPr>
-              <a:t>log_area</a:t>
-            </a:r>
-            <a:r>
               <a:rPr sz="2000"/>
-              <a:t> has a slope of 6.89 and </a:t>
-            </a:r>
-            <a:r>
-              <a:rPr sz="2000">
-                <a:latin typeface="Courier"/>
-              </a:rPr>
-              <a:t>grazing</a:t>
+              <a:t>It inflates R², biases p-values, and knows nothing about biology. A small set of models you can </a:t>
+            </a:r>
+            <a:r>
+              <a:rPr sz="2000" i="1"/>
+              <a:t>justify</a:t>
             </a:r>
             <a:r>
               <a:rPr sz="2000"/>
-              <a:t> -2.85.</a:t>
-            </a:r>
-          </a:p>
-          <a:p>
-            <a:pPr lvl="0" indent="0" marL="1270000">
-              <a:buNone/>
-            </a:pPr>
-            <a:r>
-              <a:rPr sz="2000"/>
-              <a:t>One is “birds per tenfold increase in area,” the other is “birds per step of grazing intensity.” Comparing those two numbers is comparing metres with kilograms.</a:t>
+              <a:t> beats an automated search over all of them.</a:t>
             </a:r>
           </a:p>
         </p:txBody>
@@ -14133,6 +14873,1367 @@
 </file>
 
 <file path=ppt/slides/slide49.xml><?xml version="1.0" encoding="utf-8"?>
+<p:sld xmlns:a="http://schemas.openxmlformats.org/drawingml/2006/main" xmlns:r="http://schemas.openxmlformats.org/officeDocument/2006/relationships" xmlns:p="http://schemas.openxmlformats.org/presentationml/2006/main">
+  <p:cSld>
+    <p:spTree>
+      <p:nvGrpSpPr>
+        <p:cNvPr id="1" name=""/>
+        <p:cNvGrpSpPr/>
+        <p:nvPr/>
+      </p:nvGrpSpPr>
+      <p:grpSpPr>
+        <a:xfrm>
+          <a:off x="0" y="0"/>
+          <a:ext cx="0" cy="0"/>
+          <a:chOff x="0" y="0"/>
+          <a:chExt cx="0" cy="0"/>
+        </a:xfrm>
+      </p:grpSpPr>
+      <p:sp>
+        <p:nvSpPr>
+          <p:cNvPr id="2" name="Title 1"/>
+          <p:cNvSpPr>
+            <a:spLocks noGrp="1"/>
+          </p:cNvSpPr>
+          <p:nvPr>
+            <p:ph type="title"/>
+          </p:nvPr>
+        </p:nvSpPr>
+        <p:spPr>
+          <a:xfrm>
+            <a:off x="0" y="0"/>
+            <a:ext cx="9144000" cy="602780"/>
+          </a:xfrm>
+          <a:solidFill>
+            <a:srgbClr val="70121D"/>
+          </a:solidFill>
+        </p:spPr>
+        <p:txBody>
+          <a:bodyPr/>
+          <a:lstStyle/>
+          <a:p>
+            <a:pPr lvl="0" indent="0" marL="0">
+              <a:buNone/>
+            </a:pPr>
+            <a:r>
+              <a:rPr/>
+              <a:t>Comparing Models — Putting It Together</a:t>
+            </a:r>
+          </a:p>
+        </p:txBody>
+      </p:sp>
+      <p:sp>
+        <p:nvSpPr>
+          <p:cNvPr id="3" name="Content Placeholder 2"/>
+          <p:cNvSpPr>
+            <a:spLocks noGrp="1"/>
+          </p:cNvSpPr>
+          <p:nvPr>
+            <p:ph idx="1" sz="half"/>
+          </p:nvPr>
+        </p:nvSpPr>
+        <p:spPr/>
+        <p:txBody>
+          <a:bodyPr/>
+          <a:lstStyle/>
+          <a:p>
+            <a:pPr lvl="0" indent="0">
+              <a:buNone/>
+            </a:pPr>
+            <a:r>
+              <a:rPr>
+                <a:solidFill>
+                  <a:srgbClr val="003B4F"/>
+                </a:solidFill>
+                <a:latin typeface="Courier"/>
+              </a:rPr>
+              <a:t>model_comparison &lt;- </a:t>
+            </a:r>
+            <a:r>
+              <a:rPr>
+                <a:solidFill>
+                  <a:srgbClr val="4758AB"/>
+                </a:solidFill>
+                <a:latin typeface="Courier"/>
+              </a:rPr>
+              <a:t>tibble</a:t>
+            </a:r>
+            <a:r>
+              <a:rPr>
+                <a:solidFill>
+                  <a:srgbClr val="003B4F"/>
+                </a:solidFill>
+                <a:latin typeface="Courier"/>
+              </a:rPr>
+              <a:t>(</a:t>
+            </a:r>
+            <a:br/>
+            <a:r>
+              <a:rPr>
+                <a:solidFill>
+                  <a:srgbClr val="003B4F"/>
+                </a:solidFill>
+                <a:latin typeface="Courier"/>
+              </a:rPr>
+              <a:t>  </a:t>
+            </a:r>
+            <a:r>
+              <a:rPr>
+                <a:solidFill>
+                  <a:srgbClr val="657422"/>
+                </a:solidFill>
+                <a:latin typeface="Courier"/>
+              </a:rPr>
+              <a:t>model =</a:t>
+            </a:r>
+            <a:r>
+              <a:rPr>
+                <a:solidFill>
+                  <a:srgbClr val="003B4F"/>
+                </a:solidFill>
+                <a:latin typeface="Courier"/>
+              </a:rPr>
+              <a:t> </a:t>
+            </a:r>
+            <a:r>
+              <a:rPr>
+                <a:solidFill>
+                  <a:srgbClr val="4758AB"/>
+                </a:solidFill>
+                <a:latin typeface="Courier"/>
+              </a:rPr>
+              <a:t>c</a:t>
+            </a:r>
+            <a:r>
+              <a:rPr>
+                <a:solidFill>
+                  <a:srgbClr val="003B4F"/>
+                </a:solidFill>
+                <a:latin typeface="Courier"/>
+              </a:rPr>
+              <a:t>(</a:t>
+            </a:r>
+            <a:r>
+              <a:rPr>
+                <a:solidFill>
+                  <a:srgbClr val="20794D"/>
+                </a:solidFill>
+                <a:latin typeface="Courier"/>
+              </a:rPr>
+              <a:t>"all six predictors"</a:t>
+            </a:r>
+            <a:r>
+              <a:rPr>
+                <a:solidFill>
+                  <a:srgbClr val="003B4F"/>
+                </a:solidFill>
+                <a:latin typeface="Courier"/>
+              </a:rPr>
+              <a:t>,</a:t>
+            </a:r>
+            <a:br/>
+            <a:r>
+              <a:rPr>
+                <a:solidFill>
+                  <a:srgbClr val="003B4F"/>
+                </a:solidFill>
+                <a:latin typeface="Courier"/>
+              </a:rPr>
+              <a:t>            </a:t>
+            </a:r>
+            <a:r>
+              <a:rPr>
+                <a:solidFill>
+                  <a:srgbClr val="20794D"/>
+                </a:solidFill>
+                <a:latin typeface="Courier"/>
+              </a:rPr>
+              <a:t>"log_area + grazing"</a:t>
+            </a:r>
+            <a:r>
+              <a:rPr>
+                <a:solidFill>
+                  <a:srgbClr val="003B4F"/>
+                </a:solidFill>
+                <a:latin typeface="Courier"/>
+              </a:rPr>
+              <a:t>,</a:t>
+            </a:r>
+            <a:br/>
+            <a:r>
+              <a:rPr>
+                <a:solidFill>
+                  <a:srgbClr val="003B4F"/>
+                </a:solidFill>
+                <a:latin typeface="Courier"/>
+              </a:rPr>
+              <a:t>            </a:t>
+            </a:r>
+            <a:r>
+              <a:rPr>
+                <a:solidFill>
+                  <a:srgbClr val="20794D"/>
+                </a:solidFill>
+                <a:latin typeface="Courier"/>
+              </a:rPr>
+              <a:t>"log_area only"</a:t>
+            </a:r>
+            <a:r>
+              <a:rPr>
+                <a:solidFill>
+                  <a:srgbClr val="003B4F"/>
+                </a:solidFill>
+                <a:latin typeface="Courier"/>
+              </a:rPr>
+              <a:t>,</a:t>
+            </a:r>
+            <a:br/>
+            <a:r>
+              <a:rPr>
+                <a:solidFill>
+                  <a:srgbClr val="003B4F"/>
+                </a:solidFill>
+                <a:latin typeface="Courier"/>
+              </a:rPr>
+              <a:t>            </a:t>
+            </a:r>
+            <a:r>
+              <a:rPr>
+                <a:solidFill>
+                  <a:srgbClr val="20794D"/>
+                </a:solidFill>
+                <a:latin typeface="Courier"/>
+              </a:rPr>
+              <a:t>"grazing only"</a:t>
+            </a:r>
+            <a:r>
+              <a:rPr>
+                <a:solidFill>
+                  <a:srgbClr val="003B4F"/>
+                </a:solidFill>
+                <a:latin typeface="Courier"/>
+              </a:rPr>
+              <a:t>),</a:t>
+            </a:r>
+            <a:br/>
+            <a:r>
+              <a:rPr>
+                <a:solidFill>
+                  <a:srgbClr val="003B4F"/>
+                </a:solidFill>
+                <a:latin typeface="Courier"/>
+              </a:rPr>
+              <a:t>  </a:t>
+            </a:r>
+            <a:r>
+              <a:rPr>
+                <a:solidFill>
+                  <a:srgbClr val="657422"/>
+                </a:solidFill>
+                <a:latin typeface="Courier"/>
+              </a:rPr>
+              <a:t>adj_r2 =</a:t>
+            </a:r>
+            <a:r>
+              <a:rPr>
+                <a:solidFill>
+                  <a:srgbClr val="003B4F"/>
+                </a:solidFill>
+                <a:latin typeface="Courier"/>
+              </a:rPr>
+              <a:t> </a:t>
+            </a:r>
+            <a:r>
+              <a:rPr>
+                <a:solidFill>
+                  <a:srgbClr val="4758AB"/>
+                </a:solidFill>
+                <a:latin typeface="Courier"/>
+              </a:rPr>
+              <a:t>c</a:t>
+            </a:r>
+            <a:r>
+              <a:rPr>
+                <a:solidFill>
+                  <a:srgbClr val="003B4F"/>
+                </a:solidFill>
+                <a:latin typeface="Courier"/>
+              </a:rPr>
+              <a:t>(</a:t>
+            </a:r>
+            <a:r>
+              <a:rPr>
+                <a:solidFill>
+                  <a:srgbClr val="4758AB"/>
+                </a:solidFill>
+                <a:latin typeface="Courier"/>
+              </a:rPr>
+              <a:t>summary</a:t>
+            </a:r>
+            <a:r>
+              <a:rPr>
+                <a:solidFill>
+                  <a:srgbClr val="003B4F"/>
+                </a:solidFill>
+                <a:latin typeface="Courier"/>
+              </a:rPr>
+              <a:t>(full_model)</a:t>
+            </a:r>
+            <a:r>
+              <a:rPr>
+                <a:solidFill>
+                  <a:srgbClr val="5E5E5E"/>
+                </a:solidFill>
+                <a:latin typeface="Courier"/>
+              </a:rPr>
+              <a:t>$</a:t>
+            </a:r>
+            <a:r>
+              <a:rPr>
+                <a:solidFill>
+                  <a:srgbClr val="003B4F"/>
+                </a:solidFill>
+                <a:latin typeface="Courier"/>
+              </a:rPr>
+              <a:t>adj.r.squared,</a:t>
+            </a:r>
+            <a:br/>
+            <a:r>
+              <a:rPr>
+                <a:solidFill>
+                  <a:srgbClr val="003B4F"/>
+                </a:solidFill>
+                <a:latin typeface="Courier"/>
+              </a:rPr>
+              <a:t>             </a:t>
+            </a:r>
+            <a:r>
+              <a:rPr>
+                <a:solidFill>
+                  <a:srgbClr val="4758AB"/>
+                </a:solidFill>
+                <a:latin typeface="Courier"/>
+              </a:rPr>
+              <a:t>summary</a:t>
+            </a:r>
+            <a:r>
+              <a:rPr>
+                <a:solidFill>
+                  <a:srgbClr val="003B4F"/>
+                </a:solidFill>
+                <a:latin typeface="Courier"/>
+              </a:rPr>
+              <a:t>(reduced_model)</a:t>
+            </a:r>
+            <a:r>
+              <a:rPr>
+                <a:solidFill>
+                  <a:srgbClr val="5E5E5E"/>
+                </a:solidFill>
+                <a:latin typeface="Courier"/>
+              </a:rPr>
+              <a:t>$</a:t>
+            </a:r>
+            <a:r>
+              <a:rPr>
+                <a:solidFill>
+                  <a:srgbClr val="003B4F"/>
+                </a:solidFill>
+                <a:latin typeface="Courier"/>
+              </a:rPr>
+              <a:t>adj.r.squared,</a:t>
+            </a:r>
+            <a:br/>
+            <a:r>
+              <a:rPr>
+                <a:solidFill>
+                  <a:srgbClr val="003B4F"/>
+                </a:solidFill>
+                <a:latin typeface="Courier"/>
+              </a:rPr>
+              <a:t>             </a:t>
+            </a:r>
+            <a:r>
+              <a:rPr>
+                <a:solidFill>
+                  <a:srgbClr val="4758AB"/>
+                </a:solidFill>
+                <a:latin typeface="Courier"/>
+              </a:rPr>
+              <a:t>summary</a:t>
+            </a:r>
+            <a:r>
+              <a:rPr>
+                <a:solidFill>
+                  <a:srgbClr val="003B4F"/>
+                </a:solidFill>
+                <a:latin typeface="Courier"/>
+              </a:rPr>
+              <a:t>(</a:t>
+            </a:r>
+            <a:r>
+              <a:rPr>
+                <a:solidFill>
+                  <a:srgbClr val="4758AB"/>
+                </a:solidFill>
+                <a:latin typeface="Courier"/>
+              </a:rPr>
+              <a:t>lm</a:t>
+            </a:r>
+            <a:r>
+              <a:rPr>
+                <a:solidFill>
+                  <a:srgbClr val="003B4F"/>
+                </a:solidFill>
+                <a:latin typeface="Courier"/>
+              </a:rPr>
+              <a:t>(abundance </a:t>
+            </a:r>
+            <a:r>
+              <a:rPr>
+                <a:solidFill>
+                  <a:srgbClr val="5E5E5E"/>
+                </a:solidFill>
+                <a:latin typeface="Courier"/>
+              </a:rPr>
+              <a:t>~</a:t>
+            </a:r>
+            <a:r>
+              <a:rPr>
+                <a:solidFill>
+                  <a:srgbClr val="003B4F"/>
+                </a:solidFill>
+                <a:latin typeface="Courier"/>
+              </a:rPr>
+              <a:t> log_area, bird_df))</a:t>
+            </a:r>
+            <a:r>
+              <a:rPr>
+                <a:solidFill>
+                  <a:srgbClr val="5E5E5E"/>
+                </a:solidFill>
+                <a:latin typeface="Courier"/>
+              </a:rPr>
+              <a:t>$</a:t>
+            </a:r>
+            <a:r>
+              <a:rPr>
+                <a:solidFill>
+                  <a:srgbClr val="003B4F"/>
+                </a:solidFill>
+                <a:latin typeface="Courier"/>
+              </a:rPr>
+              <a:t>adj.r.squared,</a:t>
+            </a:r>
+            <a:br/>
+            <a:r>
+              <a:rPr>
+                <a:solidFill>
+                  <a:srgbClr val="003B4F"/>
+                </a:solidFill>
+                <a:latin typeface="Courier"/>
+              </a:rPr>
+              <a:t>             </a:t>
+            </a:r>
+            <a:r>
+              <a:rPr>
+                <a:solidFill>
+                  <a:srgbClr val="4758AB"/>
+                </a:solidFill>
+                <a:latin typeface="Courier"/>
+              </a:rPr>
+              <a:t>summary</a:t>
+            </a:r>
+            <a:r>
+              <a:rPr>
+                <a:solidFill>
+                  <a:srgbClr val="003B4F"/>
+                </a:solidFill>
+                <a:latin typeface="Courier"/>
+              </a:rPr>
+              <a:t>(</a:t>
+            </a:r>
+            <a:r>
+              <a:rPr>
+                <a:solidFill>
+                  <a:srgbClr val="4758AB"/>
+                </a:solidFill>
+                <a:latin typeface="Courier"/>
+              </a:rPr>
+              <a:t>lm</a:t>
+            </a:r>
+            <a:r>
+              <a:rPr>
+                <a:solidFill>
+                  <a:srgbClr val="003B4F"/>
+                </a:solidFill>
+                <a:latin typeface="Courier"/>
+              </a:rPr>
+              <a:t>(abundance </a:t>
+            </a:r>
+            <a:r>
+              <a:rPr>
+                <a:solidFill>
+                  <a:srgbClr val="5E5E5E"/>
+                </a:solidFill>
+                <a:latin typeface="Courier"/>
+              </a:rPr>
+              <a:t>~</a:t>
+            </a:r>
+            <a:r>
+              <a:rPr>
+                <a:solidFill>
+                  <a:srgbClr val="003B4F"/>
+                </a:solidFill>
+                <a:latin typeface="Courier"/>
+              </a:rPr>
+              <a:t> grazing, bird_df))</a:t>
+            </a:r>
+            <a:r>
+              <a:rPr>
+                <a:solidFill>
+                  <a:srgbClr val="5E5E5E"/>
+                </a:solidFill>
+                <a:latin typeface="Courier"/>
+              </a:rPr>
+              <a:t>$</a:t>
+            </a:r>
+            <a:r>
+              <a:rPr>
+                <a:solidFill>
+                  <a:srgbClr val="003B4F"/>
+                </a:solidFill>
+                <a:latin typeface="Courier"/>
+              </a:rPr>
+              <a:t>adj.r.squared),</a:t>
+            </a:r>
+            <a:br/>
+            <a:r>
+              <a:rPr>
+                <a:solidFill>
+                  <a:srgbClr val="003B4F"/>
+                </a:solidFill>
+                <a:latin typeface="Courier"/>
+              </a:rPr>
+              <a:t>  </a:t>
+            </a:r>
+            <a:r>
+              <a:rPr>
+                <a:solidFill>
+                  <a:srgbClr val="657422"/>
+                </a:solidFill>
+                <a:latin typeface="Courier"/>
+              </a:rPr>
+              <a:t>AIC =</a:t>
+            </a:r>
+            <a:r>
+              <a:rPr>
+                <a:solidFill>
+                  <a:srgbClr val="003B4F"/>
+                </a:solidFill>
+                <a:latin typeface="Courier"/>
+              </a:rPr>
+              <a:t> </a:t>
+            </a:r>
+            <a:r>
+              <a:rPr>
+                <a:solidFill>
+                  <a:srgbClr val="4758AB"/>
+                </a:solidFill>
+                <a:latin typeface="Courier"/>
+              </a:rPr>
+              <a:t>c</a:t>
+            </a:r>
+            <a:r>
+              <a:rPr>
+                <a:solidFill>
+                  <a:srgbClr val="003B4F"/>
+                </a:solidFill>
+                <a:latin typeface="Courier"/>
+              </a:rPr>
+              <a:t>(</a:t>
+            </a:r>
+            <a:r>
+              <a:rPr>
+                <a:solidFill>
+                  <a:srgbClr val="4758AB"/>
+                </a:solidFill>
+                <a:latin typeface="Courier"/>
+              </a:rPr>
+              <a:t>AIC</a:t>
+            </a:r>
+            <a:r>
+              <a:rPr>
+                <a:solidFill>
+                  <a:srgbClr val="003B4F"/>
+                </a:solidFill>
+                <a:latin typeface="Courier"/>
+              </a:rPr>
+              <a:t>(full_model),</a:t>
+            </a:r>
+            <a:br/>
+            <a:r>
+              <a:rPr>
+                <a:solidFill>
+                  <a:srgbClr val="003B4F"/>
+                </a:solidFill>
+                <a:latin typeface="Courier"/>
+              </a:rPr>
+              <a:t>          </a:t>
+            </a:r>
+            <a:r>
+              <a:rPr>
+                <a:solidFill>
+                  <a:srgbClr val="4758AB"/>
+                </a:solidFill>
+                <a:latin typeface="Courier"/>
+              </a:rPr>
+              <a:t>AIC</a:t>
+            </a:r>
+            <a:r>
+              <a:rPr>
+                <a:solidFill>
+                  <a:srgbClr val="003B4F"/>
+                </a:solidFill>
+                <a:latin typeface="Courier"/>
+              </a:rPr>
+              <a:t>(reduced_model),</a:t>
+            </a:r>
+            <a:br/>
+            <a:r>
+              <a:rPr>
+                <a:solidFill>
+                  <a:srgbClr val="003B4F"/>
+                </a:solidFill>
+                <a:latin typeface="Courier"/>
+              </a:rPr>
+              <a:t>          </a:t>
+            </a:r>
+            <a:r>
+              <a:rPr>
+                <a:solidFill>
+                  <a:srgbClr val="4758AB"/>
+                </a:solidFill>
+                <a:latin typeface="Courier"/>
+              </a:rPr>
+              <a:t>AIC</a:t>
+            </a:r>
+            <a:r>
+              <a:rPr>
+                <a:solidFill>
+                  <a:srgbClr val="003B4F"/>
+                </a:solidFill>
+                <a:latin typeface="Courier"/>
+              </a:rPr>
+              <a:t>(</a:t>
+            </a:r>
+            <a:r>
+              <a:rPr>
+                <a:solidFill>
+                  <a:srgbClr val="4758AB"/>
+                </a:solidFill>
+                <a:latin typeface="Courier"/>
+              </a:rPr>
+              <a:t>lm</a:t>
+            </a:r>
+            <a:r>
+              <a:rPr>
+                <a:solidFill>
+                  <a:srgbClr val="003B4F"/>
+                </a:solidFill>
+                <a:latin typeface="Courier"/>
+              </a:rPr>
+              <a:t>(abundance </a:t>
+            </a:r>
+            <a:r>
+              <a:rPr>
+                <a:solidFill>
+                  <a:srgbClr val="5E5E5E"/>
+                </a:solidFill>
+                <a:latin typeface="Courier"/>
+              </a:rPr>
+              <a:t>~</a:t>
+            </a:r>
+            <a:r>
+              <a:rPr>
+                <a:solidFill>
+                  <a:srgbClr val="003B4F"/>
+                </a:solidFill>
+                <a:latin typeface="Courier"/>
+              </a:rPr>
+              <a:t> log_area, bird_df)),</a:t>
+            </a:r>
+            <a:br/>
+            <a:r>
+              <a:rPr>
+                <a:solidFill>
+                  <a:srgbClr val="003B4F"/>
+                </a:solidFill>
+                <a:latin typeface="Courier"/>
+              </a:rPr>
+              <a:t>          </a:t>
+            </a:r>
+            <a:r>
+              <a:rPr>
+                <a:solidFill>
+                  <a:srgbClr val="4758AB"/>
+                </a:solidFill>
+                <a:latin typeface="Courier"/>
+              </a:rPr>
+              <a:t>AIC</a:t>
+            </a:r>
+            <a:r>
+              <a:rPr>
+                <a:solidFill>
+                  <a:srgbClr val="003B4F"/>
+                </a:solidFill>
+                <a:latin typeface="Courier"/>
+              </a:rPr>
+              <a:t>(</a:t>
+            </a:r>
+            <a:r>
+              <a:rPr>
+                <a:solidFill>
+                  <a:srgbClr val="4758AB"/>
+                </a:solidFill>
+                <a:latin typeface="Courier"/>
+              </a:rPr>
+              <a:t>lm</a:t>
+            </a:r>
+            <a:r>
+              <a:rPr>
+                <a:solidFill>
+                  <a:srgbClr val="003B4F"/>
+                </a:solidFill>
+                <a:latin typeface="Courier"/>
+              </a:rPr>
+              <a:t>(abundance </a:t>
+            </a:r>
+            <a:r>
+              <a:rPr>
+                <a:solidFill>
+                  <a:srgbClr val="5E5E5E"/>
+                </a:solidFill>
+                <a:latin typeface="Courier"/>
+              </a:rPr>
+              <a:t>~</a:t>
+            </a:r>
+            <a:r>
+              <a:rPr>
+                <a:solidFill>
+                  <a:srgbClr val="003B4F"/>
+                </a:solidFill>
+                <a:latin typeface="Courier"/>
+              </a:rPr>
+              <a:t> grazing, bird_df)))</a:t>
+            </a:r>
+            <a:br/>
+            <a:r>
+              <a:rPr>
+                <a:solidFill>
+                  <a:srgbClr val="003B4F"/>
+                </a:solidFill>
+                <a:latin typeface="Courier"/>
+              </a:rPr>
+              <a:t>) </a:t>
+            </a:r>
+            <a:r>
+              <a:rPr>
+                <a:solidFill>
+                  <a:srgbClr val="5E5E5E"/>
+                </a:solidFill>
+                <a:latin typeface="Courier"/>
+              </a:rPr>
+              <a:t>%&gt;%</a:t>
+            </a:r>
+            <a:br/>
+            <a:r>
+              <a:rPr>
+                <a:solidFill>
+                  <a:srgbClr val="003B4F"/>
+                </a:solidFill>
+                <a:latin typeface="Courier"/>
+              </a:rPr>
+              <a:t>  </a:t>
+            </a:r>
+            <a:r>
+              <a:rPr>
+                <a:solidFill>
+                  <a:srgbClr val="4758AB"/>
+                </a:solidFill>
+                <a:latin typeface="Courier"/>
+              </a:rPr>
+              <a:t>mutate</a:t>
+            </a:r>
+            <a:r>
+              <a:rPr>
+                <a:solidFill>
+                  <a:srgbClr val="003B4F"/>
+                </a:solidFill>
+                <a:latin typeface="Courier"/>
+              </a:rPr>
+              <a:t>(</a:t>
+            </a:r>
+            <a:r>
+              <a:rPr>
+                <a:solidFill>
+                  <a:srgbClr val="657422"/>
+                </a:solidFill>
+                <a:latin typeface="Courier"/>
+              </a:rPr>
+              <a:t>delta_AIC =</a:t>
+            </a:r>
+            <a:r>
+              <a:rPr>
+                <a:solidFill>
+                  <a:srgbClr val="003B4F"/>
+                </a:solidFill>
+                <a:latin typeface="Courier"/>
+              </a:rPr>
+              <a:t> AIC </a:t>
+            </a:r>
+            <a:r>
+              <a:rPr>
+                <a:solidFill>
+                  <a:srgbClr val="5E5E5E"/>
+                </a:solidFill>
+                <a:latin typeface="Courier"/>
+              </a:rPr>
+              <a:t>-</a:t>
+            </a:r>
+            <a:r>
+              <a:rPr>
+                <a:solidFill>
+                  <a:srgbClr val="003B4F"/>
+                </a:solidFill>
+                <a:latin typeface="Courier"/>
+              </a:rPr>
+              <a:t> </a:t>
+            </a:r>
+            <a:r>
+              <a:rPr>
+                <a:solidFill>
+                  <a:srgbClr val="4758AB"/>
+                </a:solidFill>
+                <a:latin typeface="Courier"/>
+              </a:rPr>
+              <a:t>min</a:t>
+            </a:r>
+            <a:r>
+              <a:rPr>
+                <a:solidFill>
+                  <a:srgbClr val="003B4F"/>
+                </a:solidFill>
+                <a:latin typeface="Courier"/>
+              </a:rPr>
+              <a:t>(AIC)) </a:t>
+            </a:r>
+            <a:r>
+              <a:rPr>
+                <a:solidFill>
+                  <a:srgbClr val="5E5E5E"/>
+                </a:solidFill>
+                <a:latin typeface="Courier"/>
+              </a:rPr>
+              <a:t>%&gt;%</a:t>
+            </a:r>
+            <a:br/>
+            <a:r>
+              <a:rPr>
+                <a:solidFill>
+                  <a:srgbClr val="003B4F"/>
+                </a:solidFill>
+                <a:latin typeface="Courier"/>
+              </a:rPr>
+              <a:t>  </a:t>
+            </a:r>
+            <a:r>
+              <a:rPr>
+                <a:solidFill>
+                  <a:srgbClr val="4758AB"/>
+                </a:solidFill>
+                <a:latin typeface="Courier"/>
+              </a:rPr>
+              <a:t>arrange</a:t>
+            </a:r>
+            <a:r>
+              <a:rPr>
+                <a:solidFill>
+                  <a:srgbClr val="003B4F"/>
+                </a:solidFill>
+                <a:latin typeface="Courier"/>
+              </a:rPr>
+              <a:t>(AIC)</a:t>
+            </a:r>
+            <a:br/>
+            <a:br/>
+            <a:r>
+              <a:rPr>
+                <a:solidFill>
+                  <a:srgbClr val="003B4F"/>
+                </a:solidFill>
+                <a:latin typeface="Courier"/>
+              </a:rPr>
+              <a:t>model_comparison</a:t>
+            </a:r>
+          </a:p>
+          <a:p>
+            <a:pPr lvl="0" indent="0">
+              <a:buNone/>
+            </a:pPr>
+            <a:r>
+              <a:rPr>
+                <a:latin typeface="Courier"/>
+              </a:rPr>
+              <a:t># A tibble: 4 × 4
+  model              adj_r2   AIC delta_AIC
+  &lt;chr&gt;               &lt;dbl&gt; &lt;dbl&gt;     &lt;dbl&gt;
+1 log_area + grazing  0.640  373.      0   
+2 all six predictors  0.646  375.      2.55
+3 log_area only       0.539  385.     12.8 
+4 grazing only        0.456  395.     22.1 </a:t>
+            </a:r>
+          </a:p>
+        </p:txBody>
+      </p:sp>
+      <p:sp>
+        <p:nvSpPr>
+          <p:cNvPr id="4" name="Content Placeholder 3"/>
+          <p:cNvSpPr>
+            <a:spLocks noGrp="1"/>
+          </p:cNvSpPr>
+          <p:nvPr>
+            <p:ph idx="2" sz="half"/>
+          </p:nvPr>
+        </p:nvSpPr>
+        <p:spPr/>
+        <p:txBody>
+          <a:bodyPr/>
+          <a:lstStyle/>
+          <a:p>
+            <a:pPr lvl="0" indent="0" marL="1270000">
+              <a:buNone/>
+            </a:pPr>
+            <a:r>
+              <a:rPr sz="2000" b="1"/>
+              <a:t>Important</a:t>
+            </a:r>
+          </a:p>
+          <a:p>
+            <a:pPr lvl="0" indent="0" marL="1270000">
+              <a:buNone/>
+            </a:pPr>
+            <a:r>
+              <a:rPr sz="2000" b="1"/>
+              <a:t>✅ The two-predictor model wins</a:t>
+            </a:r>
+          </a:p>
+          <a:p>
+            <a:pPr lvl="0" indent="0" marL="1270000">
+              <a:buNone/>
+            </a:pPr>
+            <a:r>
+              <a:rPr sz="2000"/>
+              <a:t>It has the </a:t>
+            </a:r>
+            <a:r>
+              <a:rPr sz="2000" b="1"/>
+              <a:t>lowest AIC</a:t>
+            </a:r>
+            <a:r>
+              <a:rPr sz="2000"/>
+              <a:t> and essentially the same adjusted R² as the full model — with four fewer predictors.</a:t>
+            </a:r>
+          </a:p>
+          <a:p>
+            <a:pPr lvl="0" indent="0" marL="1270000">
+              <a:buNone/>
+            </a:pPr>
+            <a:r>
+              <a:rPr sz="2000"/>
+              <a:t>A </a:t>
+            </a:r>
+            <a:r>
+              <a:rPr sz="2000" b="1"/>
+              <a:t>ΔAIC above about 2</a:t>
+            </a:r>
+            <a:r>
+              <a:rPr sz="2000"/>
+              <a:t> is usually treated as a real difference, so the full model’s extra terms are not paying for themselves.</a:t>
+            </a:r>
+          </a:p>
+          <a:p>
+            <a:pPr lvl="0" indent="0" marL="0">
+              <a:buNone/>
+            </a:pPr>
+            <a:r>
+              <a:rPr/>
+              <a:t>The </a:t>
+            </a:r>
+            <a:r>
+              <a:rPr>
+                <a:latin typeface="Courier"/>
+              </a:rPr>
+              <a:t>anova()</a:t>
+            </a:r>
+            <a:r>
+              <a:rPr/>
+              <a:t> test in Part 3 said the same thing. Two routes, one answer.</a:t>
+            </a:r>
+          </a:p>
+        </p:txBody>
+      </p:sp>
+    </p:spTree>
+  </p:cSld>
+</p:sld>
+</file>
+
+<file path=ppt/slides/slide5.xml><?xml version="1.0" encoding="utf-8"?>
+<p:sld xmlns:a="http://schemas.openxmlformats.org/drawingml/2006/main" xmlns:r="http://schemas.openxmlformats.org/officeDocument/2006/relationships" xmlns:p="http://schemas.openxmlformats.org/presentationml/2006/main">
+  <p:cSld>
+    <p:spTree>
+      <p:nvGrpSpPr>
+        <p:cNvPr id="1" name=""/>
+        <p:cNvGrpSpPr/>
+        <p:nvPr/>
+      </p:nvGrpSpPr>
+      <p:grpSpPr>
+        <a:xfrm>
+          <a:off x="0" y="0"/>
+          <a:ext cx="0" cy="0"/>
+          <a:chOff x="0" y="0"/>
+          <a:chExt cx="0" cy="0"/>
+        </a:xfrm>
+      </p:grpSpPr>
+      <p:sp>
+        <p:nvSpPr>
+          <p:cNvPr id="2" name="Title 1"/>
+          <p:cNvSpPr>
+            <a:spLocks noGrp="1"/>
+          </p:cNvSpPr>
+          <p:nvPr>
+            <p:ph type="title"/>
+          </p:nvPr>
+        </p:nvSpPr>
+        <p:spPr>
+          <a:xfrm>
+            <a:off x="0" y="0"/>
+            <a:ext cx="9144000" cy="602780"/>
+          </a:xfrm>
+          <a:solidFill>
+            <a:srgbClr val="70121D"/>
+          </a:solidFill>
+        </p:spPr>
+        <p:txBody>
+          <a:bodyPr/>
+          <a:lstStyle/>
+          <a:p>
+            <a:pPr lvl="0" indent="0" marL="0">
+              <a:buNone/>
+            </a:pPr>
+            <a:r>
+              <a:rPr/>
+              <a:t>The Study · Birds in Fragmented Forest</a:t>
+            </a:r>
+          </a:p>
+        </p:txBody>
+      </p:sp>
+      <p:sp>
+        <p:nvSpPr>
+          <p:cNvPr id="3" name="Content Placeholder 2"/>
+          <p:cNvSpPr>
+            <a:spLocks noGrp="1"/>
+          </p:cNvSpPr>
+          <p:nvPr>
+            <p:ph idx="1" sz="half"/>
+          </p:nvPr>
+        </p:nvSpPr>
+        <p:spPr/>
+        <p:txBody>
+          <a:bodyPr/>
+          <a:lstStyle/>
+          <a:p>
+            <a:pPr lvl="0" indent="0" marL="0">
+              <a:buNone/>
+            </a:pPr>
+            <a:r>
+              <a:rPr/>
+              <a:t>Loyn (1987) surveyed </a:t>
+            </a:r>
+            <a:r>
+              <a:rPr b="1"/>
+              <a:t>56 remnant forest patches</a:t>
+            </a:r>
+            <a:r>
+              <a:rPr/>
+              <a:t> in Victoria, Australia, and counted the birds in each one. For every patch he also recorded six things that might explain the count.</a:t>
+            </a:r>
+          </a:p>
+          <a:p>
+            <a:pPr lvl="0" indent="0" marL="0">
+              <a:buNone/>
+            </a:pPr>
+            <a:r>
+              <a:rPr/>
+              <a:t>Small patches, isolated patches, recently cut-off patches and heavily grazed patches are all candidates — and they are not independent of each other.</a:t>
+            </a:r>
+          </a:p>
+        </p:txBody>
+      </p:sp>
+    </p:spTree>
+  </p:cSld>
+</p:sld>
+</file>
+
+<file path=ppt/slides/slide50.xml><?xml version="1.0" encoding="utf-8"?>
+<p:sld xmlns:a="http://schemas.openxmlformats.org/drawingml/2006/main" xmlns:r="http://schemas.openxmlformats.org/officeDocument/2006/relationships" xmlns:p="http://schemas.openxmlformats.org/presentationml/2006/main">
+  <p:cSld>
+    <p:spTree>
+      <p:nvGrpSpPr>
+        <p:cNvPr id="1" name=""/>
+        <p:cNvGrpSpPr/>
+        <p:nvPr/>
+      </p:nvGrpSpPr>
+      <p:grpSpPr>
+        <a:xfrm>
+          <a:off x="0" y="0"/>
+          <a:ext cx="0" cy="0"/>
+          <a:chOff x="0" y="0"/>
+          <a:chExt cx="0" cy="0"/>
+        </a:xfrm>
+      </p:grpSpPr>
+      <p:sp>
+        <p:nvSpPr>
+          <p:cNvPr id="2" name="Title 1"/>
+          <p:cNvSpPr>
+            <a:spLocks noGrp="1"/>
+          </p:cNvSpPr>
+          <p:nvPr>
+            <p:ph type="title"/>
+          </p:nvPr>
+        </p:nvSpPr>
+        <p:spPr>
+          <a:xfrm>
+            <a:off x="0" y="0"/>
+            <a:ext cx="9144000" cy="582780"/>
+          </a:xfrm>
+        </p:spPr>
+        <p:txBody>
+          <a:bodyPr/>
+          <a:lstStyle/>
+          <a:p>
+            <a:pPr lvl="0" indent="0" marL="0">
+              <a:buNone/>
+            </a:pPr>
+            <a:r>
+              <a:rPr/>
+              <a:t>Part 9 · Relative Importance of Predictors</a:t>
+            </a:r>
+          </a:p>
+        </p:txBody>
+      </p:sp>
+    </p:spTree>
+  </p:cSld>
+</p:sld>
+</file>
+
+<file path=ppt/slides/slide51.xml><?xml version="1.0" encoding="utf-8"?>
+<p:sld xmlns:a="http://schemas.openxmlformats.org/drawingml/2006/main" xmlns:r="http://schemas.openxmlformats.org/officeDocument/2006/relationships" xmlns:p="http://schemas.openxmlformats.org/presentationml/2006/main">
+  <p:cSld>
+    <p:spTree>
+      <p:nvGrpSpPr>
+        <p:cNvPr id="1" name=""/>
+        <p:cNvGrpSpPr/>
+        <p:nvPr/>
+      </p:nvGrpSpPr>
+      <p:grpSpPr>
+        <a:xfrm>
+          <a:off x="0" y="0"/>
+          <a:ext cx="0" cy="0"/>
+          <a:chOff x="0" y="0"/>
+          <a:chExt cx="0" cy="0"/>
+        </a:xfrm>
+      </p:grpSpPr>
+      <p:sp>
+        <p:nvSpPr>
+          <p:cNvPr id="2" name="Title 1"/>
+          <p:cNvSpPr>
+            <a:spLocks noGrp="1"/>
+          </p:cNvSpPr>
+          <p:nvPr>
+            <p:ph type="title"/>
+          </p:nvPr>
+        </p:nvSpPr>
+        <p:spPr>
+          <a:xfrm>
+            <a:off x="0" y="0"/>
+            <a:ext cx="9144000" cy="602780"/>
+          </a:xfrm>
+          <a:solidFill>
+            <a:srgbClr val="70121D"/>
+          </a:solidFill>
+        </p:spPr>
+        <p:txBody>
+          <a:bodyPr/>
+          <a:lstStyle/>
+          <a:p>
+            <a:pPr lvl="0" indent="0" marL="0">
+              <a:buNone/>
+            </a:pPr>
+            <a:r>
+              <a:rPr/>
+              <a:t>How Important Is Each Predictor?</a:t>
+            </a:r>
+          </a:p>
+        </p:txBody>
+      </p:sp>
+      <p:sp>
+        <p:nvSpPr>
+          <p:cNvPr id="3" name="Content Placeholder 2"/>
+          <p:cNvSpPr>
+            <a:spLocks noGrp="1"/>
+          </p:cNvSpPr>
+          <p:nvPr>
+            <p:ph idx="1" sz="half"/>
+          </p:nvPr>
+        </p:nvSpPr>
+        <p:spPr/>
+        <p:txBody>
+          <a:bodyPr/>
+          <a:lstStyle/>
+          <a:p>
+            <a:pPr lvl="0" indent="0" marL="0">
+              <a:buNone/>
+            </a:pPr>
+            <a:r>
+              <a:rPr/>
+              <a:t>Three standard approaches, and they answer slightly different questions:</a:t>
+            </a:r>
+          </a:p>
+          <a:p>
+            <a:pPr lvl="0" indent="-342900" marL="342900">
+              <a:buAutoNum type="arabicPeriod"/>
+            </a:pPr>
+            <a:r>
+              <a:rPr b="1"/>
+              <a:t>F- or t-tests</a:t>
+            </a:r>
+            <a:r>
+              <a:rPr/>
+              <a:t> on the partial slopes</a:t>
+            </a:r>
+          </a:p>
+          <a:p>
+            <a:pPr lvl="0" indent="-342900" marL="342900">
+              <a:buAutoNum type="arabicPeriod"/>
+            </a:pPr>
+            <a:r>
+              <a:rPr b="1"/>
+              <a:t>Coefficient of partial determination</a:t>
+            </a:r>
+            <a:r>
+              <a:rPr/>
+              <a:t> — the variance a predictor adds</a:t>
+            </a:r>
+          </a:p>
+          <a:p>
+            <a:pPr lvl="0" indent="-342900" marL="342900">
+              <a:buAutoNum type="arabicPeriod"/>
+            </a:pPr>
+            <a:r>
+              <a:rPr b="1"/>
+              <a:t>Standardized partial slopes</a:t>
+            </a:r>
+            <a:r>
+              <a:rPr/>
+              <a:t> — every predictor in SD units</a:t>
+            </a:r>
+          </a:p>
+          <a:p>
+            <a:pPr lvl="0" indent="0" marL="0">
+              <a:buNone/>
+            </a:pPr>
+            <a:r>
+              <a:rPr/>
+              <a:t>None of them is “the” right answer.</a:t>
+            </a:r>
+          </a:p>
+        </p:txBody>
+      </p:sp>
+      <p:sp>
+        <p:nvSpPr>
+          <p:cNvPr id="4" name="Content Placeholder 3"/>
+          <p:cNvSpPr>
+            <a:spLocks noGrp="1"/>
+          </p:cNvSpPr>
+          <p:nvPr>
+            <p:ph idx="2" sz="half"/>
+          </p:nvPr>
+        </p:nvSpPr>
+        <p:spPr/>
+        <p:txBody>
+          <a:bodyPr/>
+          <a:lstStyle/>
+          <a:p>
+            <a:pPr lvl="0" indent="0" marL="1270000">
+              <a:buNone/>
+            </a:pPr>
+            <a:r>
+              <a:rPr sz="2000" b="1"/>
+              <a:t>Warning</a:t>
+            </a:r>
+          </a:p>
+          <a:p>
+            <a:pPr lvl="0" indent="0" marL="1270000">
+              <a:buNone/>
+            </a:pPr>
+            <a:r>
+              <a:rPr sz="2000" b="1"/>
+              <a:t>⚠️ Why the raw slopes cannot be compared</a:t>
+            </a:r>
+          </a:p>
+          <a:p>
+            <a:pPr lvl="0" indent="0" marL="1270000">
+              <a:buNone/>
+            </a:pPr>
+            <a:r>
+              <a:rPr sz="2000">
+                <a:latin typeface="Courier"/>
+              </a:rPr>
+              <a:t>log_area</a:t>
+            </a:r>
+            <a:r>
+              <a:rPr sz="2000"/>
+              <a:t> has a slope of 6.89 and </a:t>
+            </a:r>
+            <a:r>
+              <a:rPr sz="2000">
+                <a:latin typeface="Courier"/>
+              </a:rPr>
+              <a:t>grazing</a:t>
+            </a:r>
+            <a:r>
+              <a:rPr sz="2000"/>
+              <a:t> -2.85.</a:t>
+            </a:r>
+          </a:p>
+          <a:p>
+            <a:pPr lvl="0" indent="0" marL="1270000">
+              <a:buNone/>
+            </a:pPr>
+            <a:r>
+              <a:rPr sz="2000"/>
+              <a:t>One is “birds per tenfold increase in area,” the other is “birds per step of grazing intensity.” Comparing those two numbers is comparing metres with kilograms.</a:t>
+            </a:r>
+          </a:p>
+        </p:txBody>
+      </p:sp>
+    </p:spTree>
+  </p:cSld>
+</p:sld>
+</file>
+
+<file path=ppt/slides/slide52.xml><?xml version="1.0" encoding="utf-8"?>
 <p:sld xmlns:a="http://schemas.openxmlformats.org/drawingml/2006/main" xmlns:r="http://schemas.openxmlformats.org/officeDocument/2006/relationships" xmlns:p="http://schemas.openxmlformats.org/presentationml/2006/main">
   <p:cSld>
     <p:spTree>
@@ -14488,7 +16589,7 @@
 </p:sld>
 </file>
 
-<file path=ppt/slides/slide5.xml><?xml version="1.0" encoding="utf-8"?>
+<file path=ppt/slides/slide53.xml><?xml version="1.0" encoding="utf-8"?>
 <p:sld xmlns:a="http://schemas.openxmlformats.org/drawingml/2006/main" xmlns:r="http://schemas.openxmlformats.org/officeDocument/2006/relationships" xmlns:p="http://schemas.openxmlformats.org/presentationml/2006/main">
   <p:cSld>
     <p:spTree>
@@ -14533,7 +16634,7 @@
             </a:pPr>
             <a:r>
               <a:rPr/>
-              <a:t>The Study · Birds in Fragmented Forest</a:t>
+              <a:t>Approach 3 — Standardized Partial Slopes</a:t>
             </a:r>
           </a:p>
         </p:txBody>
@@ -14558,24 +16659,407 @@
             </a:pPr>
             <a:r>
               <a:rPr/>
-              <a:t>Loyn (1987) surveyed </a:t>
-            </a:r>
+              <a:t>Rescale every variable to mean 0 and SD 1, and the slopes become directly comparable: “SDs of Y per SD of X.”</a:t>
+            </a:r>
+          </a:p>
+          <a:p>
+            <a:pPr lvl="0" indent="0">
+              <a:buNone/>
+            </a:pPr>
+            <a:r>
+              <a:rPr>
+                <a:solidFill>
+                  <a:srgbClr val="003B4F"/>
+                </a:solidFill>
+                <a:latin typeface="Courier"/>
+              </a:rPr>
+              <a:t>bird_z &lt;- bird_df </a:t>
+            </a:r>
+            <a:r>
+              <a:rPr>
+                <a:solidFill>
+                  <a:srgbClr val="5E5E5E"/>
+                </a:solidFill>
+                <a:latin typeface="Courier"/>
+              </a:rPr>
+              <a:t>%&gt;%</a:t>
+            </a:r>
+            <a:br/>
+            <a:r>
+              <a:rPr>
+                <a:solidFill>
+                  <a:srgbClr val="003B4F"/>
+                </a:solidFill>
+                <a:latin typeface="Courier"/>
+              </a:rPr>
+              <a:t>  </a:t>
+            </a:r>
+            <a:r>
+              <a:rPr>
+                <a:solidFill>
+                  <a:srgbClr val="4758AB"/>
+                </a:solidFill>
+                <a:latin typeface="Courier"/>
+              </a:rPr>
+              <a:t>mutate</a:t>
+            </a:r>
+            <a:r>
+              <a:rPr>
+                <a:solidFill>
+                  <a:srgbClr val="003B4F"/>
+                </a:solidFill>
+                <a:latin typeface="Courier"/>
+              </a:rPr>
+              <a:t>(</a:t>
+            </a:r>
+            <a:r>
+              <a:rPr>
+                <a:solidFill>
+                  <a:srgbClr val="4758AB"/>
+                </a:solidFill>
+                <a:latin typeface="Courier"/>
+              </a:rPr>
+              <a:t>across</a:t>
+            </a:r>
+            <a:r>
+              <a:rPr>
+                <a:solidFill>
+                  <a:srgbClr val="003B4F"/>
+                </a:solidFill>
+                <a:latin typeface="Courier"/>
+              </a:rPr>
+              <a:t>(</a:t>
+            </a:r>
+            <a:r>
+              <a:rPr>
+                <a:solidFill>
+                  <a:srgbClr val="4758AB"/>
+                </a:solidFill>
+                <a:latin typeface="Courier"/>
+              </a:rPr>
+              <a:t>c</a:t>
+            </a:r>
+            <a:r>
+              <a:rPr>
+                <a:solidFill>
+                  <a:srgbClr val="003B4F"/>
+                </a:solidFill>
+                <a:latin typeface="Courier"/>
+              </a:rPr>
+              <a:t>(abundance, log_area, grazing),</a:t>
+            </a:r>
+            <a:br/>
+            <a:r>
+              <a:rPr>
+                <a:solidFill>
+                  <a:srgbClr val="003B4F"/>
+                </a:solidFill>
+                <a:latin typeface="Courier"/>
+              </a:rPr>
+              <a:t>                </a:t>
+            </a:r>
+            <a:r>
+              <a:rPr>
+                <a:solidFill>
+                  <a:srgbClr val="5E5E5E"/>
+                </a:solidFill>
+                <a:latin typeface="Courier"/>
+              </a:rPr>
+              <a:t>~</a:t>
+            </a:r>
+            <a:r>
+              <a:rPr>
+                <a:solidFill>
+                  <a:srgbClr val="003B4F"/>
+                </a:solidFill>
+                <a:latin typeface="Courier"/>
+              </a:rPr>
+              <a:t> </a:t>
+            </a:r>
+            <a:r>
+              <a:rPr>
+                <a:solidFill>
+                  <a:srgbClr val="4758AB"/>
+                </a:solidFill>
+                <a:latin typeface="Courier"/>
+              </a:rPr>
+              <a:t>as.numeric</a:t>
+            </a:r>
+            <a:r>
+              <a:rPr>
+                <a:solidFill>
+                  <a:srgbClr val="003B4F"/>
+                </a:solidFill>
+                <a:latin typeface="Courier"/>
+              </a:rPr>
+              <a:t>(</a:t>
+            </a:r>
+            <a:r>
+              <a:rPr>
+                <a:solidFill>
+                  <a:srgbClr val="4758AB"/>
+                </a:solidFill>
+                <a:latin typeface="Courier"/>
+              </a:rPr>
+              <a:t>scale</a:t>
+            </a:r>
+            <a:r>
+              <a:rPr>
+                <a:solidFill>
+                  <a:srgbClr val="003B4F"/>
+                </a:solidFill>
+                <a:latin typeface="Courier"/>
+              </a:rPr>
+              <a:t>(.))))</a:t>
+            </a:r>
+            <a:br/>
+            <a:br/>
+            <a:r>
+              <a:rPr>
+                <a:solidFill>
+                  <a:srgbClr val="4758AB"/>
+                </a:solidFill>
+                <a:latin typeface="Courier"/>
+              </a:rPr>
+              <a:t>lm</a:t>
+            </a:r>
+            <a:r>
+              <a:rPr>
+                <a:solidFill>
+                  <a:srgbClr val="003B4F"/>
+                </a:solidFill>
+                <a:latin typeface="Courier"/>
+              </a:rPr>
+              <a:t>(abundance </a:t>
+            </a:r>
+            <a:r>
+              <a:rPr>
+                <a:solidFill>
+                  <a:srgbClr val="5E5E5E"/>
+                </a:solidFill>
+                <a:latin typeface="Courier"/>
+              </a:rPr>
+              <a:t>~</a:t>
+            </a:r>
+            <a:r>
+              <a:rPr>
+                <a:solidFill>
+                  <a:srgbClr val="003B4F"/>
+                </a:solidFill>
+                <a:latin typeface="Courier"/>
+              </a:rPr>
+              <a:t> log_area </a:t>
+            </a:r>
+            <a:r>
+              <a:rPr>
+                <a:solidFill>
+                  <a:srgbClr val="5E5E5E"/>
+                </a:solidFill>
+                <a:latin typeface="Courier"/>
+              </a:rPr>
+              <a:t>+</a:t>
+            </a:r>
+            <a:r>
+              <a:rPr>
+                <a:solidFill>
+                  <a:srgbClr val="003B4F"/>
+                </a:solidFill>
+                <a:latin typeface="Courier"/>
+              </a:rPr>
+              <a:t> grazing, </a:t>
+            </a:r>
+            <a:r>
+              <a:rPr>
+                <a:solidFill>
+                  <a:srgbClr val="657422"/>
+                </a:solidFill>
+                <a:latin typeface="Courier"/>
+              </a:rPr>
+              <a:t>data =</a:t>
+            </a:r>
+            <a:r>
+              <a:rPr>
+                <a:solidFill>
+                  <a:srgbClr val="003B4F"/>
+                </a:solidFill>
+                <a:latin typeface="Courier"/>
+              </a:rPr>
+              <a:t> bird_z) </a:t>
+            </a:r>
+            <a:r>
+              <a:rPr>
+                <a:solidFill>
+                  <a:srgbClr val="5E5E5E"/>
+                </a:solidFill>
+                <a:latin typeface="Courier"/>
+              </a:rPr>
+              <a:t>%&gt;%</a:t>
+            </a:r>
+            <a:br/>
+            <a:r>
+              <a:rPr>
+                <a:solidFill>
+                  <a:srgbClr val="003B4F"/>
+                </a:solidFill>
+                <a:latin typeface="Courier"/>
+              </a:rPr>
+              <a:t>  </a:t>
+            </a:r>
+            <a:r>
+              <a:rPr>
+                <a:solidFill>
+                  <a:srgbClr val="4758AB"/>
+                </a:solidFill>
+                <a:latin typeface="Courier"/>
+              </a:rPr>
+              <a:t>coef</a:t>
+            </a:r>
+            <a:r>
+              <a:rPr>
+                <a:solidFill>
+                  <a:srgbClr val="003B4F"/>
+                </a:solidFill>
+                <a:latin typeface="Courier"/>
+              </a:rPr>
+              <a:t>() </a:t>
+            </a:r>
+            <a:r>
+              <a:rPr>
+                <a:solidFill>
+                  <a:srgbClr val="5E5E5E"/>
+                </a:solidFill>
+                <a:latin typeface="Courier"/>
+              </a:rPr>
+              <a:t>%&gt;%</a:t>
+            </a:r>
+            <a:r>
+              <a:rPr>
+                <a:solidFill>
+                  <a:srgbClr val="003B4F"/>
+                </a:solidFill>
+                <a:latin typeface="Courier"/>
+              </a:rPr>
+              <a:t> </a:t>
+            </a:r>
+            <a:r>
+              <a:rPr>
+                <a:solidFill>
+                  <a:srgbClr val="4758AB"/>
+                </a:solidFill>
+                <a:latin typeface="Courier"/>
+              </a:rPr>
+              <a:t>round</a:t>
+            </a:r>
+            <a:r>
+              <a:rPr>
+                <a:solidFill>
+                  <a:srgbClr val="003B4F"/>
+                </a:solidFill>
+                <a:latin typeface="Courier"/>
+              </a:rPr>
+              <a:t>(</a:t>
+            </a:r>
+            <a:r>
+              <a:rPr>
+                <a:solidFill>
+                  <a:srgbClr val="AD0000"/>
+                </a:solidFill>
+                <a:latin typeface="Courier"/>
+              </a:rPr>
+              <a:t>3</a:t>
+            </a:r>
+            <a:r>
+              <a:rPr>
+                <a:solidFill>
+                  <a:srgbClr val="003B4F"/>
+                </a:solidFill>
+                <a:latin typeface="Courier"/>
+              </a:rPr>
+              <a:t>)</a:t>
+            </a:r>
+          </a:p>
+          <a:p>
+            <a:pPr lvl="0" indent="0">
+              <a:buNone/>
+            </a:pPr>
+            <a:r>
+              <a:rPr>
+                <a:latin typeface="Courier"/>
+              </a:rPr>
+              <a:t>(Intercept)    log_area     grazing 
+      0.000       0.521      -0.391 </a:t>
+            </a:r>
+          </a:p>
+        </p:txBody>
+      </p:sp>
+      <p:sp>
+        <p:nvSpPr>
+          <p:cNvPr id="4" name="Content Placeholder 3"/>
+          <p:cNvSpPr>
+            <a:spLocks noGrp="1"/>
+          </p:cNvSpPr>
+          <p:nvPr>
+            <p:ph idx="2" sz="half"/>
+          </p:nvPr>
+        </p:nvSpPr>
+        <p:spPr/>
+        <p:txBody>
+          <a:bodyPr/>
+          <a:lstStyle/>
+          <a:p>
+            <a:pPr lvl="0" indent="0" marL="0">
+              <a:buNone/>
+            </a:pPr>
             <a:r>
               <a:rPr b="1"/>
-              <a:t>56 remnant forest patches</a:t>
-            </a:r>
-            <a:r>
-              <a:rPr/>
-              <a:t> in Victoria, Australia, and counted the birds in each one. For every patch he also recorded six things that might explain the count.</a:t>
-            </a:r>
-          </a:p>
-          <a:p>
-            <a:pPr lvl="0" indent="0" marL="0">
-              <a:buNone/>
-            </a:pPr>
-            <a:r>
-              <a:rPr/>
-              <a:t>Small patches, isolated patches, recently cut-off patches and heavily grazed patches are all candidates — and they are not independent of each other.</a:t>
+              <a:t>log_area 0.52</a:t>
+            </a:r>
+            <a:r>
+              <a:rPr/>
+              <a:t> versus </a:t>
+            </a:r>
+            <a:r>
+              <a:rPr b="1"/>
+              <a:t>grazing -0.39</a:t>
+            </a:r>
+            <a:r>
+              <a:rPr/>
+              <a:t> — area is about 1.3× the influence of grazing per standard deviation.</a:t>
+            </a:r>
+          </a:p>
+          <a:p>
+            <a:pPr lvl="0" indent="0" marL="1270000">
+              <a:buNone/>
+            </a:pPr>
+            <a:r>
+              <a:rPr sz="2000" b="1"/>
+              <a:t>Note</a:t>
+            </a:r>
+          </a:p>
+          <a:p>
+            <a:pPr lvl="0" indent="0" marL="1270000">
+              <a:buNone/>
+            </a:pPr>
+            <a:r>
+              <a:rPr sz="2000" b="1"/>
+              <a:t>✅ All three agree here</a:t>
+            </a:r>
+          </a:p>
+          <a:p>
+            <a:pPr lvl="0" indent="0" marL="1270000">
+              <a:buNone/>
+            </a:pPr>
+            <a:r>
+              <a:rPr sz="2000"/>
+              <a:t>Partial F, partial R² and standardized slopes all rank area above grazing. When they </a:t>
+            </a:r>
+            <a:r>
+              <a:rPr sz="2000" i="1"/>
+              <a:t>disagree</a:t>
+            </a:r>
+            <a:r>
+              <a:rPr sz="2000"/>
+              <a:t>, that is worth reporting — it usually means the predictors are tangled.</a:t>
             </a:r>
           </a:p>
         </p:txBody>
@@ -14585,7 +17069,7 @@
 </p:sld>
 </file>
 
-<file path=ppt/slides/slide50.xml><?xml version="1.0" encoding="utf-8"?>
+<file path=ppt/slides/slide54.xml><?xml version="1.0" encoding="utf-8"?>
 <p:sld xmlns:a="http://schemas.openxmlformats.org/drawingml/2006/main" xmlns:r="http://schemas.openxmlformats.org/officeDocument/2006/relationships" xmlns:p="http://schemas.openxmlformats.org/presentationml/2006/main">
   <p:cSld>
     <p:spTree>
@@ -14630,7 +17114,7 @@
             </a:pPr>
             <a:r>
               <a:rPr/>
-              <a:t>Approach 3 — Standardized Partial Slopes</a:t>
+              <a:t>Partial η² and ΔR² — What to Keep, What to Toss</a:t>
             </a:r>
           </a:p>
         </p:txBody>
@@ -14655,7 +17139,15 @@
             </a:pPr>
             <a:r>
               <a:rPr/>
-              <a:t>Rescale every variable to mean 0 and SD 1, and the slopes become directly comparable: “SDs of Y per SD of X.”</a:t>
+              <a:t>Run both on the </a:t>
+            </a:r>
+            <a:r>
+              <a:rPr b="1"/>
+              <a:t>full</a:t>
+            </a:r>
+            <a:r>
+              <a:rPr/>
+              <a:t> model and every predictor is ranked at once.</a:t>
             </a:r>
           </a:p>
           <a:p>
@@ -14669,7 +17161,107 @@
                 </a:solidFill>
                 <a:latin typeface="Courier"/>
               </a:rPr>
-              <a:t>bird_z &lt;- bird_df </a:t>
+              <a:t>anova_full  &lt;- </a:t>
+            </a:r>
+            <a:r>
+              <a:rPr>
+                <a:solidFill>
+                  <a:srgbClr val="4758AB"/>
+                </a:solidFill>
+                <a:latin typeface="Courier"/>
+              </a:rPr>
+              <a:t>Anova</a:t>
+            </a:r>
+            <a:r>
+              <a:rPr>
+                <a:solidFill>
+                  <a:srgbClr val="003B4F"/>
+                </a:solidFill>
+                <a:latin typeface="Courier"/>
+              </a:rPr>
+              <a:t>(full_model, </a:t>
+            </a:r>
+            <a:r>
+              <a:rPr>
+                <a:solidFill>
+                  <a:srgbClr val="657422"/>
+                </a:solidFill>
+                <a:latin typeface="Courier"/>
+              </a:rPr>
+              <a:t>type =</a:t>
+            </a:r>
+            <a:r>
+              <a:rPr>
+                <a:solidFill>
+                  <a:srgbClr val="003B4F"/>
+                </a:solidFill>
+                <a:latin typeface="Courier"/>
+              </a:rPr>
+              <a:t> </a:t>
+            </a:r>
+            <a:r>
+              <a:rPr>
+                <a:solidFill>
+                  <a:srgbClr val="20794D"/>
+                </a:solidFill>
+                <a:latin typeface="Courier"/>
+              </a:rPr>
+              <a:t>"II"</a:t>
+            </a:r>
+            <a:r>
+              <a:rPr>
+                <a:solidFill>
+                  <a:srgbClr val="003B4F"/>
+                </a:solidFill>
+                <a:latin typeface="Courier"/>
+              </a:rPr>
+              <a:t>)</a:t>
+            </a:r>
+            <a:br/>
+            <a:r>
+              <a:rPr>
+                <a:solidFill>
+                  <a:srgbClr val="003B4F"/>
+                </a:solidFill>
+                <a:latin typeface="Courier"/>
+              </a:rPr>
+              <a:t>ss_res_full &lt;- </a:t>
+            </a:r>
+            <a:r>
+              <a:rPr>
+                <a:solidFill>
+                  <a:srgbClr val="4758AB"/>
+                </a:solidFill>
+                <a:latin typeface="Courier"/>
+              </a:rPr>
+              <a:t>sum</a:t>
+            </a:r>
+            <a:r>
+              <a:rPr>
+                <a:solidFill>
+                  <a:srgbClr val="003B4F"/>
+                </a:solidFill>
+                <a:latin typeface="Courier"/>
+              </a:rPr>
+              <a:t>(</a:t>
+            </a:r>
+            <a:r>
+              <a:rPr>
+                <a:solidFill>
+                  <a:srgbClr val="4758AB"/>
+                </a:solidFill>
+                <a:latin typeface="Courier"/>
+              </a:rPr>
+              <a:t>residuals</a:t>
+            </a:r>
+            <a:r>
+              <a:rPr>
+                <a:solidFill>
+                  <a:srgbClr val="003B4F"/>
+                </a:solidFill>
+                <a:latin typeface="Courier"/>
+              </a:rPr>
+              <a:t>(full_model)</a:t>
             </a:r>
             <a:r>
               <a:rPr>
@@ -14678,9 +17270,17 @@
                 </a:solidFill>
                 <a:latin typeface="Courier"/>
               </a:rPr>
-              <a:t>%&gt;%</a:t>
-            </a:r>
-            <a:br/>
+              <a:t>^</a:t>
+            </a:r>
+            <a:r>
+              <a:rPr>
+                <a:solidFill>
+                  <a:srgbClr val="AD0000"/>
+                </a:solidFill>
+                <a:latin typeface="Courier"/>
+              </a:rPr>
+              <a:t>2</a:t>
+            </a:r>
             <a:r>
               <a:rPr>
                 <a:solidFill>
@@ -14688,125 +17288,7 @@
                 </a:solidFill>
                 <a:latin typeface="Courier"/>
               </a:rPr>
-              <a:t>  </a:t>
-            </a:r>
-            <a:r>
-              <a:rPr>
-                <a:solidFill>
-                  <a:srgbClr val="4758AB"/>
-                </a:solidFill>
-                <a:latin typeface="Courier"/>
-              </a:rPr>
-              <a:t>mutate</a:t>
-            </a:r>
-            <a:r>
-              <a:rPr>
-                <a:solidFill>
-                  <a:srgbClr val="003B4F"/>
-                </a:solidFill>
-                <a:latin typeface="Courier"/>
-              </a:rPr>
-              <a:t>(</a:t>
-            </a:r>
-            <a:r>
-              <a:rPr>
-                <a:solidFill>
-                  <a:srgbClr val="4758AB"/>
-                </a:solidFill>
-                <a:latin typeface="Courier"/>
-              </a:rPr>
-              <a:t>across</a:t>
-            </a:r>
-            <a:r>
-              <a:rPr>
-                <a:solidFill>
-                  <a:srgbClr val="003B4F"/>
-                </a:solidFill>
-                <a:latin typeface="Courier"/>
-              </a:rPr>
-              <a:t>(</a:t>
-            </a:r>
-            <a:r>
-              <a:rPr>
-                <a:solidFill>
-                  <a:srgbClr val="4758AB"/>
-                </a:solidFill>
-                <a:latin typeface="Courier"/>
-              </a:rPr>
-              <a:t>c</a:t>
-            </a:r>
-            <a:r>
-              <a:rPr>
-                <a:solidFill>
-                  <a:srgbClr val="003B4F"/>
-                </a:solidFill>
-                <a:latin typeface="Courier"/>
-              </a:rPr>
-              <a:t>(abundance, log_area, grazing),</a:t>
-            </a:r>
-            <a:br/>
-            <a:r>
-              <a:rPr>
-                <a:solidFill>
-                  <a:srgbClr val="003B4F"/>
-                </a:solidFill>
-                <a:latin typeface="Courier"/>
-              </a:rPr>
-              <a:t>                </a:t>
-            </a:r>
-            <a:r>
-              <a:rPr>
-                <a:solidFill>
-                  <a:srgbClr val="5E5E5E"/>
-                </a:solidFill>
-                <a:latin typeface="Courier"/>
-              </a:rPr>
-              <a:t>~</a:t>
-            </a:r>
-            <a:r>
-              <a:rPr>
-                <a:solidFill>
-                  <a:srgbClr val="003B4F"/>
-                </a:solidFill>
-                <a:latin typeface="Courier"/>
-              </a:rPr>
-              <a:t> </a:t>
-            </a:r>
-            <a:r>
-              <a:rPr>
-                <a:solidFill>
-                  <a:srgbClr val="4758AB"/>
-                </a:solidFill>
-                <a:latin typeface="Courier"/>
-              </a:rPr>
-              <a:t>as.numeric</a:t>
-            </a:r>
-            <a:r>
-              <a:rPr>
-                <a:solidFill>
-                  <a:srgbClr val="003B4F"/>
-                </a:solidFill>
-                <a:latin typeface="Courier"/>
-              </a:rPr>
-              <a:t>(</a:t>
-            </a:r>
-            <a:r>
-              <a:rPr>
-                <a:solidFill>
-                  <a:srgbClr val="4758AB"/>
-                </a:solidFill>
-                <a:latin typeface="Courier"/>
-              </a:rPr>
-              <a:t>scale</a:t>
-            </a:r>
-            <a:r>
-              <a:rPr>
-                <a:solidFill>
-                  <a:srgbClr val="003B4F"/>
-                </a:solidFill>
-                <a:latin typeface="Courier"/>
-              </a:rPr>
-              <a:t>(.))))</a:t>
+              <a:t>)</a:t>
             </a:r>
             <a:br/>
             <a:br/>
@@ -14817,7 +17299,7 @@
                 </a:solidFill>
                 <a:latin typeface="Courier"/>
               </a:rPr>
-              <a:t>lm</a:t>
+              <a:t>tibble</a:t>
             </a:r>
             <a:r>
               <a:rPr>
@@ -14826,7 +17308,89 @@
                 </a:solidFill>
                 <a:latin typeface="Courier"/>
               </a:rPr>
-              <a:t>(abundance </a:t>
+              <a:t>(</a:t>
+            </a:r>
+            <a:r>
+              <a:rPr>
+                <a:solidFill>
+                  <a:srgbClr val="657422"/>
+                </a:solidFill>
+                <a:latin typeface="Courier"/>
+              </a:rPr>
+              <a:t>predictor =</a:t>
+            </a:r>
+            <a:r>
+              <a:rPr>
+                <a:solidFill>
+                  <a:srgbClr val="003B4F"/>
+                </a:solidFill>
+                <a:latin typeface="Courier"/>
+              </a:rPr>
+              <a:t> </a:t>
+            </a:r>
+            <a:r>
+              <a:rPr>
+                <a:solidFill>
+                  <a:srgbClr val="4758AB"/>
+                </a:solidFill>
+                <a:latin typeface="Courier"/>
+              </a:rPr>
+              <a:t>rownames</a:t>
+            </a:r>
+            <a:r>
+              <a:rPr>
+                <a:solidFill>
+                  <a:srgbClr val="003B4F"/>
+                </a:solidFill>
+                <a:latin typeface="Courier"/>
+              </a:rPr>
+              <a:t>(anova_full),</a:t>
+            </a:r>
+            <a:br/>
+            <a:r>
+              <a:rPr>
+                <a:solidFill>
+                  <a:srgbClr val="003B4F"/>
+                </a:solidFill>
+                <a:latin typeface="Courier"/>
+              </a:rPr>
+              <a:t>       </a:t>
+            </a:r>
+            <a:r>
+              <a:rPr>
+                <a:solidFill>
+                  <a:srgbClr val="657422"/>
+                </a:solidFill>
+                <a:latin typeface="Courier"/>
+              </a:rPr>
+              <a:t>SS        =</a:t>
+            </a:r>
+            <a:r>
+              <a:rPr>
+                <a:solidFill>
+                  <a:srgbClr val="003B4F"/>
+                </a:solidFill>
+                <a:latin typeface="Courier"/>
+              </a:rPr>
+              <a:t> anova_full[, </a:t>
+            </a:r>
+            <a:r>
+              <a:rPr>
+                <a:solidFill>
+                  <a:srgbClr val="20794D"/>
+                </a:solidFill>
+                <a:latin typeface="Courier"/>
+              </a:rPr>
+              <a:t>"Sum Sq"</a:t>
+            </a:r>
+            <a:r>
+              <a:rPr>
+                <a:solidFill>
+                  <a:srgbClr val="003B4F"/>
+                </a:solidFill>
+                <a:latin typeface="Courier"/>
+              </a:rPr>
+              <a:t>]) </a:t>
             </a:r>
             <a:r>
               <a:rPr>
@@ -14835,8 +17399,9 @@
                 </a:solidFill>
                 <a:latin typeface="Courier"/>
               </a:rPr>
-              <a:t>~</a:t>
-            </a:r>
+              <a:t>%&gt;%</a:t>
+            </a:r>
+            <a:br/>
             <a:r>
               <a:rPr>
                 <a:solidFill>
@@ -14844,7 +17409,25 @@
                 </a:solidFill>
                 <a:latin typeface="Courier"/>
               </a:rPr>
-              <a:t> log_area </a:t>
+              <a:t>  </a:t>
+            </a:r>
+            <a:r>
+              <a:rPr>
+                <a:solidFill>
+                  <a:srgbClr val="4758AB"/>
+                </a:solidFill>
+                <a:latin typeface="Courier"/>
+              </a:rPr>
+              <a:t>filter</a:t>
+            </a:r>
+            <a:r>
+              <a:rPr>
+                <a:solidFill>
+                  <a:srgbClr val="003B4F"/>
+                </a:solidFill>
+                <a:latin typeface="Courier"/>
+              </a:rPr>
+              <a:t>(predictor </a:t>
             </a:r>
             <a:r>
               <a:rPr>
@@ -14853,6 +17436,115 @@
                 </a:solidFill>
                 <a:latin typeface="Courier"/>
               </a:rPr>
+              <a:t>!=</a:t>
+            </a:r>
+            <a:r>
+              <a:rPr>
+                <a:solidFill>
+                  <a:srgbClr val="003B4F"/>
+                </a:solidFill>
+                <a:latin typeface="Courier"/>
+              </a:rPr>
+              <a:t> </a:t>
+            </a:r>
+            <a:r>
+              <a:rPr>
+                <a:solidFill>
+                  <a:srgbClr val="20794D"/>
+                </a:solidFill>
+                <a:latin typeface="Courier"/>
+              </a:rPr>
+              <a:t>"Residuals"</a:t>
+            </a:r>
+            <a:r>
+              <a:rPr>
+                <a:solidFill>
+                  <a:srgbClr val="003B4F"/>
+                </a:solidFill>
+                <a:latin typeface="Courier"/>
+              </a:rPr>
+              <a:t>) </a:t>
+            </a:r>
+            <a:r>
+              <a:rPr>
+                <a:solidFill>
+                  <a:srgbClr val="5E5E5E"/>
+                </a:solidFill>
+                <a:latin typeface="Courier"/>
+              </a:rPr>
+              <a:t>%&gt;%</a:t>
+            </a:r>
+            <a:br/>
+            <a:r>
+              <a:rPr>
+                <a:solidFill>
+                  <a:srgbClr val="003B4F"/>
+                </a:solidFill>
+                <a:latin typeface="Courier"/>
+              </a:rPr>
+              <a:t>  </a:t>
+            </a:r>
+            <a:r>
+              <a:rPr>
+                <a:solidFill>
+                  <a:srgbClr val="4758AB"/>
+                </a:solidFill>
+                <a:latin typeface="Courier"/>
+              </a:rPr>
+              <a:t>mutate</a:t>
+            </a:r>
+            <a:r>
+              <a:rPr>
+                <a:solidFill>
+                  <a:srgbClr val="003B4F"/>
+                </a:solidFill>
+                <a:latin typeface="Courier"/>
+              </a:rPr>
+              <a:t>(</a:t>
+            </a:r>
+            <a:r>
+              <a:rPr>
+                <a:solidFill>
+                  <a:srgbClr val="657422"/>
+                </a:solidFill>
+                <a:latin typeface="Courier"/>
+              </a:rPr>
+              <a:t>pEta2 =</a:t>
+            </a:r>
+            <a:r>
+              <a:rPr>
+                <a:solidFill>
+                  <a:srgbClr val="003B4F"/>
+                </a:solidFill>
+                <a:latin typeface="Courier"/>
+              </a:rPr>
+              <a:t> SS </a:t>
+            </a:r>
+            <a:r>
+              <a:rPr>
+                <a:solidFill>
+                  <a:srgbClr val="5E5E5E"/>
+                </a:solidFill>
+                <a:latin typeface="Courier"/>
+              </a:rPr>
+              <a:t>/</a:t>
+            </a:r>
+            <a:r>
+              <a:rPr>
+                <a:solidFill>
+                  <a:srgbClr val="003B4F"/>
+                </a:solidFill>
+                <a:latin typeface="Courier"/>
+              </a:rPr>
+              <a:t> (SS </a:t>
+            </a:r>
+            <a:r>
+              <a:rPr>
+                <a:solidFill>
+                  <a:srgbClr val="5E5E5E"/>
+                </a:solidFill>
+                <a:latin typeface="Courier"/>
+              </a:rPr>
               <a:t>+</a:t>
             </a:r>
             <a:r>
@@ -14862,7 +17554,17 @@
                 </a:solidFill>
                 <a:latin typeface="Courier"/>
               </a:rPr>
-              <a:t> grazing, </a:t>
+              <a:t> ss_res_full),</a:t>
+            </a:r>
+            <a:br/>
+            <a:r>
+              <a:rPr>
+                <a:solidFill>
+                  <a:srgbClr val="003B4F"/>
+                </a:solidFill>
+                <a:latin typeface="Courier"/>
+              </a:rPr>
+              <a:t>         </a:t>
             </a:r>
             <a:r>
               <a:rPr>
@@ -14871,7 +17573,7 @@
                 </a:solidFill>
                 <a:latin typeface="Courier"/>
               </a:rPr>
-              <a:t>data =</a:t>
+              <a:t>dR2   =</a:t>
             </a:r>
             <a:r>
               <a:rPr>
@@ -14880,7 +17582,7 @@
                 </a:solidFill>
                 <a:latin typeface="Courier"/>
               </a:rPr>
-              <a:t> bird_z) </a:t>
+              <a:t> SS </a:t>
             </a:r>
             <a:r>
               <a:rPr>
@@ -14889,6 +17591,24 @@
                 </a:solidFill>
                 <a:latin typeface="Courier"/>
               </a:rPr>
+              <a:t>/</a:t>
+            </a:r>
+            <a:r>
+              <a:rPr>
+                <a:solidFill>
+                  <a:srgbClr val="003B4F"/>
+                </a:solidFill>
+                <a:latin typeface="Courier"/>
+              </a:rPr>
+              <a:t> ss_tot) </a:t>
+            </a:r>
+            <a:r>
+              <a:rPr>
+                <a:solidFill>
+                  <a:srgbClr val="5E5E5E"/>
+                </a:solidFill>
+                <a:latin typeface="Courier"/>
+              </a:rPr>
               <a:t>%&gt;%</a:t>
             </a:r>
             <a:br/>
@@ -14908,7 +17628,7 @@
                 </a:solidFill>
                 <a:latin typeface="Courier"/>
               </a:rPr>
-              <a:t>coef</a:t>
+              <a:t>arrange</a:t>
             </a:r>
             <a:r>
               <a:rPr>
@@ -14917,16 +17637,16 @@
                 </a:solidFill>
                 <a:latin typeface="Courier"/>
               </a:rPr>
-              <a:t>() </a:t>
-            </a:r>
-            <a:r>
-              <a:rPr>
-                <a:solidFill>
-                  <a:srgbClr val="5E5E5E"/>
-                </a:solidFill>
-                <a:latin typeface="Courier"/>
-              </a:rPr>
-              <a:t>%&gt;%</a:t>
+              <a:t>(</a:t>
+            </a:r>
+            <a:r>
+              <a:rPr>
+                <a:solidFill>
+                  <a:srgbClr val="4758AB"/>
+                </a:solidFill>
+                <a:latin typeface="Courier"/>
+              </a:rPr>
+              <a:t>desc</a:t>
             </a:r>
             <a:r>
               <a:rPr>
@@ -14935,43 +17655,7 @@
                 </a:solidFill>
                 <a:latin typeface="Courier"/>
               </a:rPr>
-              <a:t> </a:t>
-            </a:r>
-            <a:r>
-              <a:rPr>
-                <a:solidFill>
-                  <a:srgbClr val="4758AB"/>
-                </a:solidFill>
-                <a:latin typeface="Courier"/>
-              </a:rPr>
-              <a:t>round</a:t>
-            </a:r>
-            <a:r>
-              <a:rPr>
-                <a:solidFill>
-                  <a:srgbClr val="003B4F"/>
-                </a:solidFill>
-                <a:latin typeface="Courier"/>
-              </a:rPr>
-              <a:t>(</a:t>
-            </a:r>
-            <a:r>
-              <a:rPr>
-                <a:solidFill>
-                  <a:srgbClr val="AD0000"/>
-                </a:solidFill>
-                <a:latin typeface="Courier"/>
-              </a:rPr>
-              <a:t>3</a:t>
-            </a:r>
-            <a:r>
-              <a:rPr>
-                <a:solidFill>
-                  <a:srgbClr val="003B4F"/>
-                </a:solidFill>
-                <a:latin typeface="Courier"/>
-              </a:rPr>
-              <a:t>)</a:t>
+              <a:t>(pEta2))</a:t>
             </a:r>
           </a:p>
           <a:p>
@@ -14982,8 +17666,15 @@
               <a:rPr>
                 <a:latin typeface="Courier"/>
               </a:rPr>
-              <a:t>(Intercept)    log_area     grazing 
-      0.000       0.521      -0.391 </a:t>
+              <a:t># A tibble: 6 × 4
+  predictor            SS   pEta2      dR2
+  &lt;chr&gt;             &lt;dbl&gt;   &lt;dbl&gt;    &lt;dbl&gt;
+1 log_area        1060.   0.347   0.167   
+2 grazing          131.   0.0616  0.0207  
+3 year_isolated    109.   0.0517  0.0172  
+4 altitude_m        27.0  0.0133  0.00426 
+5 log_dist           4.68 0.00234 0.000739
+6 log_dist_larger    3.80 0.00190 0.000600</a:t>
             </a:r>
           </a:p>
         </p:txBody>
@@ -15008,19 +17699,20 @@
             </a:pPr>
             <a:r>
               <a:rPr b="1"/>
-              <a:t>log_area 0.52</a:t>
-            </a:r>
-            <a:r>
-              <a:rPr/>
-              <a:t> versus </a:t>
-            </a:r>
-            <a:r>
-              <a:rPr b="1"/>
-              <a:t>grazing -0.39</a:t>
-            </a:r>
-            <a:r>
-              <a:rPr/>
-              <a:t> — area is about 1.3× the influence of grazing per standard deviation.</a:t>
+              <a:t>log_area</a:t>
+            </a:r>
+            <a:r>
+              <a:rPr/>
+              <a:t> carries pη² = 0.35 — 5.6× the next predictor.</a:t>
+            </a:r>
+          </a:p>
+          <a:p>
+            <a:pPr lvl="0" indent="0" marL="0">
+              <a:buNone/>
+            </a:pPr>
+            <a:r>
+              <a:rPr/>
+              <a:t>The two distance predictors sit at 0.002. That is nothing.</a:t>
             </a:r>
           </a:p>
           <a:p>
@@ -15038,7 +17730,7 @@
             </a:pPr>
             <a:r>
               <a:rPr sz="2000" b="1"/>
-              <a:t>✅ All three agree here</a:t>
+              <a:t>✅ Two columns, two questions</a:t>
             </a:r>
           </a:p>
           <a:p>
@@ -15047,15 +17739,32 @@
             </a:pPr>
             <a:r>
               <a:rPr sz="2000"/>
-              <a:t>Partial F, partial R² and standardized slopes all rank area above grazing. When they </a:t>
-            </a:r>
-            <a:r>
-              <a:rPr sz="2000" i="1"/>
-              <a:t>disagree</a:t>
+              <a:t>pη² </a:t>
+            </a:r>
+            <a:r>
+              <a:rPr sz="2000" b="1"/>
+              <a:t>ranks</a:t>
             </a:r>
             <a:r>
               <a:rPr sz="2000"/>
-              <a:t>, that is worth reporting — it usually means the predictors are tangled.</a:t>
+              <a:t> the predictors. ΔR² says what each one </a:t>
+            </a:r>
+            <a:r>
+              <a:rPr sz="2000" b="1"/>
+              <a:t>uniquely buys</a:t>
+            </a:r>
+            <a:r>
+              <a:rPr sz="2000"/>
+              <a:t> — what R² would lose if you dropped it.</a:t>
+            </a:r>
+          </a:p>
+          <a:p>
+            <a:pPr lvl="0" indent="0" marL="0">
+              <a:buNone/>
+            </a:pPr>
+            <a:r>
+              <a:rPr/>
+              <a:t>A fourth route to the same answer the vote, the t-tests and AIC already gave you.</a:t>
             </a:r>
           </a:p>
         </p:txBody>
@@ -15065,236 +17774,7 @@
 </p:sld>
 </file>
 
-<file path=ppt/slides/slide51.xml><?xml version="1.0" encoding="utf-8"?>
-<p:sld xmlns:a="http://schemas.openxmlformats.org/drawingml/2006/main" xmlns:r="http://schemas.openxmlformats.org/officeDocument/2006/relationships" xmlns:p="http://schemas.openxmlformats.org/presentationml/2006/main">
-  <p:cSld>
-    <p:spTree>
-      <p:nvGrpSpPr>
-        <p:cNvPr id="1" name=""/>
-        <p:cNvGrpSpPr/>
-        <p:nvPr/>
-      </p:nvGrpSpPr>
-      <p:grpSpPr>
-        <a:xfrm>
-          <a:off x="0" y="0"/>
-          <a:ext cx="0" cy="0"/>
-          <a:chOff x="0" y="0"/>
-          <a:chExt cx="0" cy="0"/>
-        </a:xfrm>
-      </p:grpSpPr>
-      <p:sp>
-        <p:nvSpPr>
-          <p:cNvPr id="2" name="Title 1"/>
-          <p:cNvSpPr>
-            <a:spLocks noGrp="1"/>
-          </p:cNvSpPr>
-          <p:nvPr>
-            <p:ph type="title"/>
-          </p:nvPr>
-        </p:nvSpPr>
-        <p:spPr>
-          <a:xfrm>
-            <a:off x="0" y="0"/>
-            <a:ext cx="9144000" cy="582780"/>
-          </a:xfrm>
-        </p:spPr>
-        <p:txBody>
-          <a:bodyPr/>
-          <a:lstStyle/>
-          <a:p>
-            <a:pPr lvl="0" indent="0" marL="0">
-              <a:buNone/>
-            </a:pPr>
-            <a:r>
-              <a:rPr/>
-              <a:t>Wrap-up</a:t>
-            </a:r>
-          </a:p>
-        </p:txBody>
-      </p:sp>
-      <p:sp>
-        <p:nvSpPr>
-          <p:cNvPr id="3" name="Content Placeholder 2"/>
-          <p:cNvSpPr>
-            <a:spLocks noGrp="1"/>
-          </p:cNvSpPr>
-          <p:nvPr>
-            <p:ph idx="1"/>
-          </p:nvPr>
-        </p:nvSpPr>
-        <p:spPr/>
-        <p:txBody>
-          <a:bodyPr/>
-          <a:lstStyle/>
-          <a:p>
-            <a:pPr lvl="0" indent="0" marL="0">
-              <a:buNone/>
-            </a:pPr>
-            <a:r>
-              <a:rPr/>
-              <a:t>Today you:</a:t>
-            </a:r>
-          </a:p>
-          <a:p>
-            <a:pPr lvl="0"/>
-            <a:r>
-              <a:rPr/>
-              <a:t>Extended the regression line to a </a:t>
-            </a:r>
-            <a:r>
-              <a:rPr b="1"/>
-              <a:t>plane</a:t>
-            </a:r>
-            <a:r>
-              <a:rPr/>
-              <a:t>, and fitted 56 forest patches against six predictors at once</a:t>
-            </a:r>
-          </a:p>
-          <a:p>
-            <a:pPr lvl="0"/>
-            <a:r>
-              <a:rPr/>
-              <a:t>Watched four predictors that were significant alone collapse to </a:t>
-            </a:r>
-            <a:r>
-              <a:rPr b="1"/>
-              <a:t>one</a:t>
-            </a:r>
-            <a:r>
-              <a:rPr/>
-              <a:t> in the model together</a:t>
-            </a:r>
-          </a:p>
-          <a:p>
-            <a:pPr lvl="0"/>
-            <a:r>
-              <a:rPr/>
-              <a:t>Read a </a:t>
-            </a:r>
-            <a:r>
-              <a:rPr b="1"/>
-              <a:t>partial slope</a:t>
-            </a:r>
-            <a:r>
-              <a:rPr/>
-              <a:t> as a conditional statement, and saw that neither it nor the simple slope is “wrong”</a:t>
-            </a:r>
-          </a:p>
-          <a:p>
-            <a:pPr lvl="0"/>
-            <a:r>
-              <a:rPr/>
-              <a:t>Tested groups of predictors with </a:t>
-            </a:r>
-            <a:r>
-              <a:rPr>
-                <a:latin typeface="Courier"/>
-              </a:rPr>
-              <a:t>anova(reduced, full)</a:t>
-            </a:r>
-            <a:r>
-              <a:rPr/>
-              <a:t> and single ones with the t-tests in </a:t>
-            </a:r>
-            <a:r>
-              <a:rPr>
-                <a:latin typeface="Courier"/>
-              </a:rPr>
-              <a:t>summary()</a:t>
-            </a:r>
-          </a:p>
-          <a:p>
-            <a:pPr lvl="0"/>
-            <a:r>
-              <a:rPr/>
-              <a:t>Diagnosed </a:t>
-            </a:r>
-            <a:r>
-              <a:rPr b="1"/>
-              <a:t>collinearity</a:t>
-            </a:r>
-            <a:r>
-              <a:rPr/>
-              <a:t> with </a:t>
-            </a:r>
-            <a:r>
-              <a:rPr>
-                <a:latin typeface="Courier"/>
-              </a:rPr>
-              <a:t>vif()</a:t>
-            </a:r>
-            <a:r>
-              <a:rPr/>
-              <a:t>, and learned to say “these data cannot separate them” instead of “it has no effect”</a:t>
-            </a:r>
-          </a:p>
-          <a:p>
-            <a:pPr lvl="0"/>
-            <a:r>
-              <a:rPr/>
-              <a:t>Fitted a real </a:t>
-            </a:r>
-            <a:r>
-              <a:rPr b="1"/>
-              <a:t>interaction</a:t>
-            </a:r>
-            <a:r>
-              <a:rPr/>
-              <a:t> — fragmentation costs more where grazing is heavy</a:t>
-            </a:r>
-          </a:p>
-          <a:p>
-            <a:pPr lvl="0"/>
-            <a:r>
-              <a:rPr/>
-              <a:t>Turned a categorical predictor into </a:t>
-            </a:r>
-            <a:r>
-              <a:rPr b="1"/>
-              <a:t>dummy variables</a:t>
-            </a:r>
-            <a:r>
-              <a:rPr/>
-              <a:t>, and set the reference level on purpose with </a:t>
-            </a:r>
-            <a:r>
-              <a:rPr>
-                <a:latin typeface="Courier"/>
-              </a:rPr>
-              <a:t>fct_relevel()</a:t>
-            </a:r>
-          </a:p>
-          <a:p>
-            <a:pPr lvl="0"/>
-            <a:r>
-              <a:rPr/>
-              <a:t>Compared models with </a:t>
-            </a:r>
-            <a:r>
-              <a:rPr b="1"/>
-              <a:t>adjusted R²</a:t>
-            </a:r>
-            <a:r>
-              <a:rPr/>
-              <a:t> and </a:t>
-            </a:r>
-            <a:r>
-              <a:rPr b="1"/>
-              <a:t>AIC</a:t>
-            </a:r>
-            <a:r>
-              <a:rPr/>
-              <a:t>, and ranked predictors three different ways</a:t>
-            </a:r>
-          </a:p>
-        </p:txBody>
-      </p:sp>
-    </p:spTree>
-  </p:cSld>
-</p:sld>
-</file>
-
-<file path=ppt/slides/slide52.xml><?xml version="1.0" encoding="utf-8"?>
+<file path=ppt/slides/slide55.xml><?xml version="1.0" encoding="utf-8"?>
 <p:sld xmlns:a="http://schemas.openxmlformats.org/drawingml/2006/main" xmlns:r="http://schemas.openxmlformats.org/officeDocument/2006/relationships" xmlns:p="http://schemas.openxmlformats.org/presentationml/2006/main">
   <p:cSld>
     <p:spTree>
@@ -15339,7 +17819,7 @@
             </a:pPr>
             <a:r>
               <a:rPr/>
-              <a:t>The Three Things to Carry Out of Here</a:t>
+              <a:t>The Trap in the ΔR² Column</a:t>
             </a:r>
           </a:p>
         </p:txBody>
@@ -15359,57 +17839,71 @@
           <a:bodyPr/>
           <a:lstStyle/>
           <a:p>
-            <a:pPr lvl="0" indent="0" marL="1270000">
-              <a:buNone/>
-            </a:pPr>
-            <a:r>
-              <a:rPr sz="2000" b="1"/>
-              <a:t>Important</a:t>
-            </a:r>
-          </a:p>
-          <a:p>
-            <a:pPr lvl="0" indent="0" marL="1270000">
-              <a:buNone/>
-            </a:pPr>
-            <a:r>
-              <a:rPr sz="2000" b="1"/>
-              <a:t>⚠️ R² always rises</a:t>
-            </a:r>
-          </a:p>
-          <a:p>
-            <a:pPr lvl="0" indent="0" marL="1270000">
-              <a:buNone/>
-            </a:pPr>
-            <a:r>
-              <a:rPr sz="2000"/>
-              <a:t>Adding predictors can only increase plain R². Adjusted R² and AIC exist precisely because “explains more variance” is not the same as “is a better model.”</a:t>
-            </a:r>
-          </a:p>
-          <a:p>
-            <a:pPr lvl="0" indent="0" marL="1270000">
-              <a:buNone/>
-            </a:pPr>
-            <a:r>
-              <a:rPr sz="2000" b="1"/>
-              <a:t>Note</a:t>
-            </a:r>
-          </a:p>
-          <a:p>
-            <a:pPr lvl="0" indent="0" marL="1270000">
-              <a:buNone/>
-            </a:pPr>
-            <a:r>
-              <a:rPr sz="2000" b="1"/>
-              <a:t>✅ A partial slope is conditional</a:t>
-            </a:r>
-          </a:p>
-          <a:p>
-            <a:pPr lvl="0" indent="0" marL="1270000">
-              <a:buNone/>
-            </a:pPr>
-            <a:r>
-              <a:rPr sz="2000"/>
-              <a:t>“What does area do among patches grazed the same amount?” Change what else is in the model and you have changed the question.</a:t>
+            <a:pPr lvl="0" indent="0" marL="0">
+              <a:buNone/>
+            </a:pPr>
+            <a:r>
+              <a:rPr/>
+              <a:t>Add up the ΔR² column: </a:t>
+            </a:r>
+            <a:r>
+              <a:rPr b="1"/>
+              <a:t>0.211</a:t>
+            </a:r>
+            <a:r>
+              <a:rPr/>
+              <a:t>.</a:t>
+            </a:r>
+          </a:p>
+          <a:p>
+            <a:pPr lvl="0" indent="0" marL="0">
+              <a:buNone/>
+            </a:pPr>
+            <a:r>
+              <a:rPr/>
+              <a:t>The model’s R² is </a:t>
+            </a:r>
+            <a:r>
+              <a:rPr b="1"/>
+              <a:t>0.685</a:t>
+            </a:r>
+            <a:r>
+              <a:rPr/>
+              <a:t>.</a:t>
+            </a:r>
+          </a:p>
+          <a:p>
+            <a:pPr lvl="0" indent="0" marL="0">
+              <a:buNone/>
+            </a:pPr>
+            <a:r>
+              <a:rPr/>
+              <a:t>So where did the other 0.47 of explained variance go?</a:t>
+            </a:r>
+          </a:p>
+          <a:p>
+            <a:pPr lvl="0" indent="0" marL="0">
+              <a:buNone/>
+            </a:pPr>
+            <a:r>
+              <a:rPr/>
+              <a:t>It is real, and it is </a:t>
+            </a:r>
+            <a:r>
+              <a:rPr b="1"/>
+              <a:t>shared</a:t>
+            </a:r>
+            <a:r>
+              <a:rPr/>
+              <a:t>. ΔR² only counts the variance a predictor explains that </a:t>
+            </a:r>
+            <a:r>
+              <a:rPr i="1"/>
+              <a:t>nothing else can</a:t>
+            </a:r>
+            <a:r>
+              <a:rPr/>
+              <a:t>. Variance that two collinear predictors could each account for belongs to neither of them, so it appears in R² and in no row of this table.</a:t>
             </a:r>
           </a:p>
         </p:txBody>
@@ -15443,7 +17937,7 @@
             </a:pPr>
             <a:r>
               <a:rPr sz="2000" b="1"/>
-              <a:t>✅ Set your reference level</a:t>
+              <a:t>⚠️ Do not toss on pη² alone</a:t>
             </a:r>
           </a:p>
           <a:p>
@@ -15451,33 +17945,49 @@
               <a:buNone/>
             </a:pPr>
             <a:r>
+              <a:rPr sz="2000"/>
+              <a:t>A predictor can have a tiny pη² for two completely different reasons:</a:t>
+            </a:r>
+          </a:p>
+          <a:p>
+            <a:pPr lvl="0" indent="-342900" marL="342900">
+              <a:buAutoNum type="arabicPeriod"/>
+            </a:pPr>
+            <a:r>
+              <a:rPr sz="2000"/>
+              <a:t>It genuinely does nothing — </a:t>
+            </a:r>
+            <a:r>
+              <a:rPr sz="2000" b="1"/>
+              <a:t>toss it</a:t>
+            </a:r>
+          </a:p>
+          <a:p>
+            <a:pPr lvl="0" indent="-342900" marL="342900">
+              <a:buAutoNum type="arabicPeriod"/>
+            </a:pPr>
+            <a:r>
+              <a:rPr sz="2000"/>
+              <a:t>It is tangled with a predictor already in the model — </a:t>
+            </a:r>
+            <a:r>
               <a:rPr sz="2000">
                 <a:latin typeface="Courier"/>
               </a:rPr>
-              <a:t>factor()</a:t>
+              <a:t>vif()</a:t>
             </a:r>
             <a:r>
               <a:rPr sz="2000"/>
-              <a:t> sorts alphabetically. Your control is almost never first alphabetically — use </a:t>
-            </a:r>
-            <a:r>
-              <a:rPr sz="2000">
-                <a:latin typeface="Courier"/>
-              </a:rPr>
-              <a:t>fct_relevel()</a:t>
-            </a:r>
+              <a:t> from Part 5 is how you tell the difference</a:t>
+            </a:r>
+          </a:p>
+          <a:p>
+            <a:pPr lvl="0" indent="0" marL="1270000">
+              <a:buNone/>
+            </a:pPr>
             <a:r>
               <a:rPr sz="2000"/>
-              <a:t> and make the output say what you meant.</a:t>
-            </a:r>
-          </a:p>
-          <a:p>
-            <a:pPr lvl="0" indent="0" marL="1270000">
-              <a:buNone/>
-            </a:pPr>
-            <a:r>
-              <a:rPr sz="2000"/>
-              <a:t>This is the habit that makes every ANOVA from Week 8 onward readable.</a:t>
+              <a:t>Drop it for reason 2 and you have not learned it has no effect — only that these data cannot separate it from its partner.</a:t>
             </a:r>
           </a:p>
           <a:p>
@@ -15495,7 +18005,7 @@
             </a:pPr>
             <a:r>
               <a:rPr sz="2000" b="1"/>
-              <a:t>Up next — Analysis of Variance</a:t>
+              <a:t>✅ How to use these</a:t>
             </a:r>
           </a:p>
           <a:p>
@@ -15504,15 +18014,33 @@
             </a:pPr>
             <a:r>
               <a:rPr sz="2000"/>
-              <a:t>What happens when </a:t>
+              <a:t>pη² to </a:t>
             </a:r>
             <a:r>
               <a:rPr sz="2000" b="1"/>
-              <a:t>every</a:t>
+              <a:t>rank</a:t>
             </a:r>
             <a:r>
               <a:rPr sz="2000"/>
-              <a:t> predictor is categorical, and why ANOVA and regression are the same machinery in different clothes.</a:t>
+              <a:t>, ΔR² to see what each predictor </a:t>
+            </a:r>
+            <a:r>
+              <a:rPr sz="2000" b="1"/>
+              <a:t>uniquely buys you</a:t>
+            </a:r>
+            <a:r>
+              <a:rPr sz="2000"/>
+              <a:t>, </a:t>
+            </a:r>
+            <a:r>
+              <a:rPr sz="2000">
+                <a:latin typeface="Courier"/>
+              </a:rPr>
+              <a:t>vif()</a:t>
+            </a:r>
+            <a:r>
+              <a:rPr sz="2000"/>
+              <a:t> to decide whether a small value means “useless” or “redundant.”</a:t>
             </a:r>
           </a:p>
         </p:txBody>
@@ -15522,7 +18050,7 @@
 </p:sld>
 </file>
 
-<file path=ppt/slides/slide53.xml><?xml version="1.0" encoding="utf-8"?>
+<file path=ppt/slides/slide56.xml><?xml version="1.0" encoding="utf-8"?>
 <p:sld xmlns:a="http://schemas.openxmlformats.org/drawingml/2006/main" xmlns:r="http://schemas.openxmlformats.org/officeDocument/2006/relationships" xmlns:p="http://schemas.openxmlformats.org/presentationml/2006/main">
   <p:cSld>
     <p:spTree>
@@ -15564,7 +18092,7 @@
             </a:pPr>
             <a:r>
               <a:rPr/>
-              <a:t>Readings</a:t>
+              <a:t>Wrap-up</a:t>
             </a:r>
           </a:p>
         </p:txBody>
@@ -15584,59 +18112,164 @@
           <a:bodyPr/>
           <a:lstStyle/>
           <a:p>
+            <a:pPr lvl="0" indent="0" marL="0">
+              <a:buNone/>
+            </a:pPr>
+            <a:r>
+              <a:rPr/>
+              <a:t>Today you:</a:t>
+            </a:r>
+          </a:p>
+          <a:p>
             <a:pPr lvl="0"/>
             <a:r>
+              <a:rPr/>
+              <a:t>Extended the regression line to a </a:t>
+            </a:r>
+            <a:r>
               <a:rPr b="1"/>
-              <a:t>Quinn, G. P., &amp; Keough, M. J.</a:t>
-            </a:r>
-            <a:r>
-              <a:rPr/>
-              <a:t> (2002). </a:t>
-            </a:r>
-            <a:r>
-              <a:rPr i="1"/>
-              <a:t>Experimental Design and Data Analysis for Biologists</a:t>
-            </a:r>
-            <a:r>
-              <a:rPr/>
-              <a:t>, Ch. 6 — Multiple and Complex Regression. This lecture follows their Box 6-2 analysis of the Loyn data.</a:t>
+              <a:t>plane</a:t>
+            </a:r>
+            <a:r>
+              <a:rPr/>
+              <a:t>, and fitted 56 forest patches against six predictors at once</a:t>
             </a:r>
           </a:p>
           <a:p>
             <a:pPr lvl="0"/>
             <a:r>
+              <a:rPr/>
+              <a:t>Watched four predictors that were significant alone collapse to </a:t>
+            </a:r>
+            <a:r>
               <a:rPr b="1"/>
-              <a:t>Whitlock &amp; Schluter</a:t>
-            </a:r>
-            <a:r>
-              <a:rPr/>
-              <a:t>, Ch. 17 — Regression.</a:t>
+              <a:t>one</a:t>
+            </a:r>
+            <a:r>
+              <a:rPr/>
+              <a:t> in the model together</a:t>
             </a:r>
           </a:p>
           <a:p>
             <a:pPr lvl="0"/>
             <a:r>
+              <a:rPr/>
+              <a:t>Read a </a:t>
+            </a:r>
+            <a:r>
               <a:rPr b="1"/>
-              <a:t>Gotelli &amp; Ellison</a:t>
-            </a:r>
-            <a:r>
-              <a:rPr/>
-              <a:t>, Ch. 9 — Regression.</a:t>
+              <a:t>partial slope</a:t>
+            </a:r>
+            <a:r>
+              <a:rPr/>
+              <a:t> as a conditional statement, and saw that neither it nor the simple slope is “wrong”</a:t>
             </a:r>
           </a:p>
           <a:p>
             <a:pPr lvl="0"/>
             <a:r>
               <a:rPr/>
-              <a:t>Loyn, R. H. (1987). Effects of patch area and habitat on bird abundances, species numbers and tree health in fragmented Victorian forests. In </a:t>
-            </a:r>
-            <a:r>
-              <a:rPr i="1"/>
-              <a:t>Nature Conservation: The Role of Remnants of Native Vegetation</a:t>
-            </a:r>
-            <a:r>
-              <a:rPr/>
-              <a:t>. Surrey Beatty &amp; Sons.</a:t>
+              <a:t>Tested groups of predictors with </a:t>
+            </a:r>
+            <a:r>
+              <a:rPr>
+                <a:latin typeface="Courier"/>
+              </a:rPr>
+              <a:t>anova(reduced, full)</a:t>
+            </a:r>
+            <a:r>
+              <a:rPr/>
+              <a:t> and single ones with the t-tests in </a:t>
+            </a:r>
+            <a:r>
+              <a:rPr>
+                <a:latin typeface="Courier"/>
+              </a:rPr>
+              <a:t>summary()</a:t>
+            </a:r>
+          </a:p>
+          <a:p>
+            <a:pPr lvl="0"/>
+            <a:r>
+              <a:rPr/>
+              <a:t>Diagnosed </a:t>
+            </a:r>
+            <a:r>
+              <a:rPr b="1"/>
+              <a:t>collinearity</a:t>
+            </a:r>
+            <a:r>
+              <a:rPr/>
+              <a:t> with </a:t>
+            </a:r>
+            <a:r>
+              <a:rPr>
+                <a:latin typeface="Courier"/>
+              </a:rPr>
+              <a:t>vif()</a:t>
+            </a:r>
+            <a:r>
+              <a:rPr/>
+              <a:t>, and learned to say “these data cannot separate them” instead of “it has no effect”</a:t>
+            </a:r>
+          </a:p>
+          <a:p>
+            <a:pPr lvl="0"/>
+            <a:r>
+              <a:rPr/>
+              <a:t>Fitted a real </a:t>
+            </a:r>
+            <a:r>
+              <a:rPr b="1"/>
+              <a:t>interaction</a:t>
+            </a:r>
+            <a:r>
+              <a:rPr/>
+              <a:t> — fragmentation costs more where grazing is heavy</a:t>
+            </a:r>
+          </a:p>
+          <a:p>
+            <a:pPr lvl="0"/>
+            <a:r>
+              <a:rPr/>
+              <a:t>Turned a categorical predictor into </a:t>
+            </a:r>
+            <a:r>
+              <a:rPr b="1"/>
+              <a:t>dummy variables</a:t>
+            </a:r>
+            <a:r>
+              <a:rPr/>
+              <a:t>, and set the reference level on purpose with </a:t>
+            </a:r>
+            <a:r>
+              <a:rPr>
+                <a:latin typeface="Courier"/>
+              </a:rPr>
+              <a:t>fct_relevel()</a:t>
+            </a:r>
+          </a:p>
+          <a:p>
+            <a:pPr lvl="0"/>
+            <a:r>
+              <a:rPr/>
+              <a:t>Compared models with </a:t>
+            </a:r>
+            <a:r>
+              <a:rPr b="1"/>
+              <a:t>adjusted R²</a:t>
+            </a:r>
+            <a:r>
+              <a:rPr/>
+              <a:t> and </a:t>
+            </a:r>
+            <a:r>
+              <a:rPr b="1"/>
+              <a:t>AIC</a:t>
+            </a:r>
+            <a:r>
+              <a:rPr/>
+              <a:t>, and ranked predictors by partial η², ΔR² and standardized slopes to decide what to keep</a:t>
             </a:r>
           </a:p>
         </p:txBody>
@@ -15646,7 +18279,235 @@
 </p:sld>
 </file>
 
-<file path=ppt/slides/slide54.xml><?xml version="1.0" encoding="utf-8"?>
+<file path=ppt/slides/slide57.xml><?xml version="1.0" encoding="utf-8"?>
+<p:sld xmlns:a="http://schemas.openxmlformats.org/drawingml/2006/main" xmlns:r="http://schemas.openxmlformats.org/officeDocument/2006/relationships" xmlns:p="http://schemas.openxmlformats.org/presentationml/2006/main">
+  <p:cSld>
+    <p:spTree>
+      <p:nvGrpSpPr>
+        <p:cNvPr id="1" name=""/>
+        <p:cNvGrpSpPr/>
+        <p:nvPr/>
+      </p:nvGrpSpPr>
+      <p:grpSpPr>
+        <a:xfrm>
+          <a:off x="0" y="0"/>
+          <a:ext cx="0" cy="0"/>
+          <a:chOff x="0" y="0"/>
+          <a:chExt cx="0" cy="0"/>
+        </a:xfrm>
+      </p:grpSpPr>
+      <p:sp>
+        <p:nvSpPr>
+          <p:cNvPr id="2" name="Title 1"/>
+          <p:cNvSpPr>
+            <a:spLocks noGrp="1"/>
+          </p:cNvSpPr>
+          <p:nvPr>
+            <p:ph type="title"/>
+          </p:nvPr>
+        </p:nvSpPr>
+        <p:spPr>
+          <a:xfrm>
+            <a:off x="0" y="0"/>
+            <a:ext cx="9144000" cy="602780"/>
+          </a:xfrm>
+          <a:solidFill>
+            <a:srgbClr val="70121D"/>
+          </a:solidFill>
+        </p:spPr>
+        <p:txBody>
+          <a:bodyPr/>
+          <a:lstStyle/>
+          <a:p>
+            <a:pPr lvl="0" indent="0" marL="0">
+              <a:buNone/>
+            </a:pPr>
+            <a:r>
+              <a:rPr/>
+              <a:t>The Three Things to Carry Out of Here</a:t>
+            </a:r>
+          </a:p>
+        </p:txBody>
+      </p:sp>
+      <p:sp>
+        <p:nvSpPr>
+          <p:cNvPr id="3" name="Content Placeholder 2"/>
+          <p:cNvSpPr>
+            <a:spLocks noGrp="1"/>
+          </p:cNvSpPr>
+          <p:nvPr>
+            <p:ph idx="1" sz="half"/>
+          </p:nvPr>
+        </p:nvSpPr>
+        <p:spPr/>
+        <p:txBody>
+          <a:bodyPr/>
+          <a:lstStyle/>
+          <a:p>
+            <a:pPr lvl="0" indent="0" marL="1270000">
+              <a:buNone/>
+            </a:pPr>
+            <a:r>
+              <a:rPr sz="2000" b="1"/>
+              <a:t>Important</a:t>
+            </a:r>
+          </a:p>
+          <a:p>
+            <a:pPr lvl="0" indent="0" marL="1270000">
+              <a:buNone/>
+            </a:pPr>
+            <a:r>
+              <a:rPr sz="2000" b="1"/>
+              <a:t>⚠️ R² always rises</a:t>
+            </a:r>
+          </a:p>
+          <a:p>
+            <a:pPr lvl="0" indent="0" marL="1270000">
+              <a:buNone/>
+            </a:pPr>
+            <a:r>
+              <a:rPr sz="2000"/>
+              <a:t>Adding predictors can only increase plain R². Adjusted R² and AIC exist precisely because “explains more variance” is not the same as “is a better model.”</a:t>
+            </a:r>
+          </a:p>
+          <a:p>
+            <a:pPr lvl="0" indent="0" marL="1270000">
+              <a:buNone/>
+            </a:pPr>
+            <a:r>
+              <a:rPr sz="2000" b="1"/>
+              <a:t>Note</a:t>
+            </a:r>
+          </a:p>
+          <a:p>
+            <a:pPr lvl="0" indent="0" marL="1270000">
+              <a:buNone/>
+            </a:pPr>
+            <a:r>
+              <a:rPr sz="2000" b="1"/>
+              <a:t>✅ A partial slope is conditional</a:t>
+            </a:r>
+          </a:p>
+          <a:p>
+            <a:pPr lvl="0" indent="0" marL="1270000">
+              <a:buNone/>
+            </a:pPr>
+            <a:r>
+              <a:rPr sz="2000"/>
+              <a:t>“What does area do among patches grazed the same amount?” Change what else is in the model and you have changed the question.</a:t>
+            </a:r>
+          </a:p>
+        </p:txBody>
+      </p:sp>
+      <p:sp>
+        <p:nvSpPr>
+          <p:cNvPr id="4" name="Content Placeholder 3"/>
+          <p:cNvSpPr>
+            <a:spLocks noGrp="1"/>
+          </p:cNvSpPr>
+          <p:nvPr>
+            <p:ph idx="2" sz="half"/>
+          </p:nvPr>
+        </p:nvSpPr>
+        <p:spPr/>
+        <p:txBody>
+          <a:bodyPr/>
+          <a:lstStyle/>
+          <a:p>
+            <a:pPr lvl="0" indent="0" marL="1270000">
+              <a:buNone/>
+            </a:pPr>
+            <a:r>
+              <a:rPr sz="2000" b="1"/>
+              <a:t>Important</a:t>
+            </a:r>
+          </a:p>
+          <a:p>
+            <a:pPr lvl="0" indent="0" marL="1270000">
+              <a:buNone/>
+            </a:pPr>
+            <a:r>
+              <a:rPr sz="2000" b="1"/>
+              <a:t>✅ Set your reference level</a:t>
+            </a:r>
+          </a:p>
+          <a:p>
+            <a:pPr lvl="0" indent="0" marL="1270000">
+              <a:buNone/>
+            </a:pPr>
+            <a:r>
+              <a:rPr sz="2000">
+                <a:latin typeface="Courier"/>
+              </a:rPr>
+              <a:t>factor()</a:t>
+            </a:r>
+            <a:r>
+              <a:rPr sz="2000"/>
+              <a:t> sorts alphabetically. Your control is almost never first alphabetically — use </a:t>
+            </a:r>
+            <a:r>
+              <a:rPr sz="2000">
+                <a:latin typeface="Courier"/>
+              </a:rPr>
+              <a:t>fct_relevel()</a:t>
+            </a:r>
+            <a:r>
+              <a:rPr sz="2000"/>
+              <a:t> and make the output say what you meant.</a:t>
+            </a:r>
+          </a:p>
+          <a:p>
+            <a:pPr lvl="0" indent="0" marL="1270000">
+              <a:buNone/>
+            </a:pPr>
+            <a:r>
+              <a:rPr sz="2000"/>
+              <a:t>This is the habit that makes every ANOVA from Week 8 onward readable.</a:t>
+            </a:r>
+          </a:p>
+          <a:p>
+            <a:pPr lvl="0" indent="0" marL="1270000">
+              <a:buNone/>
+            </a:pPr>
+            <a:r>
+              <a:rPr sz="2000" b="1"/>
+              <a:t>Note</a:t>
+            </a:r>
+          </a:p>
+          <a:p>
+            <a:pPr lvl="0" indent="0" marL="1270000">
+              <a:buNone/>
+            </a:pPr>
+            <a:r>
+              <a:rPr sz="2000" b="1"/>
+              <a:t>Up next — Analysis of Variance</a:t>
+            </a:r>
+          </a:p>
+          <a:p>
+            <a:pPr lvl="0" indent="0" marL="1270000">
+              <a:buNone/>
+            </a:pPr>
+            <a:r>
+              <a:rPr sz="2000"/>
+              <a:t>What happens when </a:t>
+            </a:r>
+            <a:r>
+              <a:rPr sz="2000" b="1"/>
+              <a:t>every</a:t>
+            </a:r>
+            <a:r>
+              <a:rPr sz="2000"/>
+              <a:t> predictor is categorical, and why ANOVA and regression are the same machinery in different clothes.</a:t>
+            </a:r>
+          </a:p>
+        </p:txBody>
+      </p:sp>
+    </p:spTree>
+  </p:cSld>
+</p:sld>
+</file>
+
+<file path=ppt/slides/slide58.xml><?xml version="1.0" encoding="utf-8"?>
 <p:sld xmlns:a="http://schemas.openxmlformats.org/drawingml/2006/main" xmlns:r="http://schemas.openxmlformats.org/officeDocument/2006/relationships" xmlns:p="http://schemas.openxmlformats.org/presentationml/2006/main">
   <p:cSld>
     <p:spTree>
@@ -15688,7 +18549,7 @@
             </a:pPr>
             <a:r>
               <a:rPr/>
-              <a:t>Getting unstuck</a:t>
+              <a:t>Readings</a:t>
             </a:r>
           </a:p>
         </p:txBody>
@@ -15708,165 +18569,59 @@
           <a:bodyPr/>
           <a:lstStyle/>
           <a:p>
-            <a:pPr lvl="0" indent="0" marL="0">
-              <a:buNone/>
-            </a:pPr>
-            <a:r>
-              <a:rPr/>
-              <a:t>When code breaks — and it will, that is normal:</a:t>
-            </a:r>
-          </a:p>
-          <a:p>
-            <a:pPr lvl="0" indent="-342900" marL="342900">
-              <a:buAutoNum type="arabicPeriod"/>
-            </a:pPr>
-            <a:r>
-              <a:rPr/>
-              <a:t>Read the </a:t>
-            </a:r>
+            <a:pPr lvl="0"/>
             <a:r>
               <a:rPr b="1"/>
-              <a:t>error message</a:t>
-            </a:r>
-            <a:r>
-              <a:rPr/>
-              <a:t> out loud; it usually names the line</a:t>
-            </a:r>
-          </a:p>
-          <a:p>
-            <a:pPr lvl="0" indent="-342900" marL="342900">
-              <a:buAutoNum type="arabicPeriod"/>
-            </a:pPr>
-            <a:r>
-              <a:rPr/>
-              <a:t>Check the usual suspects: is it </a:t>
-            </a:r>
-            <a:r>
-              <a:rPr>
-                <a:latin typeface="Courier"/>
-              </a:rPr>
-              <a:t>y ~ x1 + x2</a:t>
-            </a:r>
-            <a:r>
-              <a:rPr/>
-              <a:t> (additive) or </a:t>
-            </a:r>
-            <a:r>
-              <a:rPr>
-                <a:latin typeface="Courier"/>
-              </a:rPr>
-              <a:t>y ~ x1 * x2</a:t>
-            </a:r>
-            <a:r>
-              <a:rPr/>
-              <a:t> (interaction)? Is </a:t>
-            </a:r>
-            <a:r>
-              <a:rPr>
-                <a:latin typeface="Courier"/>
-              </a:rPr>
-              <a:t>car</a:t>
-            </a:r>
-            <a:r>
-              <a:rPr/>
-              <a:t> loaded for </a:t>
-            </a:r>
-            <a:r>
-              <a:rPr>
-                <a:latin typeface="Courier"/>
-              </a:rPr>
-              <a:t>vif()</a:t>
-            </a:r>
-            <a:r>
-              <a:rPr/>
-              <a:t> and </a:t>
-            </a:r>
-            <a:r>
-              <a:rPr>
-                <a:latin typeface="Courier"/>
-              </a:rPr>
-              <a:t>Anova()</a:t>
-            </a:r>
-            <a:r>
-              <a:rPr/>
-              <a:t>? Are you comparing models fitted to the </a:t>
-            </a:r>
+              <a:t>Quinn, G. P., &amp; Keough, M. J.</a:t>
+            </a:r>
+            <a:r>
+              <a:rPr/>
+              <a:t> (2002). </a:t>
+            </a:r>
+            <a:r>
+              <a:rPr i="1"/>
+              <a:t>Experimental Design and Data Analysis for Biologists</a:t>
+            </a:r>
+            <a:r>
+              <a:rPr/>
+              <a:t>, Ch. 6 — Multiple and Complex Regression. This lecture follows their Box 6-2 analysis of the Loyn data.</a:t>
+            </a:r>
+          </a:p>
+          <a:p>
+            <a:pPr lvl="0"/>
             <a:r>
               <a:rPr b="1"/>
-              <a:t>same rows</a:t>
-            </a:r>
-            <a:r>
-              <a:rPr/>
-              <a:t> — an </a:t>
-            </a:r>
-            <a:r>
-              <a:rPr>
-                <a:latin typeface="Courier"/>
-              </a:rPr>
-              <a:t>NA</a:t>
-            </a:r>
-            <a:r>
-              <a:rPr/>
-              <a:t> in one predictor silently drops that row</a:t>
-            </a:r>
-          </a:p>
-          <a:p>
-            <a:pPr lvl="0" indent="-342900" marL="342900">
-              <a:buAutoNum type="arabicPeriod"/>
-            </a:pPr>
-            <a:r>
-              <a:rPr>
-                <a:latin typeface="Courier"/>
-              </a:rPr>
-              <a:t>?function_name</a:t>
-            </a:r>
-            <a:r>
-              <a:rPr/>
-              <a:t> opens the help page</a:t>
-            </a:r>
-          </a:p>
-          <a:p>
-            <a:pPr lvl="0" indent="-342900" marL="342900">
-              <a:buAutoNum type="arabicPeriod"/>
-            </a:pPr>
-            <a:r>
-              <a:rPr/>
-              <a:t>Bring the </a:t>
-            </a:r>
+              <a:t>Whitlock &amp; Schluter</a:t>
+            </a:r>
+            <a:r>
+              <a:rPr/>
+              <a:t>, Ch. 17 — Regression.</a:t>
+            </a:r>
+          </a:p>
+          <a:p>
+            <a:pPr lvl="0"/>
             <a:r>
               <a:rPr b="1"/>
-              <a:t>exact error</a:t>
-            </a:r>
-            <a:r>
-              <a:rPr/>
-              <a:t> (copy-paste it) to class or office hours</a:t>
-            </a:r>
-          </a:p>
-          <a:p>
-            <a:pPr lvl="0" indent="0" marL="1270000">
-              <a:buNone/>
-            </a:pPr>
-            <a:r>
-              <a:rPr sz="2000" b="1"/>
-              <a:t>Note</a:t>
-            </a:r>
-          </a:p>
-          <a:p>
-            <a:pPr lvl="0" indent="0" marL="1270000">
-              <a:buNone/>
-            </a:pPr>
-            <a:r>
-              <a:rPr sz="2000" b="1"/>
-              <a:t>✅ Key idea</a:t>
-            </a:r>
-          </a:p>
-          <a:p>
-            <a:pPr lvl="0" indent="0" marL="1270000">
-              <a:buNone/>
-            </a:pPr>
-            <a:r>
-              <a:rPr sz="2000"/>
-              <a:t>Every working scientist googles error messages daily. Getting stuck is not failing — it is the job.</a:t>
+              <a:t>Gotelli &amp; Ellison</a:t>
+            </a:r>
+            <a:r>
+              <a:rPr/>
+              <a:t>, Ch. 9 — Regression.</a:t>
+            </a:r>
+          </a:p>
+          <a:p>
+            <a:pPr lvl="0"/>
+            <a:r>
+              <a:rPr/>
+              <a:t>Loyn, R. H. (1987). Effects of patch area and habitat on bird abundances, species numbers and tree health in fragmented Victorian forests. In </a:t>
+            </a:r>
+            <a:r>
+              <a:rPr i="1"/>
+              <a:t>Nature Conservation: The Role of Remnants of Native Vegetation</a:t>
+            </a:r>
+            <a:r>
+              <a:rPr/>
+              <a:t>. Surrey Beatty &amp; Sons.</a:t>
             </a:r>
           </a:p>
         </p:txBody>
@@ -16358,11 +19113,11 @@
             </a:r>
             <a:r>
               <a:rPr b="1"/>
-              <a:t>all seven</a:t>
-            </a:r>
-            <a:r>
-              <a:rPr/>
-              <a:t> of those things at once, and they are not independent of each other — small patches tend to be grazed harder, and isolated patches tend to be older.</a:t>
+              <a:t>all six</a:t>
+            </a:r>
+            <a:r>
+              <a:rPr/>
+              <a:t> of those predictors at once, and they are not independent of each other — small patches tend to be grazed harder, and isolated patches tend to be older.</a:t>
             </a:r>
           </a:p>
           <a:p>
@@ -16701,7 +19456,7 @@
             </a:pPr>
             <a:r>
               <a:rPr/>
-              <a:t>Grazing looks like the strongest story in the dataset: every extra step of grazing intensity costs about </a:t>
+              <a:t>Grazing has the most quotable effect: every extra step of grazing intensity costs about </a:t>
             </a:r>
             <a:r>
               <a:rPr b="1"/>
@@ -16709,7 +19464,7 @@
             </a:r>
             <a:r>
               <a:rPr/>
-              <a:t>, at p = 6.90e-09.</a:t>
+              <a:t>, at p = 6.90e-09. Area is the better-supported one — smaller p, more variance explained.</a:t>
             </a:r>
           </a:p>
           <a:p>
